--- a/ParallelLSTM/result/성능개선 3 대곡교.pptx
+++ b/ParallelLSTM/result/성능개선 3 대곡교.pptx
@@ -279,7 +279,7 @@
           <a:p>
             <a:fld id="{B72759B8-7332-44BD-B1FF-13450B6DA7DC}" type="datetimeFigureOut">
               <a:rPr lang="ko-KR" altLang="en-US" smtClean="0"/>
-              <a:t>2025-12-24</a:t>
+              <a:t>2025-12-31</a:t>
             </a:fld>
             <a:endParaRPr lang="ko-KR" altLang="en-US"/>
           </a:p>
@@ -449,7 +449,7 @@
           <a:p>
             <a:fld id="{B72759B8-7332-44BD-B1FF-13450B6DA7DC}" type="datetimeFigureOut">
               <a:rPr lang="ko-KR" altLang="en-US" smtClean="0"/>
-              <a:t>2025-12-24</a:t>
+              <a:t>2025-12-31</a:t>
             </a:fld>
             <a:endParaRPr lang="ko-KR" altLang="en-US"/>
           </a:p>
@@ -629,7 +629,7 @@
           <a:p>
             <a:fld id="{B72759B8-7332-44BD-B1FF-13450B6DA7DC}" type="datetimeFigureOut">
               <a:rPr lang="ko-KR" altLang="en-US" smtClean="0"/>
-              <a:t>2025-12-24</a:t>
+              <a:t>2025-12-31</a:t>
             </a:fld>
             <a:endParaRPr lang="ko-KR" altLang="en-US"/>
           </a:p>
@@ -799,7 +799,7 @@
           <a:p>
             <a:fld id="{B72759B8-7332-44BD-B1FF-13450B6DA7DC}" type="datetimeFigureOut">
               <a:rPr lang="ko-KR" altLang="en-US" smtClean="0"/>
-              <a:t>2025-12-24</a:t>
+              <a:t>2025-12-31</a:t>
             </a:fld>
             <a:endParaRPr lang="ko-KR" altLang="en-US"/>
           </a:p>
@@ -1050,7 +1050,7 @@
           <a:p>
             <a:fld id="{B72759B8-7332-44BD-B1FF-13450B6DA7DC}" type="datetimeFigureOut">
               <a:rPr lang="ko-KR" altLang="en-US" smtClean="0"/>
-              <a:t>2025-12-24</a:t>
+              <a:t>2025-12-31</a:t>
             </a:fld>
             <a:endParaRPr lang="ko-KR" altLang="en-US"/>
           </a:p>
@@ -1282,7 +1282,7 @@
           <a:p>
             <a:fld id="{B72759B8-7332-44BD-B1FF-13450B6DA7DC}" type="datetimeFigureOut">
               <a:rPr lang="ko-KR" altLang="en-US" smtClean="0"/>
-              <a:t>2025-12-24</a:t>
+              <a:t>2025-12-31</a:t>
             </a:fld>
             <a:endParaRPr lang="ko-KR" altLang="en-US"/>
           </a:p>
@@ -1629,7 +1629,7 @@
           <a:p>
             <a:fld id="{B72759B8-7332-44BD-B1FF-13450B6DA7DC}" type="datetimeFigureOut">
               <a:rPr lang="ko-KR" altLang="en-US" smtClean="0"/>
-              <a:t>2025-12-24</a:t>
+              <a:t>2025-12-31</a:t>
             </a:fld>
             <a:endParaRPr lang="ko-KR" altLang="en-US"/>
           </a:p>
@@ -1747,7 +1747,7 @@
           <a:p>
             <a:fld id="{B72759B8-7332-44BD-B1FF-13450B6DA7DC}" type="datetimeFigureOut">
               <a:rPr lang="ko-KR" altLang="en-US" smtClean="0"/>
-              <a:t>2025-12-24</a:t>
+              <a:t>2025-12-31</a:t>
             </a:fld>
             <a:endParaRPr lang="ko-KR" altLang="en-US"/>
           </a:p>
@@ -1865,7 +1865,7 @@
           <a:p>
             <a:fld id="{B72759B8-7332-44BD-B1FF-13450B6DA7DC}" type="datetimeFigureOut">
               <a:rPr lang="ko-KR" altLang="en-US" smtClean="0"/>
-              <a:t>2025-12-24</a:t>
+              <a:t>2025-12-31</a:t>
             </a:fld>
             <a:endParaRPr lang="ko-KR" altLang="en-US"/>
           </a:p>
@@ -2149,7 +2149,7 @@
           <a:p>
             <a:fld id="{B72759B8-7332-44BD-B1FF-13450B6DA7DC}" type="datetimeFigureOut">
               <a:rPr lang="ko-KR" altLang="en-US" smtClean="0"/>
-              <a:t>2025-12-24</a:t>
+              <a:t>2025-12-31</a:t>
             </a:fld>
             <a:endParaRPr lang="ko-KR" altLang="en-US"/>
           </a:p>
@@ -2413,7 +2413,7 @@
           <a:p>
             <a:fld id="{B72759B8-7332-44BD-B1FF-13450B6DA7DC}" type="datetimeFigureOut">
               <a:rPr lang="ko-KR" altLang="en-US" smtClean="0"/>
-              <a:t>2025-12-24</a:t>
+              <a:t>2025-12-31</a:t>
             </a:fld>
             <a:endParaRPr lang="ko-KR" altLang="en-US"/>
           </a:p>
@@ -2627,7 +2627,7 @@
           <a:p>
             <a:fld id="{B72759B8-7332-44BD-B1FF-13450B6DA7DC}" type="datetimeFigureOut">
               <a:rPr lang="ko-KR" altLang="en-US" smtClean="0"/>
-              <a:t>2025-12-24</a:t>
+              <a:t>2025-12-31</a:t>
             </a:fld>
             <a:endParaRPr lang="ko-KR" altLang="en-US"/>
           </a:p>
@@ -3171,7 +3171,7 @@
           <p:nvPr>
             <p:extLst>
               <p:ext uri="{D42A27DB-BD31-4B8C-83A1-F6EECF244321}">
-                <p14:modId xmlns:p14="http://schemas.microsoft.com/office/powerpoint/2010/main" val="3773772448"/>
+                <p14:modId xmlns:p14="http://schemas.microsoft.com/office/powerpoint/2010/main" val="2249969914"/>
               </p:ext>
             </p:extLst>
           </p:nvPr>
@@ -3283,7 +3283,7 @@
                       </a:r>
                       <a:r>
                         <a:rPr lang="en-US" altLang="ko-KR" sz="1400" dirty="0"/>
-                        <a:t>-0.2437545822983267</a:t>
+                        <a:t>0.2091296404860017</a:t>
                       </a:r>
                     </a:p>
                     <a:p>
@@ -3294,7 +3294,7 @@
                       </a:r>
                       <a:r>
                         <a:rPr lang="en-US" altLang="ko-KR" sz="1400" dirty="0"/>
-                        <a:t>0.04935018567626799</a:t>
+                        <a:t>0.11075309459307643</a:t>
                       </a:r>
                     </a:p>
                     <a:p>
@@ -3305,7 +3305,7 @@
                       </a:r>
                       <a:r>
                         <a:rPr lang="en-US" altLang="ko-KR" sz="1400" dirty="0"/>
-                        <a:t>0.18286159541871813</a:t>
+                        <a:t>0.28849312014049944</a:t>
                       </a:r>
                     </a:p>
                     <a:p>
@@ -3316,7 +3316,7 @@
                       </a:r>
                       <a:r>
                         <a:rPr lang="en-US" altLang="ko-KR" sz="1400" dirty="0"/>
-                        <a:t>0.22214901682489616</a:t>
+                        <a:t>0.3327958752645177</a:t>
                       </a:r>
                       <a:endParaRPr lang="pt-BR" altLang="ko-KR" sz="1400" dirty="0"/>
                     </a:p>
@@ -3367,7 +3367,7 @@
                       </a:r>
                       <a:r>
                         <a:rPr lang="en-US" altLang="ko-KR" sz="1400" dirty="0"/>
-                        <a:t>0.8500162646896093</a:t>
+                        <a:t>0.5920753404002524</a:t>
                       </a:r>
                       <a:r>
                         <a:rPr lang="pt-BR" altLang="ko-KR" sz="1400" dirty="0"/>
@@ -3382,7 +3382,7 @@
                       </a:r>
                       <a:r>
                         <a:rPr lang="en-US" altLang="ko-KR" sz="1400" dirty="0"/>
-                        <a:t>0.04197159430678016</a:t>
+                        <a:t>0.3712760283068737</a:t>
                       </a:r>
                       <a:r>
                         <a:rPr lang="pt-BR" altLang="ko-KR" sz="1400" dirty="0"/>
@@ -3397,7 +3397,7 @@
                       </a:r>
                       <a:r>
                         <a:rPr lang="en-US" altLang="ko-KR" sz="1400" dirty="0"/>
-                        <a:t>0.14689570089181267</a:t>
+                        <a:t>0.47554510619905266</a:t>
                       </a:r>
                       <a:r>
                         <a:rPr lang="pt-BR" altLang="ko-KR" sz="1400" dirty="0"/>
@@ -3412,7 +3412,7 @@
                       </a:r>
                       <a:r>
                         <a:rPr lang="en-US" altLang="ko-KR" sz="1400" dirty="0"/>
-                        <a:t>0.2048697008021932</a:t>
+                        <a:t>0.6093242390606775</a:t>
                       </a:r>
                       <a:endParaRPr lang="ko-KR" altLang="en-US" sz="1400" b="0" dirty="0"/>
                     </a:p>
@@ -3473,7 +3473,7 @@
                       </a:r>
                       <a:r>
                         <a:rPr lang="en-US" altLang="ko-KR" sz="1400" dirty="0"/>
-                        <a:t>0.8895288897883276</a:t>
+                        <a:t>0.7620351947859629</a:t>
                       </a:r>
                       <a:r>
                         <a:rPr lang="pt-BR" altLang="ko-KR" sz="1400" dirty="0"/>
@@ -3488,7 +3488,7 @@
                       </a:r>
                       <a:r>
                         <a:rPr lang="en-US" altLang="ko-KR" sz="1400" dirty="0"/>
-                        <a:t>0.011082707267791009</a:t>
+                        <a:t>0.10988884198110321</a:t>
                       </a:r>
                       <a:r>
                         <a:rPr lang="pt-BR" altLang="ko-KR" sz="1400" dirty="0"/>
@@ -3503,7 +3503,7 @@
                       </a:r>
                       <a:r>
                         <a:rPr lang="en-US" altLang="ko-KR" sz="1400" dirty="0"/>
-                        <a:t>0.08337979230615827</a:t>
+                        <a:t>0.25544776280721027</a:t>
                       </a:r>
                       <a:r>
                         <a:rPr lang="pt-BR" altLang="ko-KR" sz="1400" dirty="0"/>
@@ -3518,7 +3518,7 @@
                       </a:r>
                       <a:r>
                         <a:rPr lang="en-US" altLang="ko-KR" sz="1400" dirty="0"/>
-                        <a:t>0.1052744378649965</a:t>
+                        <a:t>0.331494859660151</a:t>
                       </a:r>
                       <a:r>
                         <a:rPr lang="pt-BR" altLang="ko-KR" sz="1400" dirty="0"/>
@@ -3573,7 +3573,7 @@
                       </a:r>
                       <a:r>
                         <a:rPr lang="en-US" altLang="ko-KR" sz="1400" dirty="0"/>
-                        <a:t>0.7838021043271743</a:t>
+                        <a:t>0.5902563975559536</a:t>
                       </a:r>
                       <a:endParaRPr lang="pt-BR" altLang="ko-KR" sz="1400" dirty="0"/>
                     </a:p>
@@ -3585,7 +3585,7 @@
                       </a:r>
                       <a:r>
                         <a:rPr lang="en-US" altLang="ko-KR" sz="1400" dirty="0"/>
-                        <a:t>0.015242402057216858</a:t>
+                        <a:t>0.14222159340008522</a:t>
                       </a:r>
                       <a:r>
                         <a:rPr lang="pt-BR" altLang="ko-KR" sz="1400" dirty="0"/>
@@ -3600,7 +3600,7 @@
                       </a:r>
                       <a:r>
                         <a:rPr lang="en-US" altLang="ko-KR" sz="1400" dirty="0"/>
-                        <a:t>0.0962281313869688</a:t>
+                        <a:t>0.32031501584582855</a:t>
                       </a:r>
                       <a:r>
                         <a:rPr lang="pt-BR" altLang="ko-KR" sz="1400" dirty="0"/>
@@ -3615,7 +3615,7 @@
                       </a:r>
                       <a:r>
                         <a:rPr lang="en-US" altLang="ko-KR" sz="1400" dirty="0"/>
-                        <a:t>0.1234601233484596</a:t>
+                        <a:t>0.377122782923659</a:t>
                       </a:r>
                       <a:endParaRPr lang="ko-KR" altLang="en-US" sz="1400" b="0" dirty="0"/>
                     </a:p>
@@ -3712,8 +3712,8 @@
         </p:blipFill>
         <p:spPr>
           <a:xfrm>
-            <a:off x="5377887" y="4338524"/>
-            <a:ext cx="3035115" cy="1607756"/>
+            <a:off x="5377887" y="4354409"/>
+            <a:ext cx="3035115" cy="1575985"/>
           </a:xfrm>
           <a:prstGeom prst="rect">
             <a:avLst/>
@@ -3748,8 +3748,8 @@
         </p:blipFill>
         <p:spPr>
           <a:xfrm>
-            <a:off x="8522019" y="4338731"/>
-            <a:ext cx="3059566" cy="1605954"/>
+            <a:off x="8522019" y="4349132"/>
+            <a:ext cx="3059566" cy="1585152"/>
           </a:xfrm>
           <a:prstGeom prst="rect">
             <a:avLst/>
@@ -3784,8 +3784,8 @@
         </p:blipFill>
         <p:spPr>
           <a:xfrm>
-            <a:off x="5401399" y="1970948"/>
-            <a:ext cx="2993660" cy="1585244"/>
+            <a:off x="5401399" y="1981944"/>
+            <a:ext cx="2993660" cy="1563252"/>
           </a:xfrm>
           <a:prstGeom prst="rect">
             <a:avLst/>
@@ -3820,8 +3820,8 @@
         </p:blipFill>
         <p:spPr>
           <a:xfrm>
-            <a:off x="8554875" y="1977329"/>
-            <a:ext cx="2977423" cy="1597490"/>
+            <a:off x="8554875" y="1986653"/>
+            <a:ext cx="2977423" cy="1578842"/>
           </a:xfrm>
           <a:prstGeom prst="rect">
             <a:avLst/>
@@ -4163,52 +4163,6 @@
               <a:latin typeface="+mj-ea"/>
               <a:ea typeface="+mj-ea"/>
             </a:endParaRPr>
-          </a:p>
-        </p:txBody>
-      </p:sp>
-      <p:sp>
-        <p:nvSpPr>
-          <p:cNvPr id="3" name="직사각형 2">
-            <a:extLst>
-              <a:ext uri="{FF2B5EF4-FFF2-40B4-BE49-F238E27FC236}">
-                <a16:creationId xmlns:a16="http://schemas.microsoft.com/office/drawing/2014/main" id="{95C45920-4503-443F-A785-A922B1BDE02C}"/>
-              </a:ext>
-            </a:extLst>
-          </p:cNvPr>
-          <p:cNvSpPr/>
-          <p:nvPr/>
-        </p:nvSpPr>
-        <p:spPr>
-          <a:xfrm>
-            <a:off x="3004257" y="2544314"/>
-            <a:ext cx="7332133" cy="3852333"/>
-          </a:xfrm>
-          <a:prstGeom prst="rect">
-            <a:avLst/>
-          </a:prstGeom>
-        </p:spPr>
-        <p:style>
-          <a:lnRef idx="2">
-            <a:schemeClr val="accent1">
-              <a:shade val="50000"/>
-            </a:schemeClr>
-          </a:lnRef>
-          <a:fillRef idx="1">
-            <a:schemeClr val="accent1"/>
-          </a:fillRef>
-          <a:effectRef idx="0">
-            <a:schemeClr val="accent1"/>
-          </a:effectRef>
-          <a:fontRef idx="minor">
-            <a:schemeClr val="lt1"/>
-          </a:fontRef>
-        </p:style>
-        <p:txBody>
-          <a:bodyPr rtlCol="0" anchor="ctr"/>
-          <a:lstStyle/>
-          <a:p>
-            <a:pPr algn="ctr"/>
-            <a:endParaRPr lang="ko-KR" altLang="en-US"/>
           </a:p>
         </p:txBody>
       </p:sp>
@@ -6971,2791 +6925,9 @@
             <a:graphicFrameLocks noGrp="1"/>
           </p:cNvGraphicFramePr>
           <p:nvPr>
-            <p:extLst/>
-          </p:nvPr>
-        </p:nvGraphicFramePr>
-        <p:xfrm>
-          <a:off x="6951132" y="3017967"/>
-          <a:ext cx="3909060" cy="741680"/>
-        </p:xfrm>
-        <a:graphic>
-          <a:graphicData uri="http://schemas.openxmlformats.org/drawingml/2006/table">
-            <a:tbl>
-              <a:tblPr firstRow="1" bandRow="1">
-                <a:tableStyleId>{0505E3EF-67EA-436B-97B2-0124C06EBD24}</a:tableStyleId>
-              </a:tblPr>
-              <a:tblGrid>
-                <a:gridCol w="646430">
-                  <a:extLst>
-                    <a:ext uri="{9D8B030D-6E8A-4147-A177-3AD203B41FA5}">
-                      <a16:colId xmlns:a16="http://schemas.microsoft.com/office/drawing/2014/main" val="3873650469"/>
-                    </a:ext>
-                  </a:extLst>
-                </a:gridCol>
-                <a:gridCol w="484505">
-                  <a:extLst>
-                    <a:ext uri="{9D8B030D-6E8A-4147-A177-3AD203B41FA5}">
-                      <a16:colId xmlns:a16="http://schemas.microsoft.com/office/drawing/2014/main" val="3203644757"/>
-                    </a:ext>
-                  </a:extLst>
-                </a:gridCol>
-                <a:gridCol w="484505">
-                  <a:extLst>
-                    <a:ext uri="{9D8B030D-6E8A-4147-A177-3AD203B41FA5}">
-                      <a16:colId xmlns:a16="http://schemas.microsoft.com/office/drawing/2014/main" val="3471233348"/>
-                    </a:ext>
-                  </a:extLst>
-                </a:gridCol>
-                <a:gridCol w="484505">
-                  <a:extLst>
-                    <a:ext uri="{9D8B030D-6E8A-4147-A177-3AD203B41FA5}">
-                      <a16:colId xmlns:a16="http://schemas.microsoft.com/office/drawing/2014/main" val="2131695425"/>
-                    </a:ext>
-                  </a:extLst>
-                </a:gridCol>
-                <a:gridCol w="586105">
-                  <a:extLst>
-                    <a:ext uri="{9D8B030D-6E8A-4147-A177-3AD203B41FA5}">
-                      <a16:colId xmlns:a16="http://schemas.microsoft.com/office/drawing/2014/main" val="1735956904"/>
-                    </a:ext>
-                  </a:extLst>
-                </a:gridCol>
-                <a:gridCol w="586105">
-                  <a:extLst>
-                    <a:ext uri="{9D8B030D-6E8A-4147-A177-3AD203B41FA5}">
-                      <a16:colId xmlns:a16="http://schemas.microsoft.com/office/drawing/2014/main" val="229180621"/>
-                    </a:ext>
-                  </a:extLst>
-                </a:gridCol>
-                <a:gridCol w="636905">
-                  <a:extLst>
-                    <a:ext uri="{9D8B030D-6E8A-4147-A177-3AD203B41FA5}">
-                      <a16:colId xmlns:a16="http://schemas.microsoft.com/office/drawing/2014/main" val="331921004"/>
-                    </a:ext>
-                  </a:extLst>
-                </a:gridCol>
-              </a:tblGrid>
-              <a:tr h="370840">
-                <a:tc rowSpan="2">
-                  <a:txBody>
-                    <a:bodyPr/>
-                    <a:lstStyle/>
-                    <a:p>
-                      <a:pPr latinLnBrk="1"/>
-                      <a:r>
-                        <a:rPr lang="en-US" altLang="ko-KR" sz="800" dirty="0"/>
-                        <a:t>Train</a:t>
-                      </a:r>
-                    </a:p>
-                    <a:p>
-                      <a:pPr latinLnBrk="1"/>
-                      <a:r>
-                        <a:rPr lang="en-US" altLang="ko-KR" sz="800" dirty="0"/>
-                        <a:t>(23111 </a:t>
-                      </a:r>
-                      <a:r>
-                        <a:rPr lang="ko-KR" altLang="en-US" sz="800" dirty="0"/>
-                        <a:t>건</a:t>
-                      </a:r>
-                      <a:r>
-                        <a:rPr lang="en-US" altLang="ko-KR" sz="800" dirty="0"/>
-                        <a:t>)</a:t>
-                      </a:r>
-                      <a:endParaRPr lang="ko-KR" altLang="en-US" sz="800" dirty="0"/>
-                    </a:p>
-                  </a:txBody>
-                  <a:tcPr/>
-                </a:tc>
-                <a:tc>
-                  <a:txBody>
-                    <a:bodyPr/>
-                    <a:lstStyle/>
-                    <a:p>
-                      <a:pPr latinLnBrk="1"/>
-                      <a:r>
-                        <a:rPr lang="en-US" altLang="ko-KR" sz="800" dirty="0"/>
-                        <a:t>MAE</a:t>
-                      </a:r>
-                      <a:endParaRPr lang="ko-KR" altLang="en-US" sz="800" dirty="0"/>
-                    </a:p>
-                  </a:txBody>
-                  <a:tcPr/>
-                </a:tc>
-                <a:tc>
-                  <a:txBody>
-                    <a:bodyPr/>
-                    <a:lstStyle/>
-                    <a:p>
-                      <a:pPr latinLnBrk="1"/>
-                      <a:r>
-                        <a:rPr lang="en-US" altLang="ko-KR" sz="800" dirty="0"/>
-                        <a:t>MAPE</a:t>
-                      </a:r>
-                      <a:endParaRPr lang="ko-KR" altLang="en-US" sz="800" dirty="0"/>
-                    </a:p>
-                  </a:txBody>
-                  <a:tcPr/>
-                </a:tc>
-                <a:tc>
-                  <a:txBody>
-                    <a:bodyPr/>
-                    <a:lstStyle/>
-                    <a:p>
-                      <a:pPr latinLnBrk="1"/>
-                      <a:r>
-                        <a:rPr lang="en-US" altLang="ko-KR" sz="800" dirty="0"/>
-                        <a:t>RMSE</a:t>
-                      </a:r>
-                      <a:endParaRPr lang="ko-KR" altLang="en-US" sz="800" dirty="0"/>
-                    </a:p>
-                  </a:txBody>
-                  <a:tcPr/>
-                </a:tc>
-                <a:tc>
-                  <a:txBody>
-                    <a:bodyPr/>
-                    <a:lstStyle/>
-                    <a:p>
-                      <a:pPr latinLnBrk="1"/>
-                      <a:r>
-                        <a:rPr lang="en-US" altLang="ko-KR" sz="800" dirty="0"/>
-                        <a:t>NSE</a:t>
-                      </a:r>
-                      <a:endParaRPr lang="ko-KR" altLang="en-US" sz="800" dirty="0"/>
-                    </a:p>
-                  </a:txBody>
-                  <a:tcPr/>
-                </a:tc>
-                <a:tc>
-                  <a:txBody>
-                    <a:bodyPr/>
-                    <a:lstStyle/>
-                    <a:p>
-                      <a:pPr latinLnBrk="1"/>
-                      <a:r>
-                        <a:rPr lang="en-US" altLang="ko-KR" sz="800" dirty="0"/>
-                        <a:t>CoR2</a:t>
-                      </a:r>
-                      <a:endParaRPr lang="ko-KR" altLang="en-US" sz="800" dirty="0"/>
-                    </a:p>
-                  </a:txBody>
-                  <a:tcPr/>
-                </a:tc>
-                <a:tc>
-                  <a:txBody>
-                    <a:bodyPr/>
-                    <a:lstStyle/>
-                    <a:p>
-                      <a:pPr latinLnBrk="1"/>
-                      <a:r>
-                        <a:rPr lang="en-US" altLang="ko-KR" sz="800" dirty="0"/>
-                        <a:t>QER</a:t>
-                      </a:r>
-                      <a:endParaRPr lang="ko-KR" altLang="en-US" sz="800" dirty="0"/>
-                    </a:p>
-                  </a:txBody>
-                  <a:tcPr/>
-                </a:tc>
-                <a:extLst>
-                  <a:ext uri="{0D108BD9-81ED-4DB2-BD59-A6C34878D82A}">
-                    <a16:rowId xmlns:a16="http://schemas.microsoft.com/office/drawing/2014/main" val="2689217707"/>
-                  </a:ext>
-                </a:extLst>
-              </a:tr>
-              <a:tr h="370840">
-                <a:tc vMerge="1">
-                  <a:txBody>
-                    <a:bodyPr/>
-                    <a:lstStyle/>
-                    <a:p>
-                      <a:pPr latinLnBrk="1"/>
-                      <a:endParaRPr lang="ko-KR" altLang="en-US" sz="800" dirty="0"/>
-                    </a:p>
-                  </a:txBody>
-                  <a:tcPr/>
-                </a:tc>
-                <a:tc>
-                  <a:txBody>
-                    <a:bodyPr/>
-                    <a:lstStyle/>
-                    <a:p>
-                      <a:pPr latinLnBrk="1"/>
-                      <a:r>
-                        <a:rPr lang="en-US" altLang="ko-KR" sz="800" dirty="0"/>
-                        <a:t>0.0254</a:t>
-                      </a:r>
-                      <a:endParaRPr lang="ko-KR" altLang="en-US" sz="800" dirty="0"/>
-                    </a:p>
-                  </a:txBody>
-                  <a:tcPr/>
-                </a:tc>
-                <a:tc>
-                  <a:txBody>
-                    <a:bodyPr/>
-                    <a:lstStyle/>
-                    <a:p>
-                      <a:pPr latinLnBrk="1"/>
-                      <a:r>
-                        <a:rPr lang="en-US" altLang="ko-KR" sz="800" dirty="0"/>
-                        <a:t>0.0242</a:t>
-                      </a:r>
-                      <a:endParaRPr lang="ko-KR" altLang="en-US" sz="800" dirty="0"/>
-                    </a:p>
-                  </a:txBody>
-                  <a:tcPr/>
-                </a:tc>
-                <a:tc>
-                  <a:txBody>
-                    <a:bodyPr/>
-                    <a:lstStyle/>
-                    <a:p>
-                      <a:pPr latinLnBrk="1"/>
-                      <a:r>
-                        <a:rPr lang="en-US" altLang="ko-KR" sz="800" dirty="0"/>
-                        <a:t>0.0372</a:t>
-                      </a:r>
-                      <a:endParaRPr lang="ko-KR" altLang="en-US" sz="800" dirty="0"/>
-                    </a:p>
-                  </a:txBody>
-                  <a:tcPr/>
-                </a:tc>
-                <a:tc>
-                  <a:txBody>
-                    <a:bodyPr/>
-                    <a:lstStyle/>
-                    <a:p>
-                      <a:pPr latinLnBrk="1"/>
-                      <a:r>
-                        <a:rPr lang="en-US" altLang="ko-KR" sz="800" dirty="0"/>
-                        <a:t>0.968928</a:t>
-                      </a:r>
-                      <a:endParaRPr lang="ko-KR" altLang="en-US" sz="800" dirty="0"/>
-                    </a:p>
-                  </a:txBody>
-                  <a:tcPr/>
-                </a:tc>
-                <a:tc>
-                  <a:txBody>
-                    <a:bodyPr/>
-                    <a:lstStyle/>
-                    <a:p>
-                      <a:pPr latinLnBrk="1"/>
-                      <a:r>
-                        <a:rPr lang="en-US" altLang="ko-KR" sz="800" dirty="0"/>
-                        <a:t>0.970272</a:t>
-                      </a:r>
-                      <a:endParaRPr lang="ko-KR" altLang="en-US" sz="800" dirty="0"/>
-                    </a:p>
-                  </a:txBody>
-                  <a:tcPr/>
-                </a:tc>
-                <a:tc>
-                  <a:txBody>
-                    <a:bodyPr/>
-                    <a:lstStyle/>
-                    <a:p>
-                      <a:pPr latinLnBrk="1"/>
-                      <a:r>
-                        <a:rPr lang="en-US" altLang="ko-KR" sz="800" dirty="0"/>
-                        <a:t>22.160994</a:t>
-                      </a:r>
-                      <a:endParaRPr lang="ko-KR" altLang="en-US" sz="800" dirty="0"/>
-                    </a:p>
-                  </a:txBody>
-                  <a:tcPr/>
-                </a:tc>
-                <a:extLst>
-                  <a:ext uri="{0D108BD9-81ED-4DB2-BD59-A6C34878D82A}">
-                    <a16:rowId xmlns:a16="http://schemas.microsoft.com/office/drawing/2014/main" val="3474084008"/>
-                  </a:ext>
-                </a:extLst>
-              </a:tr>
-            </a:tbl>
-          </a:graphicData>
-        </a:graphic>
-      </p:graphicFrame>
-      <p:graphicFrame>
-        <p:nvGraphicFramePr>
-          <p:cNvPr id="11" name="표 10">
-            <a:extLst>
-              <a:ext uri="{FF2B5EF4-FFF2-40B4-BE49-F238E27FC236}">
-                <a16:creationId xmlns:a16="http://schemas.microsoft.com/office/drawing/2014/main" id="{B08A13AB-CF40-41FC-85F4-AA63438CD538}"/>
-              </a:ext>
-            </a:extLst>
-          </p:cNvPr>
-          <p:cNvGraphicFramePr>
-            <a:graphicFrameLocks noGrp="1"/>
-          </p:cNvGraphicFramePr>
-          <p:nvPr>
-            <p:extLst/>
-          </p:nvPr>
-        </p:nvGraphicFramePr>
-        <p:xfrm>
-          <a:off x="6951132" y="4259181"/>
-          <a:ext cx="3836035" cy="741680"/>
-        </p:xfrm>
-        <a:graphic>
-          <a:graphicData uri="http://schemas.openxmlformats.org/drawingml/2006/table">
-            <a:tbl>
-              <a:tblPr firstRow="1" bandRow="1">
-                <a:tableStyleId>{0505E3EF-67EA-436B-97B2-0124C06EBD24}</a:tableStyleId>
-              </a:tblPr>
-              <a:tblGrid>
-                <a:gridCol w="573405">
-                  <a:extLst>
-                    <a:ext uri="{9D8B030D-6E8A-4147-A177-3AD203B41FA5}">
-                      <a16:colId xmlns:a16="http://schemas.microsoft.com/office/drawing/2014/main" val="3873650469"/>
-                    </a:ext>
-                  </a:extLst>
-                </a:gridCol>
-                <a:gridCol w="484505">
-                  <a:extLst>
-                    <a:ext uri="{9D8B030D-6E8A-4147-A177-3AD203B41FA5}">
-                      <a16:colId xmlns:a16="http://schemas.microsoft.com/office/drawing/2014/main" val="3203644757"/>
-                    </a:ext>
-                  </a:extLst>
-                </a:gridCol>
-                <a:gridCol w="484505">
-                  <a:extLst>
-                    <a:ext uri="{9D8B030D-6E8A-4147-A177-3AD203B41FA5}">
-                      <a16:colId xmlns:a16="http://schemas.microsoft.com/office/drawing/2014/main" val="3471233348"/>
-                    </a:ext>
-                  </a:extLst>
-                </a:gridCol>
-                <a:gridCol w="484505">
-                  <a:extLst>
-                    <a:ext uri="{9D8B030D-6E8A-4147-A177-3AD203B41FA5}">
-                      <a16:colId xmlns:a16="http://schemas.microsoft.com/office/drawing/2014/main" val="2131695425"/>
-                    </a:ext>
-                  </a:extLst>
-                </a:gridCol>
-                <a:gridCol w="586105">
-                  <a:extLst>
-                    <a:ext uri="{9D8B030D-6E8A-4147-A177-3AD203B41FA5}">
-                      <a16:colId xmlns:a16="http://schemas.microsoft.com/office/drawing/2014/main" val="1735956904"/>
-                    </a:ext>
-                  </a:extLst>
-                </a:gridCol>
-                <a:gridCol w="586105">
-                  <a:extLst>
-                    <a:ext uri="{9D8B030D-6E8A-4147-A177-3AD203B41FA5}">
-                      <a16:colId xmlns:a16="http://schemas.microsoft.com/office/drawing/2014/main" val="229180621"/>
-                    </a:ext>
-                  </a:extLst>
-                </a:gridCol>
-                <a:gridCol w="636905">
-                  <a:extLst>
-                    <a:ext uri="{9D8B030D-6E8A-4147-A177-3AD203B41FA5}">
-                      <a16:colId xmlns:a16="http://schemas.microsoft.com/office/drawing/2014/main" val="331921004"/>
-                    </a:ext>
-                  </a:extLst>
-                </a:gridCol>
-              </a:tblGrid>
-              <a:tr h="370840">
-                <a:tc rowSpan="2">
-                  <a:txBody>
-                    <a:bodyPr/>
-                    <a:lstStyle/>
-                    <a:p>
-                      <a:pPr latinLnBrk="1"/>
-                      <a:r>
-                        <a:rPr lang="en-US" altLang="ko-KR" sz="800" dirty="0"/>
-                        <a:t>Valid</a:t>
-                      </a:r>
-                    </a:p>
-                    <a:p>
-                      <a:pPr latinLnBrk="1"/>
-                      <a:r>
-                        <a:rPr lang="en-US" altLang="ko-KR" sz="800" dirty="0"/>
-                        <a:t>(6282 </a:t>
-                      </a:r>
-                      <a:r>
-                        <a:rPr lang="ko-KR" altLang="en-US" sz="800" dirty="0"/>
-                        <a:t>건</a:t>
-                      </a:r>
-                      <a:r>
-                        <a:rPr lang="en-US" altLang="ko-KR" sz="800" dirty="0"/>
-                        <a:t>)</a:t>
-                      </a:r>
-                      <a:endParaRPr lang="ko-KR" altLang="en-US" sz="800" dirty="0"/>
-                    </a:p>
-                  </a:txBody>
-                  <a:tcPr/>
-                </a:tc>
-                <a:tc>
-                  <a:txBody>
-                    <a:bodyPr/>
-                    <a:lstStyle/>
-                    <a:p>
-                      <a:pPr latinLnBrk="1"/>
-                      <a:r>
-                        <a:rPr lang="en-US" altLang="ko-KR" sz="800" dirty="0"/>
-                        <a:t>MAE</a:t>
-                      </a:r>
-                      <a:endParaRPr lang="ko-KR" altLang="en-US" sz="800" dirty="0"/>
-                    </a:p>
-                  </a:txBody>
-                  <a:tcPr/>
-                </a:tc>
-                <a:tc>
-                  <a:txBody>
-                    <a:bodyPr/>
-                    <a:lstStyle/>
-                    <a:p>
-                      <a:pPr latinLnBrk="1"/>
-                      <a:r>
-                        <a:rPr lang="en-US" altLang="ko-KR" sz="800" dirty="0"/>
-                        <a:t>MAPE</a:t>
-                      </a:r>
-                      <a:endParaRPr lang="ko-KR" altLang="en-US" sz="800" dirty="0"/>
-                    </a:p>
-                  </a:txBody>
-                  <a:tcPr/>
-                </a:tc>
-                <a:tc>
-                  <a:txBody>
-                    <a:bodyPr/>
-                    <a:lstStyle/>
-                    <a:p>
-                      <a:pPr latinLnBrk="1"/>
-                      <a:r>
-                        <a:rPr lang="en-US" altLang="ko-KR" sz="800" dirty="0"/>
-                        <a:t>RMSE</a:t>
-                      </a:r>
-                      <a:endParaRPr lang="ko-KR" altLang="en-US" sz="800" dirty="0"/>
-                    </a:p>
-                  </a:txBody>
-                  <a:tcPr/>
-                </a:tc>
-                <a:tc>
-                  <a:txBody>
-                    <a:bodyPr/>
-                    <a:lstStyle/>
-                    <a:p>
-                      <a:pPr latinLnBrk="1"/>
-                      <a:r>
-                        <a:rPr lang="en-US" altLang="ko-KR" sz="800" dirty="0"/>
-                        <a:t>NSE</a:t>
-                      </a:r>
-                      <a:endParaRPr lang="ko-KR" altLang="en-US" sz="800" dirty="0"/>
-                    </a:p>
-                  </a:txBody>
-                  <a:tcPr/>
-                </a:tc>
-                <a:tc>
-                  <a:txBody>
-                    <a:bodyPr/>
-                    <a:lstStyle/>
-                    <a:p>
-                      <a:pPr latinLnBrk="1"/>
-                      <a:r>
-                        <a:rPr lang="en-US" altLang="ko-KR" sz="800" dirty="0"/>
-                        <a:t>CoR2</a:t>
-                      </a:r>
-                      <a:endParaRPr lang="ko-KR" altLang="en-US" sz="800" dirty="0"/>
-                    </a:p>
-                  </a:txBody>
-                  <a:tcPr/>
-                </a:tc>
-                <a:tc>
-                  <a:txBody>
-                    <a:bodyPr/>
-                    <a:lstStyle/>
-                    <a:p>
-                      <a:pPr latinLnBrk="1"/>
-                      <a:r>
-                        <a:rPr lang="en-US" altLang="ko-KR" sz="800" dirty="0"/>
-                        <a:t>QER</a:t>
-                      </a:r>
-                      <a:endParaRPr lang="ko-KR" altLang="en-US" sz="800" dirty="0"/>
-                    </a:p>
-                  </a:txBody>
-                  <a:tcPr/>
-                </a:tc>
-                <a:extLst>
-                  <a:ext uri="{0D108BD9-81ED-4DB2-BD59-A6C34878D82A}">
-                    <a16:rowId xmlns:a16="http://schemas.microsoft.com/office/drawing/2014/main" val="2689217707"/>
-                  </a:ext>
-                </a:extLst>
-              </a:tr>
-              <a:tr h="370840">
-                <a:tc vMerge="1">
-                  <a:txBody>
-                    <a:bodyPr/>
-                    <a:lstStyle/>
-                    <a:p>
-                      <a:pPr latinLnBrk="1"/>
-                      <a:endParaRPr lang="ko-KR" altLang="en-US" sz="800" dirty="0"/>
-                    </a:p>
-                  </a:txBody>
-                  <a:tcPr/>
-                </a:tc>
-                <a:tc>
-                  <a:txBody>
-                    <a:bodyPr/>
-                    <a:lstStyle/>
-                    <a:p>
-                      <a:pPr latinLnBrk="1"/>
-                      <a:r>
-                        <a:rPr lang="en-US" altLang="ko-KR" sz="800" dirty="0"/>
-                        <a:t>0.0385</a:t>
-                      </a:r>
-                      <a:endParaRPr lang="ko-KR" altLang="en-US" sz="800" dirty="0"/>
-                    </a:p>
-                  </a:txBody>
-                  <a:tcPr/>
-                </a:tc>
-                <a:tc>
-                  <a:txBody>
-                    <a:bodyPr/>
-                    <a:lstStyle/>
-                    <a:p>
-                      <a:pPr latinLnBrk="1"/>
-                      <a:r>
-                        <a:rPr lang="en-US" altLang="ko-KR" sz="800" dirty="0"/>
-                        <a:t>0.0421</a:t>
-                      </a:r>
-                      <a:endParaRPr lang="ko-KR" altLang="en-US" sz="800" dirty="0"/>
-                    </a:p>
-                  </a:txBody>
-                  <a:tcPr/>
-                </a:tc>
-                <a:tc>
-                  <a:txBody>
-                    <a:bodyPr/>
-                    <a:lstStyle/>
-                    <a:p>
-                      <a:pPr latinLnBrk="1"/>
-                      <a:r>
-                        <a:rPr lang="en-US" altLang="ko-KR" sz="800" dirty="0"/>
-                        <a:t>0.0542</a:t>
-                      </a:r>
-                      <a:endParaRPr lang="ko-KR" altLang="en-US" sz="800" dirty="0"/>
-                    </a:p>
-                  </a:txBody>
-                  <a:tcPr/>
-                </a:tc>
-                <a:tc>
-                  <a:txBody>
-                    <a:bodyPr/>
-                    <a:lstStyle/>
-                    <a:p>
-                      <a:pPr latinLnBrk="1"/>
-                      <a:r>
-                        <a:rPr lang="en-US" altLang="ko-KR" sz="800" dirty="0"/>
-                        <a:t>0.942801</a:t>
-                      </a:r>
-                      <a:endParaRPr lang="ko-KR" altLang="en-US" sz="800" dirty="0"/>
-                    </a:p>
-                  </a:txBody>
-                  <a:tcPr/>
-                </a:tc>
-                <a:tc>
-                  <a:txBody>
-                    <a:bodyPr/>
-                    <a:lstStyle/>
-                    <a:p>
-                      <a:pPr latinLnBrk="1"/>
-                      <a:r>
-                        <a:rPr lang="en-US" altLang="ko-KR" sz="800" dirty="0"/>
-                        <a:t>0.951583</a:t>
-                      </a:r>
-                      <a:endParaRPr lang="ko-KR" altLang="en-US" sz="800" dirty="0"/>
-                    </a:p>
-                  </a:txBody>
-                  <a:tcPr/>
-                </a:tc>
-                <a:tc>
-                  <a:txBody>
-                    <a:bodyPr/>
-                    <a:lstStyle/>
-                    <a:p>
-                      <a:pPr latinLnBrk="1"/>
-                      <a:r>
-                        <a:rPr lang="en-US" altLang="ko-KR" sz="800" dirty="0"/>
-                        <a:t>4.037687</a:t>
-                      </a:r>
-                      <a:endParaRPr lang="ko-KR" altLang="en-US" sz="800" dirty="0"/>
-                    </a:p>
-                  </a:txBody>
-                  <a:tcPr/>
-                </a:tc>
-                <a:extLst>
-                  <a:ext uri="{0D108BD9-81ED-4DB2-BD59-A6C34878D82A}">
-                    <a16:rowId xmlns:a16="http://schemas.microsoft.com/office/drawing/2014/main" val="3474084008"/>
-                  </a:ext>
-                </a:extLst>
-              </a:tr>
-            </a:tbl>
-          </a:graphicData>
-        </a:graphic>
-      </p:graphicFrame>
-      <p:graphicFrame>
-        <p:nvGraphicFramePr>
-          <p:cNvPr id="12" name="표 11">
-            <a:extLst>
-              <a:ext uri="{FF2B5EF4-FFF2-40B4-BE49-F238E27FC236}">
-                <a16:creationId xmlns:a16="http://schemas.microsoft.com/office/drawing/2014/main" id="{BF3AC006-682A-4D96-B009-F19CB094C06A}"/>
-              </a:ext>
-            </a:extLst>
-          </p:cNvPr>
-          <p:cNvGraphicFramePr>
-            <a:graphicFrameLocks noGrp="1"/>
-          </p:cNvGraphicFramePr>
-          <p:nvPr>
-            <p:extLst/>
-          </p:nvPr>
-        </p:nvGraphicFramePr>
-        <p:xfrm>
-          <a:off x="6951132" y="5500395"/>
-          <a:ext cx="3807460" cy="741680"/>
-        </p:xfrm>
-        <a:graphic>
-          <a:graphicData uri="http://schemas.openxmlformats.org/drawingml/2006/table">
-            <a:tbl>
-              <a:tblPr firstRow="1" bandRow="1">
-                <a:tableStyleId>{0505E3EF-67EA-436B-97B2-0124C06EBD24}</a:tableStyleId>
-              </a:tblPr>
-              <a:tblGrid>
-                <a:gridCol w="595630">
-                  <a:extLst>
-                    <a:ext uri="{9D8B030D-6E8A-4147-A177-3AD203B41FA5}">
-                      <a16:colId xmlns:a16="http://schemas.microsoft.com/office/drawing/2014/main" val="3873650469"/>
-                    </a:ext>
-                  </a:extLst>
-                </a:gridCol>
-                <a:gridCol w="484505">
-                  <a:extLst>
-                    <a:ext uri="{9D8B030D-6E8A-4147-A177-3AD203B41FA5}">
-                      <a16:colId xmlns:a16="http://schemas.microsoft.com/office/drawing/2014/main" val="3203644757"/>
-                    </a:ext>
-                  </a:extLst>
-                </a:gridCol>
-                <a:gridCol w="484505">
-                  <a:extLst>
-                    <a:ext uri="{9D8B030D-6E8A-4147-A177-3AD203B41FA5}">
-                      <a16:colId xmlns:a16="http://schemas.microsoft.com/office/drawing/2014/main" val="3471233348"/>
-                    </a:ext>
-                  </a:extLst>
-                </a:gridCol>
-                <a:gridCol w="484505">
-                  <a:extLst>
-                    <a:ext uri="{9D8B030D-6E8A-4147-A177-3AD203B41FA5}">
-                      <a16:colId xmlns:a16="http://schemas.microsoft.com/office/drawing/2014/main" val="2131695425"/>
-                    </a:ext>
-                  </a:extLst>
-                </a:gridCol>
-                <a:gridCol w="586105">
-                  <a:extLst>
-                    <a:ext uri="{9D8B030D-6E8A-4147-A177-3AD203B41FA5}">
-                      <a16:colId xmlns:a16="http://schemas.microsoft.com/office/drawing/2014/main" val="1735956904"/>
-                    </a:ext>
-                  </a:extLst>
-                </a:gridCol>
-                <a:gridCol w="586105">
-                  <a:extLst>
-                    <a:ext uri="{9D8B030D-6E8A-4147-A177-3AD203B41FA5}">
-                      <a16:colId xmlns:a16="http://schemas.microsoft.com/office/drawing/2014/main" val="229180621"/>
-                    </a:ext>
-                  </a:extLst>
-                </a:gridCol>
-                <a:gridCol w="586105">
-                  <a:extLst>
-                    <a:ext uri="{9D8B030D-6E8A-4147-A177-3AD203B41FA5}">
-                      <a16:colId xmlns:a16="http://schemas.microsoft.com/office/drawing/2014/main" val="331921004"/>
-                    </a:ext>
-                  </a:extLst>
-                </a:gridCol>
-              </a:tblGrid>
-              <a:tr h="370840">
-                <a:tc rowSpan="2">
-                  <a:txBody>
-                    <a:bodyPr/>
-                    <a:lstStyle/>
-                    <a:p>
-                      <a:pPr latinLnBrk="1"/>
-                      <a:r>
-                        <a:rPr lang="en-US" altLang="ko-KR" sz="800" dirty="0"/>
-                        <a:t>Test</a:t>
-                      </a:r>
-                    </a:p>
-                    <a:p>
-                      <a:pPr latinLnBrk="1"/>
-                      <a:r>
-                        <a:rPr lang="en-US" altLang="ko-KR" sz="800" dirty="0"/>
-                        <a:t>(5472 </a:t>
-                      </a:r>
-                      <a:r>
-                        <a:rPr lang="ko-KR" altLang="en-US" sz="800" dirty="0"/>
-                        <a:t>건</a:t>
-                      </a:r>
-                      <a:r>
-                        <a:rPr lang="en-US" altLang="ko-KR" sz="800" dirty="0"/>
-                        <a:t>)</a:t>
-                      </a:r>
-                      <a:endParaRPr lang="ko-KR" altLang="en-US" sz="800" dirty="0"/>
-                    </a:p>
-                  </a:txBody>
-                  <a:tcPr/>
-                </a:tc>
-                <a:tc>
-                  <a:txBody>
-                    <a:bodyPr/>
-                    <a:lstStyle/>
-                    <a:p>
-                      <a:pPr latinLnBrk="1"/>
-                      <a:r>
-                        <a:rPr lang="en-US" altLang="ko-KR" sz="800" dirty="0"/>
-                        <a:t>MAE</a:t>
-                      </a:r>
-                      <a:endParaRPr lang="ko-KR" altLang="en-US" sz="800" dirty="0"/>
-                    </a:p>
-                  </a:txBody>
-                  <a:tcPr/>
-                </a:tc>
-                <a:tc>
-                  <a:txBody>
-                    <a:bodyPr/>
-                    <a:lstStyle/>
-                    <a:p>
-                      <a:pPr latinLnBrk="1"/>
-                      <a:r>
-                        <a:rPr lang="en-US" altLang="ko-KR" sz="800" dirty="0"/>
-                        <a:t>MAPE</a:t>
-                      </a:r>
-                      <a:endParaRPr lang="ko-KR" altLang="en-US" sz="800" dirty="0"/>
-                    </a:p>
-                  </a:txBody>
-                  <a:tcPr/>
-                </a:tc>
-                <a:tc>
-                  <a:txBody>
-                    <a:bodyPr/>
-                    <a:lstStyle/>
-                    <a:p>
-                      <a:pPr latinLnBrk="1"/>
-                      <a:r>
-                        <a:rPr lang="en-US" altLang="ko-KR" sz="800" dirty="0"/>
-                        <a:t>RMSE</a:t>
-                      </a:r>
-                      <a:endParaRPr lang="ko-KR" altLang="en-US" sz="800" dirty="0"/>
-                    </a:p>
-                  </a:txBody>
-                  <a:tcPr/>
-                </a:tc>
-                <a:tc>
-                  <a:txBody>
-                    <a:bodyPr/>
-                    <a:lstStyle/>
-                    <a:p>
-                      <a:pPr latinLnBrk="1"/>
-                      <a:r>
-                        <a:rPr lang="en-US" altLang="ko-KR" sz="800" dirty="0"/>
-                        <a:t>NSE</a:t>
-                      </a:r>
-                      <a:endParaRPr lang="ko-KR" altLang="en-US" sz="800" dirty="0"/>
-                    </a:p>
-                  </a:txBody>
-                  <a:tcPr/>
-                </a:tc>
-                <a:tc>
-                  <a:txBody>
-                    <a:bodyPr/>
-                    <a:lstStyle/>
-                    <a:p>
-                      <a:pPr latinLnBrk="1"/>
-                      <a:r>
-                        <a:rPr lang="en-US" altLang="ko-KR" sz="800" dirty="0"/>
-                        <a:t>CoR2</a:t>
-                      </a:r>
-                      <a:endParaRPr lang="ko-KR" altLang="en-US" sz="800" dirty="0"/>
-                    </a:p>
-                  </a:txBody>
-                  <a:tcPr/>
-                </a:tc>
-                <a:tc>
-                  <a:txBody>
-                    <a:bodyPr/>
-                    <a:lstStyle/>
-                    <a:p>
-                      <a:pPr latinLnBrk="1"/>
-                      <a:r>
-                        <a:rPr lang="en-US" altLang="ko-KR" sz="800" dirty="0"/>
-                        <a:t>QER</a:t>
-                      </a:r>
-                      <a:endParaRPr lang="ko-KR" altLang="en-US" sz="800" dirty="0"/>
-                    </a:p>
-                  </a:txBody>
-                  <a:tcPr/>
-                </a:tc>
-                <a:extLst>
-                  <a:ext uri="{0D108BD9-81ED-4DB2-BD59-A6C34878D82A}">
-                    <a16:rowId xmlns:a16="http://schemas.microsoft.com/office/drawing/2014/main" val="2689217707"/>
-                  </a:ext>
-                </a:extLst>
-              </a:tr>
-              <a:tr h="370840">
-                <a:tc vMerge="1">
-                  <a:txBody>
-                    <a:bodyPr/>
-                    <a:lstStyle/>
-                    <a:p>
-                      <a:pPr latinLnBrk="1"/>
-                      <a:endParaRPr lang="ko-KR" altLang="en-US" sz="800" dirty="0"/>
-                    </a:p>
-                  </a:txBody>
-                  <a:tcPr/>
-                </a:tc>
-                <a:tc>
-                  <a:txBody>
-                    <a:bodyPr/>
-                    <a:lstStyle/>
-                    <a:p>
-                      <a:pPr latinLnBrk="1"/>
-                      <a:r>
-                        <a:rPr lang="en-US" altLang="ko-KR" sz="800" dirty="0"/>
-                        <a:t>0.0453</a:t>
-                      </a:r>
-                      <a:endParaRPr lang="ko-KR" altLang="en-US" sz="800" dirty="0"/>
-                    </a:p>
-                  </a:txBody>
-                  <a:tcPr/>
-                </a:tc>
-                <a:tc>
-                  <a:txBody>
-                    <a:bodyPr/>
-                    <a:lstStyle/>
-                    <a:p>
-                      <a:pPr latinLnBrk="1"/>
-                      <a:r>
-                        <a:rPr lang="en-US" altLang="ko-KR" sz="800" dirty="0"/>
-                        <a:t>0.0528</a:t>
-                      </a:r>
-                      <a:endParaRPr lang="ko-KR" altLang="en-US" sz="800" dirty="0"/>
-                    </a:p>
-                  </a:txBody>
-                  <a:tcPr/>
-                </a:tc>
-                <a:tc>
-                  <a:txBody>
-                    <a:bodyPr/>
-                    <a:lstStyle/>
-                    <a:p>
-                      <a:pPr latinLnBrk="1"/>
-                      <a:r>
-                        <a:rPr lang="en-US" altLang="ko-KR" sz="800" dirty="0"/>
-                        <a:t>0.0625</a:t>
-                      </a:r>
-                      <a:endParaRPr lang="ko-KR" altLang="en-US" sz="800" dirty="0"/>
-                    </a:p>
-                  </a:txBody>
-                  <a:tcPr/>
-                </a:tc>
-                <a:tc>
-                  <a:txBody>
-                    <a:bodyPr/>
-                    <a:lstStyle/>
-                    <a:p>
-                      <a:pPr latinLnBrk="1"/>
-                      <a:r>
-                        <a:rPr lang="en-US" altLang="ko-KR" sz="800" dirty="0"/>
-                        <a:t>0.890020</a:t>
-                      </a:r>
-                      <a:endParaRPr lang="ko-KR" altLang="en-US" sz="800" dirty="0"/>
-                    </a:p>
-                  </a:txBody>
-                  <a:tcPr/>
-                </a:tc>
-                <a:tc>
-                  <a:txBody>
-                    <a:bodyPr/>
-                    <a:lstStyle/>
-                    <a:p>
-                      <a:pPr latinLnBrk="1"/>
-                      <a:r>
-                        <a:rPr lang="en-US" altLang="ko-KR" sz="800" dirty="0"/>
-                        <a:t>0.919186</a:t>
-                      </a:r>
-                      <a:endParaRPr lang="ko-KR" altLang="en-US" sz="800" dirty="0"/>
-                    </a:p>
-                  </a:txBody>
-                  <a:tcPr/>
-                </a:tc>
-                <a:tc>
-                  <a:txBody>
-                    <a:bodyPr/>
-                    <a:lstStyle/>
-                    <a:p>
-                      <a:pPr latinLnBrk="1"/>
-                      <a:r>
-                        <a:rPr lang="en-US" altLang="ko-KR" sz="800" dirty="0"/>
-                        <a:t>5.456180</a:t>
-                      </a:r>
-                      <a:endParaRPr lang="ko-KR" altLang="en-US" sz="800" dirty="0"/>
-                    </a:p>
-                  </a:txBody>
-                  <a:tcPr/>
-                </a:tc>
-                <a:extLst>
-                  <a:ext uri="{0D108BD9-81ED-4DB2-BD59-A6C34878D82A}">
-                    <a16:rowId xmlns:a16="http://schemas.microsoft.com/office/drawing/2014/main" val="3474084008"/>
-                  </a:ext>
-                </a:extLst>
-              </a:tr>
-            </a:tbl>
-          </a:graphicData>
-        </a:graphic>
-      </p:graphicFrame>
-      <p:pic>
-        <p:nvPicPr>
-          <p:cNvPr id="13" name="그림 12">
-            <a:extLst>
-              <a:ext uri="{FF2B5EF4-FFF2-40B4-BE49-F238E27FC236}">
-                <a16:creationId xmlns:a16="http://schemas.microsoft.com/office/drawing/2014/main" id="{0B8BFE22-A6DD-4A55-8213-16C5AD40733E}"/>
-              </a:ext>
-            </a:extLst>
-          </p:cNvPr>
-          <p:cNvPicPr>
-            <a:picLocks noChangeAspect="1"/>
-          </p:cNvPicPr>
-          <p:nvPr/>
-        </p:nvPicPr>
-        <p:blipFill>
-          <a:blip r:embed="rId2">
-            <a:extLst>
-              <a:ext uri="{28A0092B-C50C-407E-A947-70E740481C1C}">
-                <a14:useLocalDpi xmlns:a14="http://schemas.microsoft.com/office/drawing/2010/main" val="0"/>
-              </a:ext>
-            </a:extLst>
-          </a:blip>
-          <a:stretch>
-            <a:fillRect/>
-          </a:stretch>
-        </p:blipFill>
-        <p:spPr>
-          <a:xfrm>
-            <a:off x="970536" y="3740036"/>
-            <a:ext cx="5386707" cy="1795569"/>
-          </a:xfrm>
-          <a:prstGeom prst="rect">
-            <a:avLst/>
-          </a:prstGeom>
-        </p:spPr>
-      </p:pic>
-      <p:sp>
-        <p:nvSpPr>
-          <p:cNvPr id="14" name="TextBox 13">
-            <a:extLst>
-              <a:ext uri="{FF2B5EF4-FFF2-40B4-BE49-F238E27FC236}">
-                <a16:creationId xmlns:a16="http://schemas.microsoft.com/office/drawing/2014/main" id="{0545FBF0-BD23-47BA-AE23-A9041F51CCD9}"/>
-              </a:ext>
-            </a:extLst>
-          </p:cNvPr>
-          <p:cNvSpPr txBox="1"/>
-          <p:nvPr/>
-        </p:nvSpPr>
-        <p:spPr>
-          <a:xfrm>
-            <a:off x="900984" y="3109677"/>
-            <a:ext cx="1740616" cy="402867"/>
-          </a:xfrm>
-          <a:prstGeom prst="rect">
-            <a:avLst/>
-          </a:prstGeom>
-          <a:noFill/>
-        </p:spPr>
-        <p:txBody>
-          <a:bodyPr wrap="square" rtlCol="0">
-            <a:spAutoFit/>
-          </a:bodyPr>
-          <a:lstStyle/>
-          <a:p>
-            <a:pPr>
-              <a:lnSpc>
-                <a:spcPct val="200000"/>
-              </a:lnSpc>
-            </a:pPr>
-            <a:r>
-              <a:rPr lang="en-US" altLang="ko-KR" sz="1200" dirty="0">
-                <a:latin typeface="+mj-ea"/>
-              </a:rPr>
-              <a:t>Train Chart</a:t>
-            </a:r>
-            <a:endParaRPr lang="ko-KR" altLang="en-US" sz="1200" dirty="0">
-              <a:latin typeface="+mj-ea"/>
-            </a:endParaRPr>
-          </a:p>
-        </p:txBody>
-      </p:sp>
-      <p:sp>
-        <p:nvSpPr>
-          <p:cNvPr id="16" name="TextBox 15">
-            <a:extLst>
-              <a:ext uri="{FF2B5EF4-FFF2-40B4-BE49-F238E27FC236}">
-                <a16:creationId xmlns:a16="http://schemas.microsoft.com/office/drawing/2014/main" id="{22E70C8B-0378-41AB-8FAC-941DC946C20B}"/>
-              </a:ext>
-            </a:extLst>
-          </p:cNvPr>
-          <p:cNvSpPr txBox="1"/>
-          <p:nvPr/>
-        </p:nvSpPr>
-        <p:spPr>
-          <a:xfrm>
-            <a:off x="6823157" y="2491201"/>
-            <a:ext cx="2312378" cy="276999"/>
-          </a:xfrm>
-          <a:prstGeom prst="rect">
-            <a:avLst/>
-          </a:prstGeom>
-          <a:noFill/>
-        </p:spPr>
-        <p:txBody>
-          <a:bodyPr wrap="square" rtlCol="0">
-            <a:spAutoFit/>
-          </a:bodyPr>
-          <a:lstStyle/>
-          <a:p>
-            <a:r>
-              <a:rPr lang="ko-KR" altLang="en-US" sz="1200" dirty="0"/>
-              <a:t>일괄 예측 수행 결과</a:t>
-            </a:r>
-          </a:p>
-        </p:txBody>
-      </p:sp>
-      <p:sp>
-        <p:nvSpPr>
-          <p:cNvPr id="15" name="직사각형 14">
-            <a:extLst>
-              <a:ext uri="{FF2B5EF4-FFF2-40B4-BE49-F238E27FC236}">
-                <a16:creationId xmlns:a16="http://schemas.microsoft.com/office/drawing/2014/main" id="{7833E6CE-87ED-4D6B-A147-5220D9AA8380}"/>
-              </a:ext>
-            </a:extLst>
-          </p:cNvPr>
-          <p:cNvSpPr/>
-          <p:nvPr/>
-        </p:nvSpPr>
-        <p:spPr>
-          <a:xfrm>
-            <a:off x="2446867" y="1651000"/>
-            <a:ext cx="7332133" cy="3852333"/>
-          </a:xfrm>
-          <a:prstGeom prst="rect">
-            <a:avLst/>
-          </a:prstGeom>
-        </p:spPr>
-        <p:style>
-          <a:lnRef idx="2">
-            <a:schemeClr val="accent1">
-              <a:shade val="50000"/>
-            </a:schemeClr>
-          </a:lnRef>
-          <a:fillRef idx="1">
-            <a:schemeClr val="accent1"/>
-          </a:fillRef>
-          <a:effectRef idx="0">
-            <a:schemeClr val="accent1"/>
-          </a:effectRef>
-          <a:fontRef idx="minor">
-            <a:schemeClr val="lt1"/>
-          </a:fontRef>
-        </p:style>
-        <p:txBody>
-          <a:bodyPr rtlCol="0" anchor="ctr"/>
-          <a:lstStyle/>
-          <a:p>
-            <a:pPr algn="ctr"/>
-            <a:endParaRPr lang="ko-KR" altLang="en-US"/>
-          </a:p>
-        </p:txBody>
-      </p:sp>
-    </p:spTree>
-    <p:extLst>
-      <p:ext uri="{BB962C8B-B14F-4D97-AF65-F5344CB8AC3E}">
-        <p14:creationId xmlns:p14="http://schemas.microsoft.com/office/powerpoint/2010/main" val="3322997904"/>
-      </p:ext>
-    </p:extLst>
-  </p:cSld>
-  <p:clrMapOvr>
-    <a:masterClrMapping/>
-  </p:clrMapOvr>
-</p:sld>
-</file>
-
-<file path=ppt/slides/slide16.xml><?xml version="1.0" encoding="utf-8"?>
-<p:sld xmlns:a="http://schemas.openxmlformats.org/drawingml/2006/main" xmlns:r="http://schemas.openxmlformats.org/officeDocument/2006/relationships" xmlns:p="http://schemas.openxmlformats.org/presentationml/2006/main">
-  <p:cSld>
-    <p:spTree>
-      <p:nvGrpSpPr>
-        <p:cNvPr id="1" name=""/>
-        <p:cNvGrpSpPr/>
-        <p:nvPr/>
-      </p:nvGrpSpPr>
-      <p:grpSpPr>
-        <a:xfrm>
-          <a:off x="0" y="0"/>
-          <a:ext cx="0" cy="0"/>
-          <a:chOff x="0" y="0"/>
-          <a:chExt cx="0" cy="0"/>
-        </a:xfrm>
-      </p:grpSpPr>
-      <p:graphicFrame>
-        <p:nvGraphicFramePr>
-          <p:cNvPr id="26" name="표 25">
-            <a:extLst>
-              <a:ext uri="{FF2B5EF4-FFF2-40B4-BE49-F238E27FC236}">
-                <a16:creationId xmlns:a16="http://schemas.microsoft.com/office/drawing/2014/main" id="{11C99160-6B77-45EA-8F2B-8F764820117B}"/>
-              </a:ext>
-            </a:extLst>
-          </p:cNvPr>
-          <p:cNvGraphicFramePr>
-            <a:graphicFrameLocks noGrp="1"/>
-          </p:cNvGraphicFramePr>
-          <p:nvPr>
             <p:extLst>
               <p:ext uri="{D42A27DB-BD31-4B8C-83A1-F6EECF244321}">
-                <p14:modId xmlns:p14="http://schemas.microsoft.com/office/powerpoint/2010/main" val="3323027141"/>
-              </p:ext>
-            </p:extLst>
-          </p:nvPr>
-        </p:nvGraphicFramePr>
-        <p:xfrm>
-          <a:off x="800836" y="1889775"/>
-          <a:ext cx="4328033" cy="4150360"/>
-        </p:xfrm>
-        <a:graphic>
-          <a:graphicData uri="http://schemas.openxmlformats.org/drawingml/2006/table">
-            <a:tbl>
-              <a:tblPr firstRow="1" bandRow="1">
-                <a:tableStyleId>{F2DE63D5-997A-4646-A377-4702673A728D}</a:tableStyleId>
-              </a:tblPr>
-              <a:tblGrid>
-                <a:gridCol w="1449578">
-                  <a:extLst>
-                    <a:ext uri="{9D8B030D-6E8A-4147-A177-3AD203B41FA5}">
-                      <a16:colId xmlns:a16="http://schemas.microsoft.com/office/drawing/2014/main" val="2562803118"/>
-                    </a:ext>
-                  </a:extLst>
-                </a:gridCol>
-                <a:gridCol w="2878455">
-                  <a:extLst>
-                    <a:ext uri="{9D8B030D-6E8A-4147-A177-3AD203B41FA5}">
-                      <a16:colId xmlns:a16="http://schemas.microsoft.com/office/drawing/2014/main" val="1847759405"/>
-                    </a:ext>
-                  </a:extLst>
-                </a:gridCol>
-              </a:tblGrid>
-              <a:tr h="370840">
-                <a:tc>
-                  <a:txBody>
-                    <a:bodyPr/>
-                    <a:lstStyle/>
-                    <a:p>
-                      <a:pPr algn="l" latinLnBrk="1"/>
-                      <a:endParaRPr lang="ko-KR" altLang="en-US" sz="1400" b="0" dirty="0">
-                        <a:solidFill>
-                          <a:schemeClr val="bg1"/>
-                        </a:solidFill>
-                      </a:endParaRPr>
-                    </a:p>
-                  </a:txBody>
-                  <a:tcPr>
-                    <a:solidFill>
-                      <a:schemeClr val="accent3"/>
-                    </a:solidFill>
-                  </a:tcPr>
-                </a:tc>
-                <a:tc>
-                  <a:txBody>
-                    <a:bodyPr/>
-                    <a:lstStyle/>
-                    <a:p>
-                      <a:pPr algn="ctr" latinLnBrk="1"/>
-                      <a:r>
-                        <a:rPr lang="ko-KR" altLang="en-US" sz="1400" b="0" dirty="0" err="1">
-                          <a:solidFill>
-                            <a:schemeClr val="bg1"/>
-                          </a:solidFill>
-                        </a:rPr>
-                        <a:t>대곡교</a:t>
-                      </a:r>
-                      <a:endParaRPr lang="ko-KR" altLang="en-US" sz="1400" b="0" dirty="0">
-                        <a:solidFill>
-                          <a:schemeClr val="bg1"/>
-                        </a:solidFill>
-                      </a:endParaRPr>
-                    </a:p>
-                  </a:txBody>
-                  <a:tcPr>
-                    <a:solidFill>
-                      <a:schemeClr val="accent3"/>
-                    </a:solidFill>
-                  </a:tcPr>
-                </a:tc>
-                <a:extLst>
-                  <a:ext uri="{0D108BD9-81ED-4DB2-BD59-A6C34878D82A}">
-                    <a16:rowId xmlns:a16="http://schemas.microsoft.com/office/drawing/2014/main" val="889264623"/>
-                  </a:ext>
-                </a:extLst>
-              </a:tr>
-              <a:tr h="370840">
-                <a:tc>
-                  <a:txBody>
-                    <a:bodyPr/>
-                    <a:lstStyle/>
-                    <a:p>
-                      <a:pPr algn="l" latinLnBrk="1"/>
-                      <a:r>
-                        <a:rPr lang="en-US" altLang="ko-KR" sz="1400" b="0" dirty="0"/>
-                        <a:t>testdata_220712</a:t>
-                      </a:r>
-                      <a:endParaRPr lang="ko-KR" altLang="en-US" sz="1400" b="0" dirty="0"/>
-                    </a:p>
-                  </a:txBody>
-                  <a:tcPr/>
-                </a:tc>
-                <a:tc>
-                  <a:txBody>
-                    <a:bodyPr/>
-                    <a:lstStyle/>
-                    <a:p>
-                      <a:pPr algn="ctr"/>
-                      <a:r>
-                        <a:rPr lang="pt-BR" altLang="ko-KR" sz="1400" dirty="0"/>
-                        <a:t>r2 : </a:t>
-                      </a:r>
-                      <a:r>
-                        <a:rPr lang="en-US" altLang="ko-KR" sz="1400" dirty="0"/>
-                        <a:t>-0.2437545822983267</a:t>
-                      </a:r>
-                    </a:p>
-                    <a:p>
-                      <a:pPr algn="ctr"/>
-                      <a:r>
-                        <a:rPr lang="pt-BR" altLang="ko-KR" sz="1400" dirty="0"/>
-                        <a:t>mse : </a:t>
-                      </a:r>
-                      <a:r>
-                        <a:rPr lang="en-US" altLang="ko-KR" sz="1400" dirty="0"/>
-                        <a:t>0.04935018567626799</a:t>
-                      </a:r>
-                    </a:p>
-                    <a:p>
-                      <a:pPr algn="ctr"/>
-                      <a:r>
-                        <a:rPr lang="pt-BR" altLang="ko-KR" sz="1400" dirty="0"/>
-                        <a:t>mae : </a:t>
-                      </a:r>
-                      <a:r>
-                        <a:rPr lang="en-US" altLang="ko-KR" sz="1400" dirty="0"/>
-                        <a:t>0.18286159541871813</a:t>
-                      </a:r>
-                    </a:p>
-                    <a:p>
-                      <a:pPr algn="ctr"/>
-                      <a:r>
-                        <a:rPr lang="pt-BR" altLang="ko-KR" sz="1400" dirty="0"/>
-                        <a:t>rmse : </a:t>
-                      </a:r>
-                      <a:r>
-                        <a:rPr lang="en-US" altLang="ko-KR" sz="1400" dirty="0"/>
-                        <a:t>0.22214901682489616</a:t>
-                      </a:r>
-                      <a:endParaRPr lang="pt-BR" altLang="ko-KR" sz="1400" dirty="0"/>
-                    </a:p>
-                  </a:txBody>
-                  <a:tcPr/>
-                </a:tc>
-                <a:extLst>
-                  <a:ext uri="{0D108BD9-81ED-4DB2-BD59-A6C34878D82A}">
-                    <a16:rowId xmlns:a16="http://schemas.microsoft.com/office/drawing/2014/main" val="2210846903"/>
-                  </a:ext>
-                </a:extLst>
-              </a:tr>
-              <a:tr h="370840">
-                <a:tc>
-                  <a:txBody>
-                    <a:bodyPr/>
-                    <a:lstStyle/>
-                    <a:p>
-                      <a:pPr algn="l" latinLnBrk="1"/>
-                      <a:r>
-                        <a:rPr lang="en-US" altLang="ko-KR" sz="1400" b="0" dirty="0"/>
-                        <a:t>testdata_230711</a:t>
-                      </a:r>
-                      <a:endParaRPr lang="ko-KR" altLang="en-US" sz="1400" b="0" dirty="0"/>
-                    </a:p>
-                  </a:txBody>
-                  <a:tcPr>
-                    <a:lnB w="12700" cap="flat" cmpd="sng" algn="ctr">
-                      <a:solidFill>
-                        <a:schemeClr val="tx1"/>
-                      </a:solidFill>
-                      <a:prstDash val="solid"/>
-                      <a:round/>
-                      <a:headEnd type="none" w="med" len="med"/>
-                      <a:tailEnd type="none" w="med" len="med"/>
-                    </a:lnB>
-                  </a:tcPr>
-                </a:tc>
-                <a:tc>
-                  <a:txBody>
-                    <a:bodyPr/>
-                    <a:lstStyle/>
-                    <a:p>
-                      <a:pPr algn="ctr" latinLnBrk="1"/>
-                      <a:r>
-                        <a:rPr lang="pt-BR" altLang="ko-KR" sz="1400" dirty="0"/>
-                        <a:t>r2 : </a:t>
-                      </a:r>
-                      <a:r>
-                        <a:rPr lang="en-US" altLang="ko-KR" sz="1400" dirty="0"/>
-                        <a:t>0.8500162646896093</a:t>
-                      </a:r>
-                      <a:r>
-                        <a:rPr lang="pt-BR" altLang="ko-KR" sz="1400" dirty="0"/>
-                        <a:t> </a:t>
-                      </a:r>
-                    </a:p>
-                    <a:p>
-                      <a:pPr algn="ctr" latinLnBrk="1"/>
-                      <a:r>
-                        <a:rPr lang="pt-BR" altLang="ko-KR" sz="1400" dirty="0"/>
-                        <a:t>mse : </a:t>
-                      </a:r>
-                      <a:r>
-                        <a:rPr lang="en-US" altLang="ko-KR" sz="1400" dirty="0"/>
-                        <a:t>0.04197159430678016</a:t>
-                      </a:r>
-                      <a:r>
-                        <a:rPr lang="pt-BR" altLang="ko-KR" sz="1400" dirty="0"/>
-                        <a:t> </a:t>
-                      </a:r>
-                    </a:p>
-                    <a:p>
-                      <a:pPr algn="ctr" latinLnBrk="1"/>
-                      <a:r>
-                        <a:rPr lang="pt-BR" altLang="ko-KR" sz="1400" dirty="0"/>
-                        <a:t>mae : </a:t>
-                      </a:r>
-                      <a:r>
-                        <a:rPr lang="en-US" altLang="ko-KR" sz="1400" dirty="0"/>
-                        <a:t>0.14689570089181267</a:t>
-                      </a:r>
-                      <a:r>
-                        <a:rPr lang="pt-BR" altLang="ko-KR" sz="1400" dirty="0"/>
-                        <a:t> </a:t>
-                      </a:r>
-                    </a:p>
-                    <a:p>
-                      <a:pPr algn="ctr" latinLnBrk="1"/>
-                      <a:r>
-                        <a:rPr lang="pt-BR" altLang="ko-KR" sz="1400" dirty="0"/>
-                        <a:t>rmse : </a:t>
-                      </a:r>
-                      <a:r>
-                        <a:rPr lang="en-US" altLang="ko-KR" sz="1400" dirty="0"/>
-                        <a:t>0.2048697008021932</a:t>
-                      </a:r>
-                      <a:endParaRPr lang="ko-KR" altLang="en-US" sz="1400" b="0" dirty="0"/>
-                    </a:p>
-                  </a:txBody>
-                  <a:tcPr>
-                    <a:lnB w="12700" cap="flat" cmpd="sng" algn="ctr">
-                      <a:solidFill>
-                        <a:schemeClr val="tx1"/>
-                      </a:solidFill>
-                      <a:prstDash val="solid"/>
-                      <a:round/>
-                      <a:headEnd type="none" w="med" len="med"/>
-                      <a:tailEnd type="none" w="med" len="med"/>
-                    </a:lnB>
-                  </a:tcPr>
-                </a:tc>
-                <a:extLst>
-                  <a:ext uri="{0D108BD9-81ED-4DB2-BD59-A6C34878D82A}">
-                    <a16:rowId xmlns:a16="http://schemas.microsoft.com/office/drawing/2014/main" val="1317434033"/>
-                  </a:ext>
-                </a:extLst>
-              </a:tr>
-              <a:tr h="370840">
-                <a:tc>
-                  <a:txBody>
-                    <a:bodyPr/>
-                    <a:lstStyle/>
-                    <a:p>
-                      <a:pPr algn="l" latinLnBrk="1"/>
-                      <a:r>
-                        <a:rPr lang="en-US" altLang="ko-KR" sz="1400" b="0" dirty="0"/>
-                        <a:t>testdata_250716</a:t>
-                      </a:r>
-                      <a:endParaRPr lang="ko-KR" altLang="en-US" sz="1400" b="0" dirty="0"/>
-                    </a:p>
-                  </a:txBody>
-                  <a:tcPr>
-                    <a:lnT w="12700" cap="flat" cmpd="sng" algn="ctr">
-                      <a:solidFill>
-                        <a:schemeClr val="tx1"/>
-                      </a:solidFill>
-                      <a:prstDash val="solid"/>
-                      <a:round/>
-                      <a:headEnd type="none" w="med" len="med"/>
-                      <a:tailEnd type="none" w="med" len="med"/>
-                    </a:lnT>
-                  </a:tcPr>
-                </a:tc>
-                <a:tc>
-                  <a:txBody>
-                    <a:bodyPr/>
-                    <a:lstStyle/>
-                    <a:p>
-                      <a:pPr algn="ctr" latinLnBrk="1"/>
-                      <a:r>
-                        <a:rPr lang="pt-BR" altLang="ko-KR" sz="1400" dirty="0"/>
-                        <a:t>r2 : </a:t>
-                      </a:r>
-                      <a:r>
-                        <a:rPr lang="en-US" altLang="ko-KR" sz="1400" dirty="0"/>
-                        <a:t>0.8895288897883276</a:t>
-                      </a:r>
-                      <a:r>
-                        <a:rPr lang="pt-BR" altLang="ko-KR" sz="1400" dirty="0"/>
-                        <a:t> </a:t>
-                      </a:r>
-                    </a:p>
-                    <a:p>
-                      <a:pPr algn="ctr" latinLnBrk="1"/>
-                      <a:r>
-                        <a:rPr lang="pt-BR" altLang="ko-KR" sz="1400" dirty="0"/>
-                        <a:t>mse : </a:t>
-                      </a:r>
-                      <a:r>
-                        <a:rPr lang="en-US" altLang="ko-KR" sz="1400" dirty="0"/>
-                        <a:t>0.011082707267791009</a:t>
-                      </a:r>
-                      <a:r>
-                        <a:rPr lang="pt-BR" altLang="ko-KR" sz="1400" dirty="0"/>
-                        <a:t> </a:t>
-                      </a:r>
-                    </a:p>
-                    <a:p>
-                      <a:pPr algn="ctr" latinLnBrk="1"/>
-                      <a:r>
-                        <a:rPr lang="pt-BR" altLang="ko-KR" sz="1400" dirty="0"/>
-                        <a:t>mae : </a:t>
-                      </a:r>
-                      <a:r>
-                        <a:rPr lang="en-US" altLang="ko-KR" sz="1400" dirty="0"/>
-                        <a:t>0.08337979230615827</a:t>
-                      </a:r>
-                      <a:r>
-                        <a:rPr lang="pt-BR" altLang="ko-KR" sz="1400" dirty="0"/>
-                        <a:t> </a:t>
-                      </a:r>
-                    </a:p>
-                    <a:p>
-                      <a:pPr algn="ctr" latinLnBrk="1"/>
-                      <a:r>
-                        <a:rPr lang="pt-BR" altLang="ko-KR" sz="1400" dirty="0"/>
-                        <a:t>rmse : </a:t>
-                      </a:r>
-                      <a:r>
-                        <a:rPr lang="en-US" altLang="ko-KR" sz="1400" dirty="0"/>
-                        <a:t>0.1052744378649965</a:t>
-                      </a:r>
-                      <a:r>
-                        <a:rPr lang="pt-BR" altLang="ko-KR" sz="1400" dirty="0"/>
-                        <a:t> </a:t>
-                      </a:r>
-                      <a:endParaRPr lang="ko-KR" altLang="en-US" sz="1400" b="0" dirty="0"/>
-                    </a:p>
-                  </a:txBody>
-                  <a:tcPr>
-                    <a:lnT w="12700" cap="flat" cmpd="sng" algn="ctr">
-                      <a:solidFill>
-                        <a:schemeClr val="tx1"/>
-                      </a:solidFill>
-                      <a:prstDash val="solid"/>
-                      <a:round/>
-                      <a:headEnd type="none" w="med" len="med"/>
-                      <a:tailEnd type="none" w="med" len="med"/>
-                    </a:lnT>
-                  </a:tcPr>
-                </a:tc>
-                <a:extLst>
-                  <a:ext uri="{0D108BD9-81ED-4DB2-BD59-A6C34878D82A}">
-                    <a16:rowId xmlns:a16="http://schemas.microsoft.com/office/drawing/2014/main" val="3978607517"/>
-                  </a:ext>
-                </a:extLst>
-              </a:tr>
-              <a:tr h="370840">
-                <a:tc>
-                  <a:txBody>
-                    <a:bodyPr/>
-                    <a:lstStyle/>
-                    <a:p>
-                      <a:pPr algn="l" latinLnBrk="1"/>
-                      <a:r>
-                        <a:rPr lang="en-US" altLang="ko-KR" sz="1400" b="0" dirty="0"/>
-                        <a:t>testdata_250814</a:t>
-                      </a:r>
-                      <a:endParaRPr lang="ko-KR" altLang="en-US" sz="1400" b="0" dirty="0"/>
-                    </a:p>
-                  </a:txBody>
-                  <a:tcPr/>
-                </a:tc>
-                <a:tc>
-                  <a:txBody>
-                    <a:bodyPr/>
-                    <a:lstStyle/>
-                    <a:p>
-                      <a:pPr algn="ctr" latinLnBrk="1"/>
-                      <a:r>
-                        <a:rPr lang="pt-BR" altLang="ko-KR" sz="1400" dirty="0"/>
-                        <a:t>r2 : </a:t>
-                      </a:r>
-                      <a:r>
-                        <a:rPr lang="en-US" altLang="ko-KR" sz="1400" dirty="0"/>
-                        <a:t>0.7838021043271743</a:t>
-                      </a:r>
-                      <a:endParaRPr lang="pt-BR" altLang="ko-KR" sz="1400" dirty="0"/>
-                    </a:p>
-                    <a:p>
-                      <a:pPr algn="ctr" latinLnBrk="1"/>
-                      <a:r>
-                        <a:rPr lang="pt-BR" altLang="ko-KR" sz="1400" dirty="0"/>
-                        <a:t>mse : </a:t>
-                      </a:r>
-                      <a:r>
-                        <a:rPr lang="en-US" altLang="ko-KR" sz="1400" dirty="0"/>
-                        <a:t>0.015242402057216858</a:t>
-                      </a:r>
-                      <a:r>
-                        <a:rPr lang="pt-BR" altLang="ko-KR" sz="1400" dirty="0"/>
-                        <a:t> </a:t>
-                      </a:r>
-                    </a:p>
-                    <a:p>
-                      <a:pPr algn="ctr" latinLnBrk="1"/>
-                      <a:r>
-                        <a:rPr lang="pt-BR" altLang="ko-KR" sz="1400" dirty="0"/>
-                        <a:t>mae : </a:t>
-                      </a:r>
-                      <a:r>
-                        <a:rPr lang="en-US" altLang="ko-KR" sz="1400" dirty="0"/>
-                        <a:t>0.0962281313869688</a:t>
-                      </a:r>
-                      <a:r>
-                        <a:rPr lang="pt-BR" altLang="ko-KR" sz="1400" dirty="0"/>
-                        <a:t> </a:t>
-                      </a:r>
-                    </a:p>
-                    <a:p>
-                      <a:pPr algn="ctr" latinLnBrk="1"/>
-                      <a:r>
-                        <a:rPr lang="pt-BR" altLang="ko-KR" sz="1400" dirty="0"/>
-                        <a:t>rmse : </a:t>
-                      </a:r>
-                      <a:r>
-                        <a:rPr lang="en-US" altLang="ko-KR" sz="1400" dirty="0"/>
-                        <a:t>0.1234601233484596</a:t>
-                      </a:r>
-                      <a:endParaRPr lang="ko-KR" altLang="en-US" sz="1400" b="0" dirty="0"/>
-                    </a:p>
-                  </a:txBody>
-                  <a:tcPr/>
-                </a:tc>
-                <a:extLst>
-                  <a:ext uri="{0D108BD9-81ED-4DB2-BD59-A6C34878D82A}">
-                    <a16:rowId xmlns:a16="http://schemas.microsoft.com/office/drawing/2014/main" val="3260621040"/>
-                  </a:ext>
-                </a:extLst>
-              </a:tr>
-            </a:tbl>
-          </a:graphicData>
-        </a:graphic>
-      </p:graphicFrame>
-      <p:sp>
-        <p:nvSpPr>
-          <p:cNvPr id="27" name="직사각형 26">
-            <a:extLst>
-              <a:ext uri="{FF2B5EF4-FFF2-40B4-BE49-F238E27FC236}">
-                <a16:creationId xmlns:a16="http://schemas.microsoft.com/office/drawing/2014/main" id="{4EF33900-A573-48EF-8975-0A2C5750C40D}"/>
-              </a:ext>
-            </a:extLst>
-          </p:cNvPr>
-          <p:cNvSpPr/>
-          <p:nvPr/>
-        </p:nvSpPr>
-        <p:spPr>
-          <a:xfrm>
-            <a:off x="2241494" y="1889775"/>
-            <a:ext cx="2887375" cy="4150360"/>
-          </a:xfrm>
-          <a:prstGeom prst="rect">
-            <a:avLst/>
-          </a:prstGeom>
-          <a:noFill/>
-          <a:ln>
-            <a:solidFill>
-              <a:srgbClr val="FF0000"/>
-            </a:solidFill>
-          </a:ln>
-        </p:spPr>
-        <p:style>
-          <a:lnRef idx="2">
-            <a:schemeClr val="accent1">
-              <a:shade val="50000"/>
-            </a:schemeClr>
-          </a:lnRef>
-          <a:fillRef idx="1">
-            <a:schemeClr val="accent1"/>
-          </a:fillRef>
-          <a:effectRef idx="0">
-            <a:schemeClr val="accent1"/>
-          </a:effectRef>
-          <a:fontRef idx="minor">
-            <a:schemeClr val="lt1"/>
-          </a:fontRef>
-        </p:style>
-        <p:txBody>
-          <a:bodyPr rtlCol="0" anchor="ctr"/>
-          <a:lstStyle/>
-          <a:p>
-            <a:pPr algn="ctr"/>
-            <a:endParaRPr lang="ko-KR" altLang="en-US" sz="1400"/>
-          </a:p>
-        </p:txBody>
-      </p:sp>
-      <p:pic>
-        <p:nvPicPr>
-          <p:cNvPr id="29" name="그림 28">
-            <a:extLst>
-              <a:ext uri="{FF2B5EF4-FFF2-40B4-BE49-F238E27FC236}">
-                <a16:creationId xmlns:a16="http://schemas.microsoft.com/office/drawing/2014/main" id="{CC287890-8D3F-4F75-B6EE-54A24D722565}"/>
-              </a:ext>
-            </a:extLst>
-          </p:cNvPr>
-          <p:cNvPicPr>
-            <a:picLocks noChangeAspect="1"/>
-          </p:cNvPicPr>
-          <p:nvPr/>
-        </p:nvPicPr>
-        <p:blipFill>
-          <a:blip r:embed="rId2">
-            <a:extLst>
-              <a:ext uri="{28A0092B-C50C-407E-A947-70E740481C1C}">
-                <a14:useLocalDpi xmlns:a14="http://schemas.microsoft.com/office/drawing/2010/main" val="0"/>
-              </a:ext>
-            </a:extLst>
-          </a:blip>
-          <a:stretch>
-            <a:fillRect/>
-          </a:stretch>
-        </p:blipFill>
-        <p:spPr>
-          <a:xfrm>
-            <a:off x="5377887" y="4338524"/>
-            <a:ext cx="3035115" cy="1607756"/>
-          </a:xfrm>
-          <a:prstGeom prst="rect">
-            <a:avLst/>
-          </a:prstGeom>
-        </p:spPr>
-      </p:pic>
-      <p:pic>
-        <p:nvPicPr>
-          <p:cNvPr id="30" name="그림 29">
-            <a:extLst>
-              <a:ext uri="{FF2B5EF4-FFF2-40B4-BE49-F238E27FC236}">
-                <a16:creationId xmlns:a16="http://schemas.microsoft.com/office/drawing/2014/main" id="{34B44F8C-A4EF-4214-B85D-838A2A05ADA5}"/>
-              </a:ext>
-            </a:extLst>
-          </p:cNvPr>
-          <p:cNvPicPr>
-            <a:picLocks noChangeAspect="1"/>
-          </p:cNvPicPr>
-          <p:nvPr/>
-        </p:nvPicPr>
-        <p:blipFill>
-          <a:blip r:embed="rId3">
-            <a:extLst>
-              <a:ext uri="{28A0092B-C50C-407E-A947-70E740481C1C}">
-                <a14:useLocalDpi xmlns:a14="http://schemas.microsoft.com/office/drawing/2010/main" val="0"/>
-              </a:ext>
-            </a:extLst>
-          </a:blip>
-          <a:stretch>
-            <a:fillRect/>
-          </a:stretch>
-        </p:blipFill>
-        <p:spPr>
-          <a:xfrm>
-            <a:off x="8522019" y="4338731"/>
-            <a:ext cx="3059566" cy="1605954"/>
-          </a:xfrm>
-          <a:prstGeom prst="rect">
-            <a:avLst/>
-          </a:prstGeom>
-        </p:spPr>
-      </p:pic>
-      <p:pic>
-        <p:nvPicPr>
-          <p:cNvPr id="31" name="그림 30">
-            <a:extLst>
-              <a:ext uri="{FF2B5EF4-FFF2-40B4-BE49-F238E27FC236}">
-                <a16:creationId xmlns:a16="http://schemas.microsoft.com/office/drawing/2014/main" id="{D1DF17EE-4843-4A32-BDAC-03BBE1594C62}"/>
-              </a:ext>
-            </a:extLst>
-          </p:cNvPr>
-          <p:cNvPicPr>
-            <a:picLocks noChangeAspect="1"/>
-          </p:cNvPicPr>
-          <p:nvPr/>
-        </p:nvPicPr>
-        <p:blipFill>
-          <a:blip r:embed="rId4">
-            <a:extLst>
-              <a:ext uri="{28A0092B-C50C-407E-A947-70E740481C1C}">
-                <a14:useLocalDpi xmlns:a14="http://schemas.microsoft.com/office/drawing/2010/main" val="0"/>
-              </a:ext>
-            </a:extLst>
-          </a:blip>
-          <a:stretch>
-            <a:fillRect/>
-          </a:stretch>
-        </p:blipFill>
-        <p:spPr>
-          <a:xfrm>
-            <a:off x="5401399" y="1970948"/>
-            <a:ext cx="2993660" cy="1585244"/>
-          </a:xfrm>
-          <a:prstGeom prst="rect">
-            <a:avLst/>
-          </a:prstGeom>
-        </p:spPr>
-      </p:pic>
-      <p:pic>
-        <p:nvPicPr>
-          <p:cNvPr id="32" name="그림 31">
-            <a:extLst>
-              <a:ext uri="{FF2B5EF4-FFF2-40B4-BE49-F238E27FC236}">
-                <a16:creationId xmlns:a16="http://schemas.microsoft.com/office/drawing/2014/main" id="{77E4CA0B-D49E-45B1-BAE8-60B9B42BF1FE}"/>
-              </a:ext>
-            </a:extLst>
-          </p:cNvPr>
-          <p:cNvPicPr>
-            <a:picLocks noChangeAspect="1"/>
-          </p:cNvPicPr>
-          <p:nvPr/>
-        </p:nvPicPr>
-        <p:blipFill>
-          <a:blip r:embed="rId5">
-            <a:extLst>
-              <a:ext uri="{28A0092B-C50C-407E-A947-70E740481C1C}">
-                <a14:useLocalDpi xmlns:a14="http://schemas.microsoft.com/office/drawing/2010/main" val="0"/>
-              </a:ext>
-            </a:extLst>
-          </a:blip>
-          <a:stretch>
-            <a:fillRect/>
-          </a:stretch>
-        </p:blipFill>
-        <p:spPr>
-          <a:xfrm>
-            <a:off x="8554875" y="1977329"/>
-            <a:ext cx="2977423" cy="1597490"/>
-          </a:xfrm>
-          <a:prstGeom prst="rect">
-            <a:avLst/>
-          </a:prstGeom>
-        </p:spPr>
-      </p:pic>
-      <p:sp>
-        <p:nvSpPr>
-          <p:cNvPr id="33" name="TextBox 32">
-            <a:extLst>
-              <a:ext uri="{FF2B5EF4-FFF2-40B4-BE49-F238E27FC236}">
-                <a16:creationId xmlns:a16="http://schemas.microsoft.com/office/drawing/2014/main" id="{9666F396-617E-4A87-B71B-140F779486DE}"/>
-              </a:ext>
-            </a:extLst>
-          </p:cNvPr>
-          <p:cNvSpPr txBox="1"/>
-          <p:nvPr/>
-        </p:nvSpPr>
-        <p:spPr>
-          <a:xfrm>
-            <a:off x="6261235" y="3605498"/>
-            <a:ext cx="1268420" cy="246221"/>
-          </a:xfrm>
-          <a:prstGeom prst="rect">
-            <a:avLst/>
-          </a:prstGeom>
-          <a:noFill/>
-        </p:spPr>
-        <p:txBody>
-          <a:bodyPr wrap="square" rtlCol="0">
-            <a:spAutoFit/>
-          </a:bodyPr>
-          <a:lstStyle/>
-          <a:p>
-            <a:pPr algn="ctr" latinLnBrk="1"/>
-            <a:r>
-              <a:rPr lang="en-US" altLang="ko-KR" sz="1000" dirty="0"/>
-              <a:t>testdata_220712</a:t>
-            </a:r>
-            <a:endParaRPr lang="ko-KR" altLang="en-US" sz="1000" dirty="0"/>
-          </a:p>
-        </p:txBody>
-      </p:sp>
-      <p:sp>
-        <p:nvSpPr>
-          <p:cNvPr id="34" name="TextBox 33">
-            <a:extLst>
-              <a:ext uri="{FF2B5EF4-FFF2-40B4-BE49-F238E27FC236}">
-                <a16:creationId xmlns:a16="http://schemas.microsoft.com/office/drawing/2014/main" id="{3CA25465-4979-4F8A-9B0A-4264AEA6DA31}"/>
-              </a:ext>
-            </a:extLst>
-          </p:cNvPr>
-          <p:cNvSpPr txBox="1"/>
-          <p:nvPr/>
-        </p:nvSpPr>
-        <p:spPr>
-          <a:xfrm>
-            <a:off x="9409377" y="3605498"/>
-            <a:ext cx="1268420" cy="246221"/>
-          </a:xfrm>
-          <a:prstGeom prst="rect">
-            <a:avLst/>
-          </a:prstGeom>
-          <a:noFill/>
-        </p:spPr>
-        <p:txBody>
-          <a:bodyPr wrap="square" rtlCol="0">
-            <a:spAutoFit/>
-          </a:bodyPr>
-          <a:lstStyle/>
-          <a:p>
-            <a:pPr latinLnBrk="1"/>
-            <a:r>
-              <a:rPr lang="en-US" altLang="ko-KR" sz="1000" dirty="0"/>
-              <a:t>testdata_230711</a:t>
-            </a:r>
-            <a:endParaRPr lang="ko-KR" altLang="en-US" sz="1000" dirty="0"/>
-          </a:p>
-        </p:txBody>
-      </p:sp>
-      <p:sp>
-        <p:nvSpPr>
-          <p:cNvPr id="35" name="TextBox 34">
-            <a:extLst>
-              <a:ext uri="{FF2B5EF4-FFF2-40B4-BE49-F238E27FC236}">
-                <a16:creationId xmlns:a16="http://schemas.microsoft.com/office/drawing/2014/main" id="{86B302A1-B195-4A71-8F8A-E20D52E67826}"/>
-              </a:ext>
-            </a:extLst>
-          </p:cNvPr>
-          <p:cNvSpPr txBox="1"/>
-          <p:nvPr/>
-        </p:nvSpPr>
-        <p:spPr>
-          <a:xfrm>
-            <a:off x="6261235" y="6040135"/>
-            <a:ext cx="1268420" cy="246221"/>
-          </a:xfrm>
-          <a:prstGeom prst="rect">
-            <a:avLst/>
-          </a:prstGeom>
-          <a:noFill/>
-        </p:spPr>
-        <p:txBody>
-          <a:bodyPr wrap="square" rtlCol="0">
-            <a:spAutoFit/>
-          </a:bodyPr>
-          <a:lstStyle/>
-          <a:p>
-            <a:pPr algn="ctr" latinLnBrk="1"/>
-            <a:r>
-              <a:rPr lang="en-US" altLang="ko-KR" sz="1000" dirty="0"/>
-              <a:t>testdata_250716</a:t>
-            </a:r>
-            <a:endParaRPr lang="ko-KR" altLang="en-US" sz="1000" dirty="0"/>
-          </a:p>
-        </p:txBody>
-      </p:sp>
-      <p:sp>
-        <p:nvSpPr>
-          <p:cNvPr id="36" name="TextBox 35">
-            <a:extLst>
-              <a:ext uri="{FF2B5EF4-FFF2-40B4-BE49-F238E27FC236}">
-                <a16:creationId xmlns:a16="http://schemas.microsoft.com/office/drawing/2014/main" id="{9CD4B0EC-3B8B-4308-B662-5880CA2DCDE8}"/>
-              </a:ext>
-            </a:extLst>
-          </p:cNvPr>
-          <p:cNvSpPr txBox="1"/>
-          <p:nvPr/>
-        </p:nvSpPr>
-        <p:spPr>
-          <a:xfrm>
-            <a:off x="9417592" y="6040135"/>
-            <a:ext cx="1268420" cy="246221"/>
-          </a:xfrm>
-          <a:prstGeom prst="rect">
-            <a:avLst/>
-          </a:prstGeom>
-          <a:noFill/>
-        </p:spPr>
-        <p:txBody>
-          <a:bodyPr wrap="square" rtlCol="0">
-            <a:spAutoFit/>
-          </a:bodyPr>
-          <a:lstStyle/>
-          <a:p>
-            <a:pPr algn="ctr" latinLnBrk="1"/>
-            <a:r>
-              <a:rPr lang="en-US" altLang="ko-KR" sz="1000" dirty="0"/>
-              <a:t>testdata_250814</a:t>
-            </a:r>
-            <a:endParaRPr lang="ko-KR" altLang="en-US" sz="1000" dirty="0"/>
-          </a:p>
-        </p:txBody>
-      </p:sp>
-      <p:sp>
-        <p:nvSpPr>
-          <p:cNvPr id="37" name="TextBox 36">
-            <a:extLst>
-              <a:ext uri="{FF2B5EF4-FFF2-40B4-BE49-F238E27FC236}">
-                <a16:creationId xmlns:a16="http://schemas.microsoft.com/office/drawing/2014/main" id="{9A4AFE95-2DED-42BC-A1CA-CCD46CBA4F68}"/>
-              </a:ext>
-            </a:extLst>
-          </p:cNvPr>
-          <p:cNvSpPr txBox="1"/>
-          <p:nvPr/>
-        </p:nvSpPr>
-        <p:spPr>
-          <a:xfrm>
-            <a:off x="33795" y="3792450"/>
-            <a:ext cx="732232" cy="246221"/>
-          </a:xfrm>
-          <a:prstGeom prst="rect">
-            <a:avLst/>
-          </a:prstGeom>
-          <a:noFill/>
-        </p:spPr>
-        <p:txBody>
-          <a:bodyPr wrap="square" rtlCol="0">
-            <a:spAutoFit/>
-          </a:bodyPr>
-          <a:lstStyle/>
-          <a:p>
-            <a:pPr algn="ctr" latinLnBrk="1"/>
-            <a:r>
-              <a:rPr lang="ko-KR" altLang="en-US" sz="1000" dirty="0"/>
-              <a:t>증설 전</a:t>
-            </a:r>
-          </a:p>
-        </p:txBody>
-      </p:sp>
-      <p:sp>
-        <p:nvSpPr>
-          <p:cNvPr id="39" name="TextBox 38">
-            <a:extLst>
-              <a:ext uri="{FF2B5EF4-FFF2-40B4-BE49-F238E27FC236}">
-                <a16:creationId xmlns:a16="http://schemas.microsoft.com/office/drawing/2014/main" id="{CE878C64-9135-48B4-AD37-DDB91950CAEC}"/>
-              </a:ext>
-            </a:extLst>
-          </p:cNvPr>
-          <p:cNvSpPr txBox="1"/>
-          <p:nvPr/>
-        </p:nvSpPr>
-        <p:spPr>
-          <a:xfrm>
-            <a:off x="33795" y="4260325"/>
-            <a:ext cx="732232" cy="246221"/>
-          </a:xfrm>
-          <a:prstGeom prst="rect">
-            <a:avLst/>
-          </a:prstGeom>
-          <a:noFill/>
-        </p:spPr>
-        <p:txBody>
-          <a:bodyPr wrap="square" rtlCol="0">
-            <a:spAutoFit/>
-          </a:bodyPr>
-          <a:lstStyle/>
-          <a:p>
-            <a:pPr algn="ctr" latinLnBrk="1"/>
-            <a:r>
-              <a:rPr lang="ko-KR" altLang="en-US" sz="1000" dirty="0"/>
-              <a:t>증설 후</a:t>
-            </a:r>
-          </a:p>
-        </p:txBody>
-      </p:sp>
-      <p:cxnSp>
-        <p:nvCxnSpPr>
-          <p:cNvPr id="8" name="직선 연결선 7">
-            <a:extLst>
-              <a:ext uri="{FF2B5EF4-FFF2-40B4-BE49-F238E27FC236}">
-                <a16:creationId xmlns:a16="http://schemas.microsoft.com/office/drawing/2014/main" id="{105E4055-07E8-4C56-93F5-5CE2B0B1AE01}"/>
-              </a:ext>
-            </a:extLst>
-          </p:cNvPr>
-          <p:cNvCxnSpPr/>
-          <p:nvPr/>
-        </p:nvCxnSpPr>
-        <p:spPr>
-          <a:xfrm flipH="1">
-            <a:off x="0" y="4148667"/>
-            <a:ext cx="800836" cy="0"/>
-          </a:xfrm>
-          <a:prstGeom prst="line">
-            <a:avLst/>
-          </a:prstGeom>
-        </p:spPr>
-        <p:style>
-          <a:lnRef idx="3">
-            <a:schemeClr val="dk1"/>
-          </a:lnRef>
-          <a:fillRef idx="0">
-            <a:schemeClr val="dk1"/>
-          </a:fillRef>
-          <a:effectRef idx="2">
-            <a:schemeClr val="dk1"/>
-          </a:effectRef>
-          <a:fontRef idx="minor">
-            <a:schemeClr val="tx1"/>
-          </a:fontRef>
-        </p:style>
-      </p:cxnSp>
-      <p:sp>
-        <p:nvSpPr>
-          <p:cNvPr id="16" name="TextBox 15">
-            <a:extLst>
-              <a:ext uri="{FF2B5EF4-FFF2-40B4-BE49-F238E27FC236}">
-                <a16:creationId xmlns:a16="http://schemas.microsoft.com/office/drawing/2014/main" id="{7DB25FE2-FB8B-4DFF-B0F9-07A68FD42E46}"/>
-              </a:ext>
-            </a:extLst>
-          </p:cNvPr>
-          <p:cNvSpPr txBox="1"/>
-          <p:nvPr/>
-        </p:nvSpPr>
-        <p:spPr>
-          <a:xfrm>
-            <a:off x="377505" y="623270"/>
-            <a:ext cx="3119228" cy="830997"/>
-          </a:xfrm>
-          <a:prstGeom prst="rect">
-            <a:avLst/>
-          </a:prstGeom>
-          <a:noFill/>
-        </p:spPr>
-        <p:txBody>
-          <a:bodyPr wrap="square" rtlCol="0">
-            <a:spAutoFit/>
-          </a:bodyPr>
-          <a:lstStyle/>
-          <a:p>
-            <a:r>
-              <a:rPr lang="en-US" altLang="ko-KR" sz="2400" dirty="0" err="1">
-                <a:latin typeface="+mj-ea"/>
-              </a:rPr>
-              <a:t>num_of_layer</a:t>
-            </a:r>
-            <a:r>
-              <a:rPr lang="en-US" altLang="ko-KR" sz="2400" dirty="0">
-                <a:latin typeface="+mj-ea"/>
-              </a:rPr>
-              <a:t> =36 </a:t>
-            </a:r>
-            <a:r>
-              <a:rPr lang="ko-KR" altLang="en-US" sz="2400" dirty="0">
-                <a:latin typeface="+mj-ea"/>
-                <a:ea typeface="+mj-ea"/>
-              </a:rPr>
-              <a:t>예측 코드 </a:t>
-            </a:r>
-            <a:r>
-              <a:rPr lang="en-US" altLang="ko-KR" sz="2400">
-                <a:latin typeface="+mj-ea"/>
-                <a:ea typeface="+mj-ea"/>
-              </a:rPr>
-              <a:t>- </a:t>
-            </a:r>
-            <a:r>
-              <a:rPr lang="ko-KR" altLang="en-US" sz="2400">
-                <a:latin typeface="+mj-ea"/>
-                <a:ea typeface="+mj-ea"/>
-              </a:rPr>
-              <a:t>대곡교</a:t>
-            </a:r>
-            <a:endParaRPr lang="ko-KR" altLang="en-US" sz="2400" dirty="0">
-              <a:latin typeface="+mj-ea"/>
-              <a:ea typeface="+mj-ea"/>
-            </a:endParaRPr>
-          </a:p>
-        </p:txBody>
-      </p:sp>
-      <p:sp>
-        <p:nvSpPr>
-          <p:cNvPr id="17" name="직사각형 16">
-            <a:extLst>
-              <a:ext uri="{FF2B5EF4-FFF2-40B4-BE49-F238E27FC236}">
-                <a16:creationId xmlns:a16="http://schemas.microsoft.com/office/drawing/2014/main" id="{7A87D245-3B55-41DA-B29B-82497F6A0CC5}"/>
-              </a:ext>
-            </a:extLst>
-          </p:cNvPr>
-          <p:cNvSpPr/>
-          <p:nvPr/>
-        </p:nvSpPr>
-        <p:spPr>
-          <a:xfrm>
-            <a:off x="2903460" y="2334158"/>
-            <a:ext cx="7332133" cy="3852333"/>
-          </a:xfrm>
-          <a:prstGeom prst="rect">
-            <a:avLst/>
-          </a:prstGeom>
-        </p:spPr>
-        <p:style>
-          <a:lnRef idx="2">
-            <a:schemeClr val="accent1">
-              <a:shade val="50000"/>
-            </a:schemeClr>
-          </a:lnRef>
-          <a:fillRef idx="1">
-            <a:schemeClr val="accent1"/>
-          </a:fillRef>
-          <a:effectRef idx="0">
-            <a:schemeClr val="accent1"/>
-          </a:effectRef>
-          <a:fontRef idx="minor">
-            <a:schemeClr val="lt1"/>
-          </a:fontRef>
-        </p:style>
-        <p:txBody>
-          <a:bodyPr rtlCol="0" anchor="ctr"/>
-          <a:lstStyle/>
-          <a:p>
-            <a:pPr algn="ctr"/>
-            <a:endParaRPr lang="ko-KR" altLang="en-US"/>
-          </a:p>
-        </p:txBody>
-      </p:sp>
-    </p:spTree>
-    <p:extLst>
-      <p:ext uri="{BB962C8B-B14F-4D97-AF65-F5344CB8AC3E}">
-        <p14:creationId xmlns:p14="http://schemas.microsoft.com/office/powerpoint/2010/main" val="3023172442"/>
-      </p:ext>
-    </p:extLst>
-  </p:cSld>
-  <p:clrMapOvr>
-    <a:masterClrMapping/>
-  </p:clrMapOvr>
-</p:sld>
-</file>
-
-<file path=ppt/slides/slide17.xml><?xml version="1.0" encoding="utf-8"?>
-<p:sld xmlns:a="http://schemas.openxmlformats.org/drawingml/2006/main" xmlns:r="http://schemas.openxmlformats.org/officeDocument/2006/relationships" xmlns:p="http://schemas.openxmlformats.org/presentationml/2006/main">
-  <p:cSld>
-    <p:spTree>
-      <p:nvGrpSpPr>
-        <p:cNvPr id="1" name=""/>
-        <p:cNvGrpSpPr/>
-        <p:nvPr/>
-      </p:nvGrpSpPr>
-      <p:grpSpPr>
-        <a:xfrm>
-          <a:off x="0" y="0"/>
-          <a:ext cx="0" cy="0"/>
-          <a:chOff x="0" y="0"/>
-          <a:chExt cx="0" cy="0"/>
-        </a:xfrm>
-      </p:grpSpPr>
-      <p:sp>
-        <p:nvSpPr>
-          <p:cNvPr id="2" name="TextBox 1">
-            <a:extLst>
-              <a:ext uri="{FF2B5EF4-FFF2-40B4-BE49-F238E27FC236}">
-                <a16:creationId xmlns:a16="http://schemas.microsoft.com/office/drawing/2014/main" id="{00ACFCE6-C3D3-4B96-9F52-BA607F1A8468}"/>
-              </a:ext>
-            </a:extLst>
-          </p:cNvPr>
-          <p:cNvSpPr txBox="1"/>
-          <p:nvPr/>
-        </p:nvSpPr>
-        <p:spPr>
-          <a:xfrm>
-            <a:off x="2308225" y="3105834"/>
-            <a:ext cx="7575550" cy="1200329"/>
-          </a:xfrm>
-          <a:prstGeom prst="rect">
-            <a:avLst/>
-          </a:prstGeom>
-          <a:noFill/>
-        </p:spPr>
-        <p:txBody>
-          <a:bodyPr wrap="square" rtlCol="0">
-            <a:spAutoFit/>
-          </a:bodyPr>
-          <a:lstStyle/>
-          <a:p>
-            <a:pPr algn="ctr"/>
-            <a:r>
-              <a:rPr lang="en-US" altLang="ko-KR" sz="3600" b="1" dirty="0" err="1">
-                <a:solidFill>
-                  <a:srgbClr val="FF0000"/>
-                </a:solidFill>
-                <a:latin typeface="+mj-ea"/>
-              </a:rPr>
-              <a:t>seq_length</a:t>
-            </a:r>
-            <a:r>
-              <a:rPr lang="en-US" altLang="ko-KR" sz="3600" b="1" dirty="0">
-                <a:solidFill>
-                  <a:srgbClr val="FF0000"/>
-                </a:solidFill>
-                <a:latin typeface="+mj-ea"/>
-              </a:rPr>
-              <a:t> = 36 + </a:t>
-            </a:r>
-          </a:p>
-          <a:p>
-            <a:pPr algn="ctr"/>
-            <a:r>
-              <a:rPr lang="en-US" altLang="ko-KR" sz="3600" b="1" dirty="0" err="1">
-                <a:solidFill>
-                  <a:srgbClr val="FF0000"/>
-                </a:solidFill>
-                <a:latin typeface="+mj-ea"/>
-              </a:rPr>
-              <a:t>num_of_layer</a:t>
-            </a:r>
-            <a:r>
-              <a:rPr lang="en-US" altLang="ko-KR" sz="3600" b="1" dirty="0">
-                <a:solidFill>
-                  <a:srgbClr val="FF0000"/>
-                </a:solidFill>
-                <a:latin typeface="+mj-ea"/>
-              </a:rPr>
-              <a:t> = ?? </a:t>
-            </a:r>
-            <a:r>
-              <a:rPr lang="ko-KR" altLang="en-US" sz="3600" b="1" dirty="0">
-                <a:solidFill>
-                  <a:srgbClr val="FF0000"/>
-                </a:solidFill>
-                <a:latin typeface="+mj-ea"/>
-              </a:rPr>
-              <a:t>이 제일 나음 </a:t>
-            </a:r>
-            <a:endParaRPr lang="en-US" altLang="ko-KR" sz="3600" b="1" dirty="0">
-              <a:solidFill>
-                <a:srgbClr val="FF0000"/>
-              </a:solidFill>
-              <a:latin typeface="+mj-ea"/>
-            </a:endParaRPr>
-          </a:p>
-        </p:txBody>
-      </p:sp>
-    </p:spTree>
-    <p:extLst>
-      <p:ext uri="{BB962C8B-B14F-4D97-AF65-F5344CB8AC3E}">
-        <p14:creationId xmlns:p14="http://schemas.microsoft.com/office/powerpoint/2010/main" val="363304009"/>
-      </p:ext>
-    </p:extLst>
-  </p:cSld>
-  <p:clrMapOvr>
-    <a:masterClrMapping/>
-  </p:clrMapOvr>
-</p:sld>
-</file>
-
-<file path=ppt/slides/slide18.xml><?xml version="1.0" encoding="utf-8"?>
-<p:sld xmlns:a="http://schemas.openxmlformats.org/drawingml/2006/main" xmlns:r="http://schemas.openxmlformats.org/officeDocument/2006/relationships" xmlns:p="http://schemas.openxmlformats.org/presentationml/2006/main">
-  <p:cSld>
-    <p:spTree>
-      <p:nvGrpSpPr>
-        <p:cNvPr id="1" name=""/>
-        <p:cNvGrpSpPr/>
-        <p:nvPr/>
-      </p:nvGrpSpPr>
-      <p:grpSpPr>
-        <a:xfrm>
-          <a:off x="0" y="0"/>
-          <a:ext cx="0" cy="0"/>
-          <a:chOff x="0" y="0"/>
-          <a:chExt cx="0" cy="0"/>
-        </a:xfrm>
-      </p:grpSpPr>
-      <p:sp>
-        <p:nvSpPr>
-          <p:cNvPr id="2" name="TextBox 1">
-            <a:extLst>
-              <a:ext uri="{FF2B5EF4-FFF2-40B4-BE49-F238E27FC236}">
-                <a16:creationId xmlns:a16="http://schemas.microsoft.com/office/drawing/2014/main" id="{00ACFCE6-C3D3-4B96-9F52-BA607F1A8468}"/>
-              </a:ext>
-            </a:extLst>
-          </p:cNvPr>
-          <p:cNvSpPr txBox="1"/>
-          <p:nvPr/>
-        </p:nvSpPr>
-        <p:spPr>
-          <a:xfrm>
-            <a:off x="2308225" y="2828835"/>
-            <a:ext cx="7575550" cy="1200329"/>
-          </a:xfrm>
-          <a:prstGeom prst="rect">
-            <a:avLst/>
-          </a:prstGeom>
-          <a:noFill/>
-        </p:spPr>
-        <p:txBody>
-          <a:bodyPr wrap="square" rtlCol="0">
-            <a:spAutoFit/>
-          </a:bodyPr>
-          <a:lstStyle/>
-          <a:p>
-            <a:pPr algn="ctr"/>
-            <a:r>
-              <a:rPr lang="en-US" altLang="ko-KR" sz="3600" b="1" dirty="0" err="1">
-                <a:solidFill>
-                  <a:schemeClr val="accent5"/>
-                </a:solidFill>
-                <a:latin typeface="+mj-ea"/>
-              </a:rPr>
-              <a:t>Loss_function</a:t>
-            </a:r>
-            <a:r>
-              <a:rPr lang="ko-KR" altLang="en-US" sz="3600" b="1" dirty="0">
-                <a:solidFill>
-                  <a:schemeClr val="accent5"/>
-                </a:solidFill>
-                <a:latin typeface="+mj-ea"/>
-              </a:rPr>
-              <a:t> </a:t>
-            </a:r>
-            <a:r>
-              <a:rPr lang="en-US" altLang="ko-KR" sz="3600" b="1" dirty="0">
-                <a:solidFill>
-                  <a:schemeClr val="accent5"/>
-                </a:solidFill>
-                <a:latin typeface="+mj-ea"/>
-              </a:rPr>
-              <a:t>=</a:t>
-            </a:r>
-            <a:r>
-              <a:rPr lang="ko-KR" altLang="en-US" sz="3600" b="1" dirty="0">
-                <a:solidFill>
-                  <a:schemeClr val="accent5"/>
-                </a:solidFill>
-                <a:latin typeface="+mj-ea"/>
-              </a:rPr>
-              <a:t> </a:t>
-            </a:r>
-            <a:r>
-              <a:rPr lang="en-US" altLang="ko-KR" sz="3600" b="1" dirty="0">
-                <a:solidFill>
-                  <a:schemeClr val="accent5"/>
-                </a:solidFill>
-                <a:latin typeface="+mj-ea"/>
-              </a:rPr>
-              <a:t>MAE</a:t>
-            </a:r>
-          </a:p>
-          <a:p>
-            <a:pPr algn="ctr"/>
-            <a:r>
-              <a:rPr lang="en-US" altLang="ko-KR" sz="3600" b="1" dirty="0" err="1">
-                <a:solidFill>
-                  <a:schemeClr val="accent5"/>
-                </a:solidFill>
-                <a:latin typeface="+mj-ea"/>
-              </a:rPr>
-              <a:t>Learning_rate</a:t>
-            </a:r>
-            <a:r>
-              <a:rPr lang="en-US" altLang="ko-KR" sz="3600" b="1" dirty="0">
-                <a:solidFill>
-                  <a:schemeClr val="accent5"/>
-                </a:solidFill>
-                <a:latin typeface="+mj-ea"/>
-              </a:rPr>
-              <a:t> = 0.0005</a:t>
-            </a:r>
-          </a:p>
-        </p:txBody>
-      </p:sp>
-    </p:spTree>
-    <p:extLst>
-      <p:ext uri="{BB962C8B-B14F-4D97-AF65-F5344CB8AC3E}">
-        <p14:creationId xmlns:p14="http://schemas.microsoft.com/office/powerpoint/2010/main" val="372019505"/>
-      </p:ext>
-    </p:extLst>
-  </p:cSld>
-  <p:clrMapOvr>
-    <a:masterClrMapping/>
-  </p:clrMapOvr>
-</p:sld>
-</file>
-
-<file path=ppt/slides/slide19.xml><?xml version="1.0" encoding="utf-8"?>
-<p:sld xmlns:a="http://schemas.openxmlformats.org/drawingml/2006/main" xmlns:r="http://schemas.openxmlformats.org/officeDocument/2006/relationships" xmlns:p="http://schemas.openxmlformats.org/presentationml/2006/main">
-  <p:cSld>
-    <p:spTree>
-      <p:nvGrpSpPr>
-        <p:cNvPr id="1" name=""/>
-        <p:cNvGrpSpPr/>
-        <p:nvPr/>
-      </p:nvGrpSpPr>
-      <p:grpSpPr>
-        <a:xfrm>
-          <a:off x="0" y="0"/>
-          <a:ext cx="0" cy="0"/>
-          <a:chOff x="0" y="0"/>
-          <a:chExt cx="0" cy="0"/>
-        </a:xfrm>
-      </p:grpSpPr>
-      <p:sp>
-        <p:nvSpPr>
-          <p:cNvPr id="2" name="TextBox 1">
-            <a:extLst>
-              <a:ext uri="{FF2B5EF4-FFF2-40B4-BE49-F238E27FC236}">
-                <a16:creationId xmlns:a16="http://schemas.microsoft.com/office/drawing/2014/main" id="{00ACFCE6-C3D3-4B96-9F52-BA607F1A8468}"/>
-              </a:ext>
-            </a:extLst>
-          </p:cNvPr>
-          <p:cNvSpPr txBox="1"/>
-          <p:nvPr/>
-        </p:nvSpPr>
-        <p:spPr>
-          <a:xfrm>
-            <a:off x="2308225" y="3105834"/>
-            <a:ext cx="7575550" cy="646331"/>
-          </a:xfrm>
-          <a:prstGeom prst="rect">
-            <a:avLst/>
-          </a:prstGeom>
-          <a:noFill/>
-        </p:spPr>
-        <p:txBody>
-          <a:bodyPr wrap="square" rtlCol="0">
-            <a:spAutoFit/>
-          </a:bodyPr>
-          <a:lstStyle/>
-          <a:p>
-            <a:pPr algn="ctr"/>
-            <a:r>
-              <a:rPr lang="en-US" altLang="ko-KR" sz="3600" b="1" dirty="0">
-                <a:solidFill>
-                  <a:schemeClr val="accent5"/>
-                </a:solidFill>
-                <a:latin typeface="+mj-ea"/>
-              </a:rPr>
-              <a:t>1. </a:t>
-            </a:r>
-            <a:r>
-              <a:rPr lang="en-US" altLang="ko-KR" sz="3600" b="1" dirty="0" err="1">
-                <a:solidFill>
-                  <a:schemeClr val="accent5"/>
-                </a:solidFill>
-                <a:latin typeface="+mj-ea"/>
-              </a:rPr>
-              <a:t>num_of_layer</a:t>
-            </a:r>
-            <a:r>
-              <a:rPr lang="en-US" altLang="ko-KR" sz="3600" b="1" dirty="0">
-                <a:solidFill>
-                  <a:schemeClr val="accent5"/>
-                </a:solidFill>
-                <a:latin typeface="+mj-ea"/>
-              </a:rPr>
-              <a:t> = 12 </a:t>
-            </a:r>
-          </a:p>
-        </p:txBody>
-      </p:sp>
-      <p:sp>
-        <p:nvSpPr>
-          <p:cNvPr id="3" name="TextBox 2">
-            <a:extLst>
-              <a:ext uri="{FF2B5EF4-FFF2-40B4-BE49-F238E27FC236}">
-                <a16:creationId xmlns:a16="http://schemas.microsoft.com/office/drawing/2014/main" id="{DFB6244C-FA0F-4264-B8F3-7C5306259C82}"/>
-              </a:ext>
-            </a:extLst>
-          </p:cNvPr>
-          <p:cNvSpPr txBox="1"/>
-          <p:nvPr/>
-        </p:nvSpPr>
-        <p:spPr>
-          <a:xfrm>
-            <a:off x="9270999" y="169583"/>
-            <a:ext cx="2717801" cy="368947"/>
-          </a:xfrm>
-          <a:prstGeom prst="rect">
-            <a:avLst/>
-          </a:prstGeom>
-          <a:noFill/>
-        </p:spPr>
-        <p:txBody>
-          <a:bodyPr wrap="square" rtlCol="0">
-            <a:spAutoFit/>
-          </a:bodyPr>
-          <a:lstStyle/>
-          <a:p>
-            <a:pPr algn="r">
-              <a:lnSpc>
-                <a:spcPct val="200000"/>
-              </a:lnSpc>
-            </a:pPr>
-            <a:r>
-              <a:rPr lang="en-US" altLang="ko-KR" sz="1050" dirty="0"/>
-              <a:t>* model_(</a:t>
-            </a:r>
-            <a:r>
-              <a:rPr lang="en-US" altLang="ko-KR" sz="1050" dirty="0" err="1"/>
-              <a:t>gn</a:t>
-            </a:r>
-            <a:r>
-              <a:rPr lang="en-US" altLang="ko-KR" sz="1050" dirty="0"/>
-              <a:t>/dg)_l12</a:t>
-            </a:r>
-            <a:endParaRPr lang="ko-KR" altLang="en-US" sz="1050" dirty="0">
-              <a:latin typeface="+mj-ea"/>
-            </a:endParaRPr>
-          </a:p>
-        </p:txBody>
-      </p:sp>
-    </p:spTree>
-    <p:extLst>
-      <p:ext uri="{BB962C8B-B14F-4D97-AF65-F5344CB8AC3E}">
-        <p14:creationId xmlns:p14="http://schemas.microsoft.com/office/powerpoint/2010/main" val="4001424555"/>
-      </p:ext>
-    </p:extLst>
-  </p:cSld>
-  <p:clrMapOvr>
-    <a:masterClrMapping/>
-  </p:clrMapOvr>
-</p:sld>
-</file>
-
-<file path=ppt/slides/slide2.xml><?xml version="1.0" encoding="utf-8"?>
-<p:sld xmlns:a="http://schemas.openxmlformats.org/drawingml/2006/main" xmlns:r="http://schemas.openxmlformats.org/officeDocument/2006/relationships" xmlns:p="http://schemas.openxmlformats.org/presentationml/2006/main">
-  <p:cSld>
-    <p:spTree>
-      <p:nvGrpSpPr>
-        <p:cNvPr id="1" name=""/>
-        <p:cNvGrpSpPr/>
-        <p:nvPr/>
-      </p:nvGrpSpPr>
-      <p:grpSpPr>
-        <a:xfrm>
-          <a:off x="0" y="0"/>
-          <a:ext cx="0" cy="0"/>
-          <a:chOff x="0" y="0"/>
-          <a:chExt cx="0" cy="0"/>
-        </a:xfrm>
-      </p:grpSpPr>
-      <p:sp>
-        <p:nvSpPr>
-          <p:cNvPr id="2" name="TextBox 1">
-            <a:extLst>
-              <a:ext uri="{FF2B5EF4-FFF2-40B4-BE49-F238E27FC236}">
-                <a16:creationId xmlns:a16="http://schemas.microsoft.com/office/drawing/2014/main" id="{00ACFCE6-C3D3-4B96-9F52-BA607F1A8468}"/>
-              </a:ext>
-            </a:extLst>
-          </p:cNvPr>
-          <p:cNvSpPr txBox="1"/>
-          <p:nvPr/>
-        </p:nvSpPr>
-        <p:spPr>
-          <a:xfrm>
-            <a:off x="1632479" y="3105834"/>
-            <a:ext cx="8927042" cy="646331"/>
-          </a:xfrm>
-          <a:prstGeom prst="rect">
-            <a:avLst/>
-          </a:prstGeom>
-          <a:noFill/>
-        </p:spPr>
-        <p:txBody>
-          <a:bodyPr wrap="square" rtlCol="0">
-            <a:spAutoFit/>
-          </a:bodyPr>
-          <a:lstStyle/>
-          <a:p>
-            <a:pPr algn="ctr"/>
-            <a:r>
-              <a:rPr lang="en-US" altLang="ko-KR" sz="3600" b="1" dirty="0">
-                <a:latin typeface="+mj-ea"/>
-              </a:rPr>
-              <a:t>※ </a:t>
-            </a:r>
-            <a:r>
-              <a:rPr lang="ko-KR" altLang="en-US" sz="3600" b="1" dirty="0">
-                <a:latin typeface="+mj-ea"/>
-              </a:rPr>
-              <a:t>강우 이벤트 전부 학습으로 사용</a:t>
-            </a:r>
-            <a:endParaRPr lang="en-US" altLang="ko-KR" sz="3600" b="1" dirty="0">
-              <a:latin typeface="+mj-ea"/>
-            </a:endParaRPr>
-          </a:p>
-        </p:txBody>
-      </p:sp>
-    </p:spTree>
-    <p:extLst>
-      <p:ext uri="{BB962C8B-B14F-4D97-AF65-F5344CB8AC3E}">
-        <p14:creationId xmlns:p14="http://schemas.microsoft.com/office/powerpoint/2010/main" val="3337287211"/>
-      </p:ext>
-    </p:extLst>
-  </p:cSld>
-  <p:clrMapOvr>
-    <a:masterClrMapping/>
-  </p:clrMapOvr>
-</p:sld>
-</file>
-
-<file path=ppt/slides/slide20.xml><?xml version="1.0" encoding="utf-8"?>
-<p:sld xmlns:a="http://schemas.openxmlformats.org/drawingml/2006/main" xmlns:r="http://schemas.openxmlformats.org/officeDocument/2006/relationships" xmlns:p="http://schemas.openxmlformats.org/presentationml/2006/main">
-  <p:cSld>
-    <p:spTree>
-      <p:nvGrpSpPr>
-        <p:cNvPr id="1" name=""/>
-        <p:cNvGrpSpPr/>
-        <p:nvPr/>
-      </p:nvGrpSpPr>
-      <p:grpSpPr>
-        <a:xfrm>
-          <a:off x="0" y="0"/>
-          <a:ext cx="0" cy="0"/>
-          <a:chOff x="0" y="0"/>
-          <a:chExt cx="0" cy="0"/>
-        </a:xfrm>
-      </p:grpSpPr>
-      <p:sp>
-        <p:nvSpPr>
-          <p:cNvPr id="2" name="TextBox 1">
-            <a:extLst>
-              <a:ext uri="{FF2B5EF4-FFF2-40B4-BE49-F238E27FC236}">
-                <a16:creationId xmlns:a16="http://schemas.microsoft.com/office/drawing/2014/main" id="{00ACFCE6-C3D3-4B96-9F52-BA607F1A8468}"/>
-              </a:ext>
-            </a:extLst>
-          </p:cNvPr>
-          <p:cNvSpPr txBox="1"/>
-          <p:nvPr/>
-        </p:nvSpPr>
-        <p:spPr>
-          <a:xfrm>
-            <a:off x="377505" y="623270"/>
-            <a:ext cx="3398628" cy="830997"/>
-          </a:xfrm>
-          <a:prstGeom prst="rect">
-            <a:avLst/>
-          </a:prstGeom>
-          <a:noFill/>
-        </p:spPr>
-        <p:txBody>
-          <a:bodyPr wrap="square" rtlCol="0">
-            <a:spAutoFit/>
-          </a:bodyPr>
-          <a:lstStyle/>
-          <a:p>
-            <a:r>
-              <a:rPr lang="en-US" altLang="ko-KR" sz="2400" dirty="0" err="1">
-                <a:latin typeface="+mj-ea"/>
-              </a:rPr>
-              <a:t>num_of_layer</a:t>
-            </a:r>
-            <a:r>
-              <a:rPr lang="en-US" altLang="ko-KR" sz="2400" dirty="0">
-                <a:latin typeface="+mj-ea"/>
-              </a:rPr>
-              <a:t> = 12 </a:t>
-            </a:r>
-          </a:p>
-          <a:p>
-            <a:r>
-              <a:rPr lang="ko-KR" altLang="en-US" sz="2400" dirty="0">
-                <a:latin typeface="+mj-ea"/>
-                <a:ea typeface="+mj-ea"/>
-              </a:rPr>
-              <a:t>학습 코드 </a:t>
-            </a:r>
-            <a:r>
-              <a:rPr lang="en-US" altLang="ko-KR" sz="2400" dirty="0">
-                <a:latin typeface="+mj-ea"/>
-                <a:ea typeface="+mj-ea"/>
-              </a:rPr>
-              <a:t>- </a:t>
-            </a:r>
-            <a:r>
-              <a:rPr lang="ko-KR" altLang="en-US" sz="2400" dirty="0" err="1">
-                <a:latin typeface="+mj-ea"/>
-                <a:ea typeface="+mj-ea"/>
-              </a:rPr>
-              <a:t>대곡교</a:t>
-            </a:r>
-            <a:endParaRPr lang="ko-KR" altLang="en-US" sz="2400" dirty="0">
-              <a:latin typeface="+mj-ea"/>
-              <a:ea typeface="+mj-ea"/>
-            </a:endParaRPr>
-          </a:p>
-        </p:txBody>
-      </p:sp>
-      <p:sp>
-        <p:nvSpPr>
-          <p:cNvPr id="9" name="TextBox 8">
-            <a:extLst>
-              <a:ext uri="{FF2B5EF4-FFF2-40B4-BE49-F238E27FC236}">
-                <a16:creationId xmlns:a16="http://schemas.microsoft.com/office/drawing/2014/main" id="{619DB7C3-A352-4434-832E-7169C75AB765}"/>
-              </a:ext>
-            </a:extLst>
-          </p:cNvPr>
-          <p:cNvSpPr txBox="1"/>
-          <p:nvPr/>
-        </p:nvSpPr>
-        <p:spPr>
-          <a:xfrm>
-            <a:off x="1346199" y="1786468"/>
-            <a:ext cx="8602134" cy="369332"/>
-          </a:xfrm>
-          <a:prstGeom prst="rect">
-            <a:avLst/>
-          </a:prstGeom>
-          <a:noFill/>
-        </p:spPr>
-        <p:txBody>
-          <a:bodyPr wrap="square" rtlCol="0">
-            <a:spAutoFit/>
-          </a:bodyPr>
-          <a:lstStyle/>
-          <a:p>
-            <a:r>
-              <a:rPr lang="en-US" altLang="ko-KR" dirty="0"/>
-              <a:t>Train : Valid : Test = 7 : 2 : 1 </a:t>
-            </a:r>
-            <a:r>
-              <a:rPr lang="ko-KR" altLang="en-US" dirty="0"/>
-              <a:t>비율로 학습 진행</a:t>
-            </a:r>
-          </a:p>
-        </p:txBody>
-      </p:sp>
-      <p:graphicFrame>
-        <p:nvGraphicFramePr>
-          <p:cNvPr id="10" name="표 9">
-            <a:extLst>
-              <a:ext uri="{FF2B5EF4-FFF2-40B4-BE49-F238E27FC236}">
-                <a16:creationId xmlns:a16="http://schemas.microsoft.com/office/drawing/2014/main" id="{2F37C692-0D2E-44D5-8AE7-B05779A9F167}"/>
-              </a:ext>
-            </a:extLst>
-          </p:cNvPr>
-          <p:cNvGraphicFramePr>
-            <a:graphicFrameLocks noGrp="1"/>
-          </p:cNvGraphicFramePr>
-          <p:nvPr>
-            <p:extLst>
-              <p:ext uri="{D42A27DB-BD31-4B8C-83A1-F6EECF244321}">
-                <p14:modId xmlns:p14="http://schemas.microsoft.com/office/powerpoint/2010/main" val="658177139"/>
+                <p14:modId xmlns:p14="http://schemas.microsoft.com/office/powerpoint/2010/main" val="3779340042"/>
               </p:ext>
             </p:extLst>
           </p:nvPr>
@@ -9968,82 +7140,82 @@
                       <a:pPr latinLnBrk="1"/>
                       <a:r>
                         <a:rPr lang="en-US" altLang="ko-KR" sz="800" dirty="0"/>
-                        <a:t>0.0288</a:t>
-                      </a:r>
-                      <a:endParaRPr lang="ko-KR" altLang="en-US" sz="800" dirty="0"/>
-                    </a:p>
-                  </a:txBody>
-                  <a:tcPr/>
-                </a:tc>
-                <a:tc>
-                  <a:txBody>
-                    <a:bodyPr/>
-                    <a:lstStyle/>
-                    <a:p>
-                      <a:pPr latinLnBrk="1"/>
-                      <a:r>
-                        <a:rPr lang="en-US" altLang="ko-KR" sz="800" dirty="0"/>
-                        <a:t>0.0264</a:t>
-                      </a:r>
-                      <a:endParaRPr lang="ko-KR" altLang="en-US" sz="800" dirty="0"/>
-                    </a:p>
-                  </a:txBody>
-                  <a:tcPr/>
-                </a:tc>
-                <a:tc>
-                  <a:txBody>
-                    <a:bodyPr/>
-                    <a:lstStyle/>
-                    <a:p>
-                      <a:pPr latinLnBrk="1"/>
-                      <a:r>
-                        <a:rPr lang="en-US" altLang="ko-KR" sz="800" dirty="0"/>
-                        <a:t>0.0537</a:t>
-                      </a:r>
-                      <a:endParaRPr lang="ko-KR" altLang="en-US" sz="800" dirty="0"/>
-                    </a:p>
-                  </a:txBody>
-                  <a:tcPr/>
-                </a:tc>
-                <a:tc>
-                  <a:txBody>
-                    <a:bodyPr/>
-                    <a:lstStyle/>
-                    <a:p>
-                      <a:pPr latinLnBrk="1"/>
-                      <a:r>
-                        <a:rPr lang="en-US" altLang="ko-KR" sz="800" dirty="0"/>
-                        <a:t>0.935251</a:t>
-                      </a:r>
-                      <a:endParaRPr lang="ko-KR" altLang="en-US" sz="800" dirty="0"/>
-                    </a:p>
-                  </a:txBody>
-                  <a:tcPr/>
-                </a:tc>
-                <a:tc>
-                  <a:txBody>
-                    <a:bodyPr/>
-                    <a:lstStyle/>
-                    <a:p>
-                      <a:pPr latinLnBrk="1"/>
-                      <a:r>
-                        <a:rPr lang="en-US" altLang="ko-KR" sz="800" dirty="0"/>
-                        <a:t>0.936525</a:t>
-                      </a:r>
-                      <a:endParaRPr lang="ko-KR" altLang="en-US" sz="800" dirty="0"/>
-                    </a:p>
-                  </a:txBody>
-                  <a:tcPr/>
-                </a:tc>
-                <a:tc>
-                  <a:txBody>
-                    <a:bodyPr/>
-                    <a:lstStyle/>
-                    <a:p>
-                      <a:pPr latinLnBrk="1"/>
-                      <a:r>
-                        <a:rPr lang="en-US" altLang="ko-KR" sz="800" dirty="0"/>
-                        <a:t>21.145243</a:t>
+                        <a:t>0.0337</a:t>
+                      </a:r>
+                      <a:endParaRPr lang="ko-KR" altLang="en-US" sz="800" dirty="0"/>
+                    </a:p>
+                  </a:txBody>
+                  <a:tcPr/>
+                </a:tc>
+                <a:tc>
+                  <a:txBody>
+                    <a:bodyPr/>
+                    <a:lstStyle/>
+                    <a:p>
+                      <a:pPr latinLnBrk="1"/>
+                      <a:r>
+                        <a:rPr lang="en-US" altLang="ko-KR" sz="800" dirty="0"/>
+                        <a:t>0.0160</a:t>
+                      </a:r>
+                      <a:endParaRPr lang="ko-KR" altLang="en-US" sz="800" dirty="0"/>
+                    </a:p>
+                  </a:txBody>
+                  <a:tcPr/>
+                </a:tc>
+                <a:tc>
+                  <a:txBody>
+                    <a:bodyPr/>
+                    <a:lstStyle/>
+                    <a:p>
+                      <a:pPr latinLnBrk="1"/>
+                      <a:r>
+                        <a:rPr lang="en-US" altLang="ko-KR" sz="800" dirty="0"/>
+                        <a:t>0.0561</a:t>
+                      </a:r>
+                      <a:endParaRPr lang="ko-KR" altLang="en-US" sz="800" dirty="0"/>
+                    </a:p>
+                  </a:txBody>
+                  <a:tcPr/>
+                </a:tc>
+                <a:tc>
+                  <a:txBody>
+                    <a:bodyPr/>
+                    <a:lstStyle/>
+                    <a:p>
+                      <a:pPr latinLnBrk="1"/>
+                      <a:r>
+                        <a:rPr lang="en-US" altLang="ko-KR" sz="800" dirty="0"/>
+                        <a:t>0.976522</a:t>
+                      </a:r>
+                      <a:endParaRPr lang="ko-KR" altLang="en-US" sz="800" dirty="0"/>
+                    </a:p>
+                  </a:txBody>
+                  <a:tcPr/>
+                </a:tc>
+                <a:tc>
+                  <a:txBody>
+                    <a:bodyPr/>
+                    <a:lstStyle/>
+                    <a:p>
+                      <a:pPr latinLnBrk="1"/>
+                      <a:r>
+                        <a:rPr lang="en-US" altLang="ko-KR" sz="800" dirty="0"/>
+                        <a:t>0.978192</a:t>
+                      </a:r>
+                      <a:endParaRPr lang="ko-KR" altLang="en-US" sz="800" dirty="0"/>
+                    </a:p>
+                  </a:txBody>
+                  <a:tcPr/>
+                </a:tc>
+                <a:tc>
+                  <a:txBody>
+                    <a:bodyPr/>
+                    <a:lstStyle/>
+                    <a:p>
+                      <a:pPr latinLnBrk="1"/>
+                      <a:r>
+                        <a:rPr lang="en-US" altLang="ko-KR" sz="800" dirty="0"/>
+                        <a:t>4.313771</a:t>
                       </a:r>
                       <a:endParaRPr lang="ko-KR" altLang="en-US" sz="800" dirty="0"/>
                     </a:p>
@@ -10075,7 +7247,7 @@
           <p:nvPr>
             <p:extLst>
               <p:ext uri="{D42A27DB-BD31-4B8C-83A1-F6EECF244321}">
-                <p14:modId xmlns:p14="http://schemas.microsoft.com/office/powerpoint/2010/main" val="2910788408"/>
+                <p14:modId xmlns:p14="http://schemas.microsoft.com/office/powerpoint/2010/main" val="276562203"/>
               </p:ext>
             </p:extLst>
           </p:nvPr>
@@ -10157,7 +7329,7 @@
                       <a:pPr latinLnBrk="1"/>
                       <a:r>
                         <a:rPr lang="en-US" altLang="ko-KR" sz="800" dirty="0"/>
-                        <a:t>(6828 </a:t>
+                        <a:t>(6282 </a:t>
                       </a:r>
                       <a:r>
                         <a:rPr lang="ko-KR" altLang="en-US" sz="800" dirty="0"/>
@@ -10288,82 +7460,88 @@
                       <a:pPr latinLnBrk="1"/>
                       <a:r>
                         <a:rPr lang="en-US" altLang="ko-KR" sz="800" dirty="0"/>
-                        <a:t>0.0377</a:t>
-                      </a:r>
-                      <a:endParaRPr lang="ko-KR" altLang="en-US" sz="800" dirty="0"/>
-                    </a:p>
-                  </a:txBody>
-                  <a:tcPr/>
-                </a:tc>
-                <a:tc>
-                  <a:txBody>
-                    <a:bodyPr/>
-                    <a:lstStyle/>
-                    <a:p>
-                      <a:pPr latinLnBrk="1"/>
-                      <a:r>
-                        <a:rPr lang="en-US" altLang="ko-KR" sz="800" dirty="0"/>
-                        <a:t>0.0406</a:t>
-                      </a:r>
-                      <a:endParaRPr lang="ko-KR" altLang="en-US" sz="800" dirty="0"/>
-                    </a:p>
-                  </a:txBody>
-                  <a:tcPr/>
-                </a:tc>
-                <a:tc>
-                  <a:txBody>
-                    <a:bodyPr/>
-                    <a:lstStyle/>
-                    <a:p>
-                      <a:pPr latinLnBrk="1"/>
-                      <a:r>
-                        <a:rPr lang="en-US" altLang="ko-KR" sz="800" dirty="0"/>
-                        <a:t>0.0585</a:t>
-                      </a:r>
-                      <a:endParaRPr lang="ko-KR" altLang="en-US" sz="800" dirty="0"/>
-                    </a:p>
-                  </a:txBody>
-                  <a:tcPr/>
-                </a:tc>
-                <a:tc>
-                  <a:txBody>
-                    <a:bodyPr/>
-                    <a:lstStyle/>
-                    <a:p>
-                      <a:pPr latinLnBrk="1"/>
-                      <a:r>
-                        <a:rPr lang="en-US" altLang="ko-KR" sz="800" dirty="0"/>
-                        <a:t>0.933385</a:t>
-                      </a:r>
-                      <a:endParaRPr lang="ko-KR" altLang="en-US" sz="800" dirty="0"/>
-                    </a:p>
-                  </a:txBody>
-                  <a:tcPr/>
-                </a:tc>
-                <a:tc>
-                  <a:txBody>
-                    <a:bodyPr/>
-                    <a:lstStyle/>
-                    <a:p>
-                      <a:pPr latinLnBrk="1"/>
-                      <a:r>
-                        <a:rPr lang="en-US" altLang="ko-KR" sz="800" dirty="0"/>
-                        <a:t>0.939242</a:t>
-                      </a:r>
-                      <a:endParaRPr lang="ko-KR" altLang="en-US" sz="800" dirty="0"/>
-                    </a:p>
-                  </a:txBody>
-                  <a:tcPr/>
-                </a:tc>
-                <a:tc>
-                  <a:txBody>
-                    <a:bodyPr/>
-                    <a:lstStyle/>
-                    <a:p>
-                      <a:pPr latinLnBrk="1"/>
-                      <a:r>
-                        <a:rPr lang="en-US" altLang="ko-KR" sz="800" dirty="0"/>
-                        <a:t>3.664063</a:t>
+                        <a:t>0.0358</a:t>
+                      </a:r>
+                      <a:endParaRPr lang="ko-KR" altLang="en-US" sz="800" dirty="0"/>
+                    </a:p>
+                  </a:txBody>
+                  <a:tcPr/>
+                </a:tc>
+                <a:tc>
+                  <a:txBody>
+                    <a:bodyPr/>
+                    <a:lstStyle/>
+                    <a:p>
+                      <a:pPr latinLnBrk="1"/>
+                      <a:r>
+                        <a:rPr lang="en-US" altLang="ko-KR" sz="800" dirty="0"/>
+                        <a:t>0.0163</a:t>
+                      </a:r>
+                      <a:endParaRPr lang="ko-KR" altLang="en-US" sz="800" dirty="0"/>
+                    </a:p>
+                  </a:txBody>
+                  <a:tcPr/>
+                </a:tc>
+                <a:tc>
+                  <a:txBody>
+                    <a:bodyPr/>
+                    <a:lstStyle/>
+                    <a:p>
+                      <a:pPr latinLnBrk="1"/>
+                      <a:r>
+                        <a:rPr lang="en-US" altLang="ko-KR" sz="800" dirty="0"/>
+                        <a:t>0.0567</a:t>
+                      </a:r>
+                    </a:p>
+                    <a:p>
+                      <a:pPr latinLnBrk="1"/>
+                      <a:endParaRPr lang="ko-KR" altLang="en-US" sz="800" dirty="0"/>
+                    </a:p>
+                  </a:txBody>
+                  <a:tcPr/>
+                </a:tc>
+                <a:tc>
+                  <a:txBody>
+                    <a:bodyPr/>
+                    <a:lstStyle/>
+                    <a:p>
+                      <a:pPr latinLnBrk="1"/>
+                      <a:r>
+                        <a:rPr lang="en-US" altLang="ko-KR" sz="800" dirty="0"/>
+                        <a:t>0.966926</a:t>
+                      </a:r>
+                      <a:endParaRPr lang="ko-KR" altLang="en-US" sz="800" dirty="0"/>
+                    </a:p>
+                  </a:txBody>
+                  <a:tcPr/>
+                </a:tc>
+                <a:tc>
+                  <a:txBody>
+                    <a:bodyPr/>
+                    <a:lstStyle/>
+                    <a:p>
+                      <a:pPr latinLnBrk="1"/>
+                      <a:r>
+                        <a:rPr lang="en-US" altLang="ko-KR" sz="800" dirty="0"/>
+                        <a:t>0.968519</a:t>
+                      </a:r>
+                    </a:p>
+                    <a:p>
+                      <a:pPr latinLnBrk="1"/>
+                      <a:endParaRPr lang="ko-KR" altLang="en-US" sz="800" dirty="0"/>
+                    </a:p>
+                  </a:txBody>
+                  <a:tcPr/>
+                </a:tc>
+                <a:tc>
+                  <a:txBody>
+                    <a:bodyPr/>
+                    <a:lstStyle/>
+                    <a:p>
+                      <a:pPr latinLnBrk="1"/>
+                      <a:r>
+                        <a:rPr lang="en-US" altLang="ko-KR" sz="800" dirty="0"/>
+                        <a:t>3.448825</a:t>
                       </a:r>
                       <a:endParaRPr lang="ko-KR" altLang="en-US" sz="800" dirty="0"/>
                     </a:p>
@@ -10395,7 +7573,7 @@
           <p:nvPr>
             <p:extLst>
               <p:ext uri="{D42A27DB-BD31-4B8C-83A1-F6EECF244321}">
-                <p14:modId xmlns:p14="http://schemas.microsoft.com/office/powerpoint/2010/main" val="273802376"/>
+                <p14:modId xmlns:p14="http://schemas.microsoft.com/office/powerpoint/2010/main" val="2489807042"/>
               </p:ext>
             </p:extLst>
           </p:nvPr>
@@ -10608,82 +7786,82 @@
                       <a:pPr latinLnBrk="1"/>
                       <a:r>
                         <a:rPr lang="en-US" altLang="ko-KR" sz="800" dirty="0"/>
-                        <a:t>0.0448</a:t>
-                      </a:r>
-                      <a:endParaRPr lang="ko-KR" altLang="en-US" sz="800" dirty="0"/>
-                    </a:p>
-                  </a:txBody>
-                  <a:tcPr/>
-                </a:tc>
-                <a:tc>
-                  <a:txBody>
-                    <a:bodyPr/>
-                    <a:lstStyle/>
-                    <a:p>
-                      <a:pPr latinLnBrk="1"/>
-                      <a:r>
-                        <a:rPr lang="en-US" altLang="ko-KR" sz="800" dirty="0"/>
-                        <a:t>0.0509</a:t>
-                      </a:r>
-                      <a:endParaRPr lang="ko-KR" altLang="en-US" sz="800" dirty="0"/>
-                    </a:p>
-                  </a:txBody>
-                  <a:tcPr/>
-                </a:tc>
-                <a:tc>
-                  <a:txBody>
-                    <a:bodyPr/>
-                    <a:lstStyle/>
-                    <a:p>
-                      <a:pPr latinLnBrk="1"/>
-                      <a:r>
-                        <a:rPr lang="en-US" altLang="ko-KR" sz="800" dirty="0"/>
-                        <a:t>0.0672</a:t>
-                      </a:r>
-                      <a:endParaRPr lang="ko-KR" altLang="en-US" sz="800" dirty="0"/>
-                    </a:p>
-                  </a:txBody>
-                  <a:tcPr/>
-                </a:tc>
-                <a:tc>
-                  <a:txBody>
-                    <a:bodyPr/>
-                    <a:lstStyle/>
-                    <a:p>
-                      <a:pPr latinLnBrk="1"/>
-                      <a:r>
-                        <a:rPr lang="en-US" altLang="ko-KR" sz="800" dirty="0"/>
-                        <a:t>0.873095</a:t>
-                      </a:r>
-                      <a:endParaRPr lang="ko-KR" altLang="en-US" sz="800" dirty="0"/>
-                    </a:p>
-                  </a:txBody>
-                  <a:tcPr/>
-                </a:tc>
-                <a:tc>
-                  <a:txBody>
-                    <a:bodyPr/>
-                    <a:lstStyle/>
-                    <a:p>
-                      <a:pPr latinLnBrk="1"/>
-                      <a:r>
-                        <a:rPr lang="en-US" altLang="ko-KR" sz="800" dirty="0"/>
-                        <a:t>0.891142</a:t>
-                      </a:r>
-                      <a:endParaRPr lang="ko-KR" altLang="en-US" sz="800" dirty="0"/>
-                    </a:p>
-                  </a:txBody>
-                  <a:tcPr/>
-                </a:tc>
-                <a:tc>
-                  <a:txBody>
-                    <a:bodyPr/>
-                    <a:lstStyle/>
-                    <a:p>
-                      <a:pPr latinLnBrk="1"/>
-                      <a:r>
-                        <a:rPr lang="en-US" altLang="ko-KR" sz="800" dirty="0"/>
-                        <a:t>7.571774</a:t>
+                        <a:t>0.0314</a:t>
+                      </a:r>
+                      <a:endParaRPr lang="ko-KR" altLang="en-US" sz="800" dirty="0"/>
+                    </a:p>
+                  </a:txBody>
+                  <a:tcPr/>
+                </a:tc>
+                <a:tc>
+                  <a:txBody>
+                    <a:bodyPr/>
+                    <a:lstStyle/>
+                    <a:p>
+                      <a:pPr latinLnBrk="1"/>
+                      <a:r>
+                        <a:rPr lang="en-US" altLang="ko-KR" sz="800" dirty="0"/>
+                        <a:t>0.0144</a:t>
+                      </a:r>
+                      <a:endParaRPr lang="ko-KR" altLang="en-US" sz="800" dirty="0"/>
+                    </a:p>
+                  </a:txBody>
+                  <a:tcPr/>
+                </a:tc>
+                <a:tc>
+                  <a:txBody>
+                    <a:bodyPr/>
+                    <a:lstStyle/>
+                    <a:p>
+                      <a:pPr latinLnBrk="1"/>
+                      <a:r>
+                        <a:rPr lang="en-US" altLang="ko-KR" sz="800" dirty="0"/>
+                        <a:t>0.0628</a:t>
+                      </a:r>
+                      <a:endParaRPr lang="ko-KR" altLang="en-US" sz="800" dirty="0"/>
+                    </a:p>
+                  </a:txBody>
+                  <a:tcPr/>
+                </a:tc>
+                <a:tc>
+                  <a:txBody>
+                    <a:bodyPr/>
+                    <a:lstStyle/>
+                    <a:p>
+                      <a:pPr latinLnBrk="1"/>
+                      <a:r>
+                        <a:rPr lang="en-US" altLang="ko-KR" sz="800" dirty="0"/>
+                        <a:t>0.944348</a:t>
+                      </a:r>
+                      <a:endParaRPr lang="ko-KR" altLang="en-US" sz="800" dirty="0"/>
+                    </a:p>
+                  </a:txBody>
+                  <a:tcPr/>
+                </a:tc>
+                <a:tc>
+                  <a:txBody>
+                    <a:bodyPr/>
+                    <a:lstStyle/>
+                    <a:p>
+                      <a:pPr latinLnBrk="1"/>
+                      <a:r>
+                        <a:rPr lang="en-US" altLang="ko-KR" sz="800" dirty="0"/>
+                        <a:t>0.945049</a:t>
+                      </a:r>
+                      <a:endParaRPr lang="ko-KR" altLang="en-US" sz="800" dirty="0"/>
+                    </a:p>
+                  </a:txBody>
+                  <a:tcPr/>
+                </a:tc>
+                <a:tc>
+                  <a:txBody>
+                    <a:bodyPr/>
+                    <a:lstStyle/>
+                    <a:p>
+                      <a:pPr latinLnBrk="1"/>
+                      <a:r>
+                        <a:rPr lang="en-US" altLang="ko-KR" sz="800" dirty="0"/>
+                        <a:t>6.891850</a:t>
                       </a:r>
                       <a:endParaRPr lang="ko-KR" altLang="en-US" sz="800" dirty="0"/>
                     </a:p>
@@ -10728,8 +7906,8 @@
         </p:blipFill>
         <p:spPr>
           <a:xfrm>
-            <a:off x="1040921" y="3747356"/>
-            <a:ext cx="5245935" cy="1780928"/>
+            <a:off x="970536" y="3752862"/>
+            <a:ext cx="5386707" cy="1769917"/>
           </a:xfrm>
           <a:prstGeom prst="rect">
             <a:avLst/>
@@ -10816,56 +7994,10 @@
           </a:p>
         </p:txBody>
       </p:sp>
-      <p:sp>
-        <p:nvSpPr>
-          <p:cNvPr id="15" name="직사각형 14">
-            <a:extLst>
-              <a:ext uri="{FF2B5EF4-FFF2-40B4-BE49-F238E27FC236}">
-                <a16:creationId xmlns:a16="http://schemas.microsoft.com/office/drawing/2014/main" id="{0E1D352C-CEA4-458D-A75A-EF5BD515F9FF}"/>
-              </a:ext>
-            </a:extLst>
-          </p:cNvPr>
-          <p:cNvSpPr/>
-          <p:nvPr/>
-        </p:nvSpPr>
-        <p:spPr>
-          <a:xfrm>
-            <a:off x="3657600" y="1786468"/>
-            <a:ext cx="5364976" cy="3886199"/>
-          </a:xfrm>
-          <a:prstGeom prst="rect">
-            <a:avLst/>
-          </a:prstGeom>
-        </p:spPr>
-        <p:style>
-          <a:lnRef idx="2">
-            <a:schemeClr val="accent1">
-              <a:shade val="50000"/>
-            </a:schemeClr>
-          </a:lnRef>
-          <a:fillRef idx="1">
-            <a:schemeClr val="accent1"/>
-          </a:fillRef>
-          <a:effectRef idx="0">
-            <a:schemeClr val="accent1"/>
-          </a:effectRef>
-          <a:fontRef idx="minor">
-            <a:schemeClr val="lt1"/>
-          </a:fontRef>
-        </p:style>
-        <p:txBody>
-          <a:bodyPr rtlCol="0" anchor="ctr"/>
-          <a:lstStyle/>
-          <a:p>
-            <a:pPr algn="ctr"/>
-            <a:endParaRPr lang="ko-KR" altLang="en-US"/>
-          </a:p>
-        </p:txBody>
-      </p:sp>
     </p:spTree>
     <p:extLst>
       <p:ext uri="{BB962C8B-B14F-4D97-AF65-F5344CB8AC3E}">
-        <p14:creationId xmlns:p14="http://schemas.microsoft.com/office/powerpoint/2010/main" val="3894363703"/>
+        <p14:creationId xmlns:p14="http://schemas.microsoft.com/office/powerpoint/2010/main" val="3322997904"/>
       </p:ext>
     </p:extLst>
   </p:cSld>
@@ -10875,7 +8007,7 @@
 </p:sld>
 </file>
 
-<file path=ppt/slides/slide21.xml><?xml version="1.0" encoding="utf-8"?>
+<file path=ppt/slides/slide16.xml><?xml version="1.0" encoding="utf-8"?>
 <p:sld xmlns:a="http://schemas.openxmlformats.org/drawingml/2006/main" xmlns:r="http://schemas.openxmlformats.org/officeDocument/2006/relationships" xmlns:p="http://schemas.openxmlformats.org/presentationml/2006/main">
   <p:cSld>
     <p:spTree>
@@ -10907,7 +8039,7 @@
           <p:nvPr>
             <p:extLst>
               <p:ext uri="{D42A27DB-BD31-4B8C-83A1-F6EECF244321}">
-                <p14:modId xmlns:p14="http://schemas.microsoft.com/office/powerpoint/2010/main" val="3746536802"/>
+                <p14:modId xmlns:p14="http://schemas.microsoft.com/office/powerpoint/2010/main" val="78475510"/>
               </p:ext>
             </p:extLst>
           </p:nvPr>
@@ -11019,7 +8151,7 @@
                       </a:r>
                       <a:r>
                         <a:rPr lang="en-US" altLang="ko-KR" sz="1400" dirty="0"/>
-                        <a:t>-2.419031330681882</a:t>
+                        <a:t>0.5347686030011513</a:t>
                       </a:r>
                     </a:p>
                     <a:p>
@@ -11030,7 +8162,7 @@
                       </a:r>
                       <a:r>
                         <a:rPr lang="en-US" altLang="ko-KR" sz="1400" dirty="0"/>
-                        <a:t>0.13566167586722264</a:t>
+                        <a:t>0.06515077509181906</a:t>
                       </a:r>
                     </a:p>
                     <a:p>
@@ -11041,7 +8173,7 @@
                       </a:r>
                       <a:r>
                         <a:rPr lang="en-US" altLang="ko-KR" sz="1400" dirty="0"/>
-                        <a:t>0.27432608577940193</a:t>
+                        <a:t>0.2023961880471971</a:t>
                       </a:r>
                     </a:p>
                     <a:p>
@@ -11052,7 +8184,7 @@
                       </a:r>
                       <a:r>
                         <a:rPr lang="en-US" altLang="ko-KR" sz="1400" dirty="0"/>
-                        <a:t>0.3683227876024271</a:t>
+                        <a:t>0.2552464986866991</a:t>
                       </a:r>
                       <a:endParaRPr lang="pt-BR" altLang="ko-KR" sz="1400" dirty="0"/>
                     </a:p>
@@ -11103,7 +8235,7 @@
                       </a:r>
                       <a:r>
                         <a:rPr lang="en-US" altLang="ko-KR" sz="1400" dirty="0"/>
-                        <a:t>0.6617230110332062</a:t>
+                        <a:t>0.749784161153433</a:t>
                       </a:r>
                       <a:r>
                         <a:rPr lang="pt-BR" altLang="ko-KR" sz="1400" dirty="0"/>
@@ -11118,7 +8250,7 @@
                       </a:r>
                       <a:r>
                         <a:rPr lang="en-US" altLang="ko-KR" sz="1400" dirty="0"/>
-                        <a:t>0.09466376147287353</a:t>
+                        <a:t>0.22773603085819336</a:t>
                       </a:r>
                       <a:r>
                         <a:rPr lang="pt-BR" altLang="ko-KR" sz="1400" dirty="0"/>
@@ -11133,7 +8265,7 @@
                       </a:r>
                       <a:r>
                         <a:rPr lang="en-US" altLang="ko-KR" sz="1400" dirty="0"/>
-                        <a:t>0.24711518228054047</a:t>
+                        <a:t>0.34499009158876204</a:t>
                       </a:r>
                       <a:r>
                         <a:rPr lang="pt-BR" altLang="ko-KR" sz="1400" dirty="0"/>
@@ -11148,7 +8280,7 @@
                       </a:r>
                       <a:r>
                         <a:rPr lang="en-US" altLang="ko-KR" sz="1400" dirty="0"/>
-                        <a:t>0.3076747657395282</a:t>
+                        <a:t>0.47721696413496595</a:t>
                       </a:r>
                       <a:endParaRPr lang="ko-KR" altLang="en-US" sz="1400" b="0" dirty="0"/>
                     </a:p>
@@ -11209,7 +8341,7 @@
                       </a:r>
                       <a:r>
                         <a:rPr lang="en-US" altLang="ko-KR" sz="1400" dirty="0"/>
-                        <a:t>0.7240690801943894</a:t>
+                        <a:t>0.8294799701303481</a:t>
                       </a:r>
                       <a:r>
                         <a:rPr lang="pt-BR" altLang="ko-KR" sz="1400" dirty="0"/>
@@ -11224,7 +8356,7 @@
                       </a:r>
                       <a:r>
                         <a:rPr lang="en-US" altLang="ko-KR" sz="1400" dirty="0"/>
-                        <a:t>0.02768200305472064</a:t>
+                        <a:t>0.07874378146005706</a:t>
                       </a:r>
                       <a:r>
                         <a:rPr lang="pt-BR" altLang="ko-KR" sz="1400" dirty="0"/>
@@ -11239,7 +8371,7 @@
                       </a:r>
                       <a:r>
                         <a:rPr lang="en-US" altLang="ko-KR" sz="1400" dirty="0"/>
-                        <a:t>0.14641764938831325</a:t>
+                        <a:t>0.1590827772352431</a:t>
                       </a:r>
                       <a:r>
                         <a:rPr lang="pt-BR" altLang="ko-KR" sz="1400" dirty="0"/>
@@ -11254,7 +8386,7 @@
                       </a:r>
                       <a:r>
                         <a:rPr lang="en-US" altLang="ko-KR" sz="1400" dirty="0"/>
-                        <a:t>0.1663790944040766</a:t>
+                        <a:t>0.28061322395791877</a:t>
                       </a:r>
                       <a:r>
                         <a:rPr lang="pt-BR" altLang="ko-KR" sz="1400" dirty="0"/>
@@ -11309,7 +8441,7 @@
                       </a:r>
                       <a:r>
                         <a:rPr lang="en-US" altLang="ko-KR" sz="1400" dirty="0"/>
-                        <a:t>0.08522785843810254</a:t>
+                        <a:t>0.7660424705680733</a:t>
                       </a:r>
                       <a:endParaRPr lang="pt-BR" altLang="ko-KR" sz="1400" dirty="0"/>
                     </a:p>
@@ -11321,7 +8453,7 @@
                       </a:r>
                       <a:r>
                         <a:rPr lang="en-US" altLang="ko-KR" sz="1400" dirty="0"/>
-                        <a:t>0.06449334175540868</a:t>
+                        <a:t>0.08120642378620117</a:t>
                       </a:r>
                       <a:r>
                         <a:rPr lang="pt-BR" altLang="ko-KR" sz="1400" dirty="0"/>
@@ -11336,7 +8468,7 @@
                       </a:r>
                       <a:r>
                         <a:rPr lang="en-US" altLang="ko-KR" sz="1400" dirty="0"/>
-                        <a:t>0.18133603036403656</a:t>
+                        <a:t>0.24448778284920586</a:t>
                       </a:r>
                       <a:r>
                         <a:rPr lang="pt-BR" altLang="ko-KR" sz="1400" dirty="0"/>
@@ -11351,7 +8483,7 @@
                       </a:r>
                       <a:r>
                         <a:rPr lang="en-US" altLang="ko-KR" sz="1400" dirty="0"/>
-                        <a:t>0.2539553932394598</a:t>
+                        <a:t>0.2849674082876868</a:t>
                       </a:r>
                       <a:endParaRPr lang="ko-KR" altLang="en-US" sz="1400" b="0" dirty="0"/>
                     </a:p>
@@ -11448,8 +8580,8 @@
         </p:blipFill>
         <p:spPr>
           <a:xfrm>
-            <a:off x="5377268" y="4348810"/>
-            <a:ext cx="3036353" cy="1587184"/>
+            <a:off x="5377887" y="4347341"/>
+            <a:ext cx="3035115" cy="1590122"/>
           </a:xfrm>
           <a:prstGeom prst="rect">
             <a:avLst/>
@@ -11484,8 +8616,8 @@
         </p:blipFill>
         <p:spPr>
           <a:xfrm>
-            <a:off x="8512021" y="4327663"/>
-            <a:ext cx="3079562" cy="1628090"/>
+            <a:off x="8522019" y="4346665"/>
+            <a:ext cx="3059566" cy="1590085"/>
           </a:xfrm>
           <a:prstGeom prst="rect">
             <a:avLst/>
@@ -11520,8 +8652,8 @@
         </p:blipFill>
         <p:spPr>
           <a:xfrm>
-            <a:off x="5402950" y="1985777"/>
-            <a:ext cx="2990558" cy="1555585"/>
+            <a:off x="5401921" y="1970948"/>
+            <a:ext cx="2992616" cy="1585244"/>
           </a:xfrm>
           <a:prstGeom prst="rect">
             <a:avLst/>
@@ -11556,8 +8688,2710 @@
         </p:blipFill>
         <p:spPr>
           <a:xfrm>
-            <a:off x="8535827" y="1984657"/>
-            <a:ext cx="3015518" cy="1582834"/>
+            <a:off x="8554875" y="1982094"/>
+            <a:ext cx="2977423" cy="1587959"/>
+          </a:xfrm>
+          <a:prstGeom prst="rect">
+            <a:avLst/>
+          </a:prstGeom>
+        </p:spPr>
+      </p:pic>
+      <p:sp>
+        <p:nvSpPr>
+          <p:cNvPr id="33" name="TextBox 32">
+            <a:extLst>
+              <a:ext uri="{FF2B5EF4-FFF2-40B4-BE49-F238E27FC236}">
+                <a16:creationId xmlns:a16="http://schemas.microsoft.com/office/drawing/2014/main" id="{9666F396-617E-4A87-B71B-140F779486DE}"/>
+              </a:ext>
+            </a:extLst>
+          </p:cNvPr>
+          <p:cNvSpPr txBox="1"/>
+          <p:nvPr/>
+        </p:nvSpPr>
+        <p:spPr>
+          <a:xfrm>
+            <a:off x="6261235" y="3605498"/>
+            <a:ext cx="1268420" cy="246221"/>
+          </a:xfrm>
+          <a:prstGeom prst="rect">
+            <a:avLst/>
+          </a:prstGeom>
+          <a:noFill/>
+        </p:spPr>
+        <p:txBody>
+          <a:bodyPr wrap="square" rtlCol="0">
+            <a:spAutoFit/>
+          </a:bodyPr>
+          <a:lstStyle/>
+          <a:p>
+            <a:pPr algn="ctr" latinLnBrk="1"/>
+            <a:r>
+              <a:rPr lang="en-US" altLang="ko-KR" sz="1000" dirty="0"/>
+              <a:t>testdata_220712</a:t>
+            </a:r>
+            <a:endParaRPr lang="ko-KR" altLang="en-US" sz="1000" dirty="0"/>
+          </a:p>
+        </p:txBody>
+      </p:sp>
+      <p:sp>
+        <p:nvSpPr>
+          <p:cNvPr id="34" name="TextBox 33">
+            <a:extLst>
+              <a:ext uri="{FF2B5EF4-FFF2-40B4-BE49-F238E27FC236}">
+                <a16:creationId xmlns:a16="http://schemas.microsoft.com/office/drawing/2014/main" id="{3CA25465-4979-4F8A-9B0A-4264AEA6DA31}"/>
+              </a:ext>
+            </a:extLst>
+          </p:cNvPr>
+          <p:cNvSpPr txBox="1"/>
+          <p:nvPr/>
+        </p:nvSpPr>
+        <p:spPr>
+          <a:xfrm>
+            <a:off x="9409377" y="3605498"/>
+            <a:ext cx="1268420" cy="246221"/>
+          </a:xfrm>
+          <a:prstGeom prst="rect">
+            <a:avLst/>
+          </a:prstGeom>
+          <a:noFill/>
+        </p:spPr>
+        <p:txBody>
+          <a:bodyPr wrap="square" rtlCol="0">
+            <a:spAutoFit/>
+          </a:bodyPr>
+          <a:lstStyle/>
+          <a:p>
+            <a:pPr latinLnBrk="1"/>
+            <a:r>
+              <a:rPr lang="en-US" altLang="ko-KR" sz="1000" dirty="0"/>
+              <a:t>testdata_230711</a:t>
+            </a:r>
+            <a:endParaRPr lang="ko-KR" altLang="en-US" sz="1000" dirty="0"/>
+          </a:p>
+        </p:txBody>
+      </p:sp>
+      <p:sp>
+        <p:nvSpPr>
+          <p:cNvPr id="35" name="TextBox 34">
+            <a:extLst>
+              <a:ext uri="{FF2B5EF4-FFF2-40B4-BE49-F238E27FC236}">
+                <a16:creationId xmlns:a16="http://schemas.microsoft.com/office/drawing/2014/main" id="{86B302A1-B195-4A71-8F8A-E20D52E67826}"/>
+              </a:ext>
+            </a:extLst>
+          </p:cNvPr>
+          <p:cNvSpPr txBox="1"/>
+          <p:nvPr/>
+        </p:nvSpPr>
+        <p:spPr>
+          <a:xfrm>
+            <a:off x="6261235" y="6040135"/>
+            <a:ext cx="1268420" cy="246221"/>
+          </a:xfrm>
+          <a:prstGeom prst="rect">
+            <a:avLst/>
+          </a:prstGeom>
+          <a:noFill/>
+        </p:spPr>
+        <p:txBody>
+          <a:bodyPr wrap="square" rtlCol="0">
+            <a:spAutoFit/>
+          </a:bodyPr>
+          <a:lstStyle/>
+          <a:p>
+            <a:pPr algn="ctr" latinLnBrk="1"/>
+            <a:r>
+              <a:rPr lang="en-US" altLang="ko-KR" sz="1000" dirty="0"/>
+              <a:t>testdata_250716</a:t>
+            </a:r>
+            <a:endParaRPr lang="ko-KR" altLang="en-US" sz="1000" dirty="0"/>
+          </a:p>
+        </p:txBody>
+      </p:sp>
+      <p:sp>
+        <p:nvSpPr>
+          <p:cNvPr id="36" name="TextBox 35">
+            <a:extLst>
+              <a:ext uri="{FF2B5EF4-FFF2-40B4-BE49-F238E27FC236}">
+                <a16:creationId xmlns:a16="http://schemas.microsoft.com/office/drawing/2014/main" id="{9CD4B0EC-3B8B-4308-B662-5880CA2DCDE8}"/>
+              </a:ext>
+            </a:extLst>
+          </p:cNvPr>
+          <p:cNvSpPr txBox="1"/>
+          <p:nvPr/>
+        </p:nvSpPr>
+        <p:spPr>
+          <a:xfrm>
+            <a:off x="9417592" y="6040135"/>
+            <a:ext cx="1268420" cy="246221"/>
+          </a:xfrm>
+          <a:prstGeom prst="rect">
+            <a:avLst/>
+          </a:prstGeom>
+          <a:noFill/>
+        </p:spPr>
+        <p:txBody>
+          <a:bodyPr wrap="square" rtlCol="0">
+            <a:spAutoFit/>
+          </a:bodyPr>
+          <a:lstStyle/>
+          <a:p>
+            <a:pPr algn="ctr" latinLnBrk="1"/>
+            <a:r>
+              <a:rPr lang="en-US" altLang="ko-KR" sz="1000" dirty="0"/>
+              <a:t>testdata_250814</a:t>
+            </a:r>
+            <a:endParaRPr lang="ko-KR" altLang="en-US" sz="1000" dirty="0"/>
+          </a:p>
+        </p:txBody>
+      </p:sp>
+      <p:sp>
+        <p:nvSpPr>
+          <p:cNvPr id="37" name="TextBox 36">
+            <a:extLst>
+              <a:ext uri="{FF2B5EF4-FFF2-40B4-BE49-F238E27FC236}">
+                <a16:creationId xmlns:a16="http://schemas.microsoft.com/office/drawing/2014/main" id="{9A4AFE95-2DED-42BC-A1CA-CCD46CBA4F68}"/>
+              </a:ext>
+            </a:extLst>
+          </p:cNvPr>
+          <p:cNvSpPr txBox="1"/>
+          <p:nvPr/>
+        </p:nvSpPr>
+        <p:spPr>
+          <a:xfrm>
+            <a:off x="33795" y="3792450"/>
+            <a:ext cx="732232" cy="246221"/>
+          </a:xfrm>
+          <a:prstGeom prst="rect">
+            <a:avLst/>
+          </a:prstGeom>
+          <a:noFill/>
+        </p:spPr>
+        <p:txBody>
+          <a:bodyPr wrap="square" rtlCol="0">
+            <a:spAutoFit/>
+          </a:bodyPr>
+          <a:lstStyle/>
+          <a:p>
+            <a:pPr algn="ctr" latinLnBrk="1"/>
+            <a:r>
+              <a:rPr lang="ko-KR" altLang="en-US" sz="1000" dirty="0"/>
+              <a:t>증설 전</a:t>
+            </a:r>
+          </a:p>
+        </p:txBody>
+      </p:sp>
+      <p:sp>
+        <p:nvSpPr>
+          <p:cNvPr id="39" name="TextBox 38">
+            <a:extLst>
+              <a:ext uri="{FF2B5EF4-FFF2-40B4-BE49-F238E27FC236}">
+                <a16:creationId xmlns:a16="http://schemas.microsoft.com/office/drawing/2014/main" id="{CE878C64-9135-48B4-AD37-DDB91950CAEC}"/>
+              </a:ext>
+            </a:extLst>
+          </p:cNvPr>
+          <p:cNvSpPr txBox="1"/>
+          <p:nvPr/>
+        </p:nvSpPr>
+        <p:spPr>
+          <a:xfrm>
+            <a:off x="33795" y="4260325"/>
+            <a:ext cx="732232" cy="246221"/>
+          </a:xfrm>
+          <a:prstGeom prst="rect">
+            <a:avLst/>
+          </a:prstGeom>
+          <a:noFill/>
+        </p:spPr>
+        <p:txBody>
+          <a:bodyPr wrap="square" rtlCol="0">
+            <a:spAutoFit/>
+          </a:bodyPr>
+          <a:lstStyle/>
+          <a:p>
+            <a:pPr algn="ctr" latinLnBrk="1"/>
+            <a:r>
+              <a:rPr lang="ko-KR" altLang="en-US" sz="1000" dirty="0"/>
+              <a:t>증설 후</a:t>
+            </a:r>
+          </a:p>
+        </p:txBody>
+      </p:sp>
+      <p:cxnSp>
+        <p:nvCxnSpPr>
+          <p:cNvPr id="8" name="직선 연결선 7">
+            <a:extLst>
+              <a:ext uri="{FF2B5EF4-FFF2-40B4-BE49-F238E27FC236}">
+                <a16:creationId xmlns:a16="http://schemas.microsoft.com/office/drawing/2014/main" id="{105E4055-07E8-4C56-93F5-5CE2B0B1AE01}"/>
+              </a:ext>
+            </a:extLst>
+          </p:cNvPr>
+          <p:cNvCxnSpPr/>
+          <p:nvPr/>
+        </p:nvCxnSpPr>
+        <p:spPr>
+          <a:xfrm flipH="1">
+            <a:off x="0" y="4148667"/>
+            <a:ext cx="800836" cy="0"/>
+          </a:xfrm>
+          <a:prstGeom prst="line">
+            <a:avLst/>
+          </a:prstGeom>
+        </p:spPr>
+        <p:style>
+          <a:lnRef idx="3">
+            <a:schemeClr val="dk1"/>
+          </a:lnRef>
+          <a:fillRef idx="0">
+            <a:schemeClr val="dk1"/>
+          </a:fillRef>
+          <a:effectRef idx="2">
+            <a:schemeClr val="dk1"/>
+          </a:effectRef>
+          <a:fontRef idx="minor">
+            <a:schemeClr val="tx1"/>
+          </a:fontRef>
+        </p:style>
+      </p:cxnSp>
+      <p:sp>
+        <p:nvSpPr>
+          <p:cNvPr id="16" name="TextBox 15">
+            <a:extLst>
+              <a:ext uri="{FF2B5EF4-FFF2-40B4-BE49-F238E27FC236}">
+                <a16:creationId xmlns:a16="http://schemas.microsoft.com/office/drawing/2014/main" id="{7DB25FE2-FB8B-4DFF-B0F9-07A68FD42E46}"/>
+              </a:ext>
+            </a:extLst>
+          </p:cNvPr>
+          <p:cNvSpPr txBox="1"/>
+          <p:nvPr/>
+        </p:nvSpPr>
+        <p:spPr>
+          <a:xfrm>
+            <a:off x="377505" y="623270"/>
+            <a:ext cx="3119228" cy="830997"/>
+          </a:xfrm>
+          <a:prstGeom prst="rect">
+            <a:avLst/>
+          </a:prstGeom>
+          <a:noFill/>
+        </p:spPr>
+        <p:txBody>
+          <a:bodyPr wrap="square" rtlCol="0">
+            <a:spAutoFit/>
+          </a:bodyPr>
+          <a:lstStyle/>
+          <a:p>
+            <a:r>
+              <a:rPr lang="en-US" altLang="ko-KR" sz="2400" dirty="0" err="1">
+                <a:latin typeface="+mj-ea"/>
+              </a:rPr>
+              <a:t>num_of_layer</a:t>
+            </a:r>
+            <a:r>
+              <a:rPr lang="en-US" altLang="ko-KR" sz="2400" dirty="0">
+                <a:latin typeface="+mj-ea"/>
+              </a:rPr>
+              <a:t> =36 </a:t>
+            </a:r>
+            <a:r>
+              <a:rPr lang="ko-KR" altLang="en-US" sz="2400" dirty="0">
+                <a:latin typeface="+mj-ea"/>
+                <a:ea typeface="+mj-ea"/>
+              </a:rPr>
+              <a:t>예측 코드 </a:t>
+            </a:r>
+            <a:r>
+              <a:rPr lang="en-US" altLang="ko-KR" sz="2400">
+                <a:latin typeface="+mj-ea"/>
+                <a:ea typeface="+mj-ea"/>
+              </a:rPr>
+              <a:t>- </a:t>
+            </a:r>
+            <a:r>
+              <a:rPr lang="ko-KR" altLang="en-US" sz="2400">
+                <a:latin typeface="+mj-ea"/>
+                <a:ea typeface="+mj-ea"/>
+              </a:rPr>
+              <a:t>대곡교</a:t>
+            </a:r>
+            <a:endParaRPr lang="ko-KR" altLang="en-US" sz="2400" dirty="0">
+              <a:latin typeface="+mj-ea"/>
+              <a:ea typeface="+mj-ea"/>
+            </a:endParaRPr>
+          </a:p>
+        </p:txBody>
+      </p:sp>
+    </p:spTree>
+    <p:extLst>
+      <p:ext uri="{BB962C8B-B14F-4D97-AF65-F5344CB8AC3E}">
+        <p14:creationId xmlns:p14="http://schemas.microsoft.com/office/powerpoint/2010/main" val="3023172442"/>
+      </p:ext>
+    </p:extLst>
+  </p:cSld>
+  <p:clrMapOvr>
+    <a:masterClrMapping/>
+  </p:clrMapOvr>
+</p:sld>
+</file>
+
+<file path=ppt/slides/slide17.xml><?xml version="1.0" encoding="utf-8"?>
+<p:sld xmlns:a="http://schemas.openxmlformats.org/drawingml/2006/main" xmlns:r="http://schemas.openxmlformats.org/officeDocument/2006/relationships" xmlns:p="http://schemas.openxmlformats.org/presentationml/2006/main">
+  <p:cSld>
+    <p:spTree>
+      <p:nvGrpSpPr>
+        <p:cNvPr id="1" name=""/>
+        <p:cNvGrpSpPr/>
+        <p:nvPr/>
+      </p:nvGrpSpPr>
+      <p:grpSpPr>
+        <a:xfrm>
+          <a:off x="0" y="0"/>
+          <a:ext cx="0" cy="0"/>
+          <a:chOff x="0" y="0"/>
+          <a:chExt cx="0" cy="0"/>
+        </a:xfrm>
+      </p:grpSpPr>
+      <p:sp>
+        <p:nvSpPr>
+          <p:cNvPr id="2" name="TextBox 1">
+            <a:extLst>
+              <a:ext uri="{FF2B5EF4-FFF2-40B4-BE49-F238E27FC236}">
+                <a16:creationId xmlns:a16="http://schemas.microsoft.com/office/drawing/2014/main" id="{00ACFCE6-C3D3-4B96-9F52-BA607F1A8468}"/>
+              </a:ext>
+            </a:extLst>
+          </p:cNvPr>
+          <p:cNvSpPr txBox="1"/>
+          <p:nvPr/>
+        </p:nvSpPr>
+        <p:spPr>
+          <a:xfrm>
+            <a:off x="2308225" y="3105834"/>
+            <a:ext cx="7575550" cy="1200329"/>
+          </a:xfrm>
+          <a:prstGeom prst="rect">
+            <a:avLst/>
+          </a:prstGeom>
+          <a:noFill/>
+        </p:spPr>
+        <p:txBody>
+          <a:bodyPr wrap="square" rtlCol="0">
+            <a:spAutoFit/>
+          </a:bodyPr>
+          <a:lstStyle/>
+          <a:p>
+            <a:pPr algn="ctr"/>
+            <a:r>
+              <a:rPr lang="en-US" altLang="ko-KR" sz="3600" b="1" dirty="0" err="1">
+                <a:solidFill>
+                  <a:srgbClr val="FF0000"/>
+                </a:solidFill>
+                <a:latin typeface="+mj-ea"/>
+              </a:rPr>
+              <a:t>seq_length</a:t>
+            </a:r>
+            <a:r>
+              <a:rPr lang="en-US" altLang="ko-KR" sz="3600" b="1" dirty="0">
+                <a:solidFill>
+                  <a:srgbClr val="FF0000"/>
+                </a:solidFill>
+                <a:latin typeface="+mj-ea"/>
+              </a:rPr>
+              <a:t> = 36 + </a:t>
+            </a:r>
+          </a:p>
+          <a:p>
+            <a:pPr algn="ctr"/>
+            <a:r>
+              <a:rPr lang="en-US" altLang="ko-KR" sz="3600" b="1" dirty="0" err="1">
+                <a:solidFill>
+                  <a:srgbClr val="FF0000"/>
+                </a:solidFill>
+                <a:latin typeface="+mj-ea"/>
+              </a:rPr>
+              <a:t>num_of_layer</a:t>
+            </a:r>
+            <a:r>
+              <a:rPr lang="en-US" altLang="ko-KR" sz="3600" b="1" dirty="0">
+                <a:solidFill>
+                  <a:srgbClr val="FF0000"/>
+                </a:solidFill>
+                <a:latin typeface="+mj-ea"/>
+              </a:rPr>
+              <a:t> = 12 </a:t>
+            </a:r>
+            <a:r>
+              <a:rPr lang="ko-KR" altLang="en-US" sz="3600" b="1" dirty="0">
+                <a:solidFill>
+                  <a:srgbClr val="FF0000"/>
+                </a:solidFill>
+                <a:latin typeface="+mj-ea"/>
+              </a:rPr>
+              <a:t>이 제일 나음 </a:t>
+            </a:r>
+            <a:endParaRPr lang="en-US" altLang="ko-KR" sz="3600" b="1" dirty="0">
+              <a:solidFill>
+                <a:srgbClr val="FF0000"/>
+              </a:solidFill>
+              <a:latin typeface="+mj-ea"/>
+            </a:endParaRPr>
+          </a:p>
+        </p:txBody>
+      </p:sp>
+    </p:spTree>
+    <p:extLst>
+      <p:ext uri="{BB962C8B-B14F-4D97-AF65-F5344CB8AC3E}">
+        <p14:creationId xmlns:p14="http://schemas.microsoft.com/office/powerpoint/2010/main" val="363304009"/>
+      </p:ext>
+    </p:extLst>
+  </p:cSld>
+  <p:clrMapOvr>
+    <a:masterClrMapping/>
+  </p:clrMapOvr>
+</p:sld>
+</file>
+
+<file path=ppt/slides/slide18.xml><?xml version="1.0" encoding="utf-8"?>
+<p:sld xmlns:a="http://schemas.openxmlformats.org/drawingml/2006/main" xmlns:r="http://schemas.openxmlformats.org/officeDocument/2006/relationships" xmlns:p="http://schemas.openxmlformats.org/presentationml/2006/main">
+  <p:cSld>
+    <p:spTree>
+      <p:nvGrpSpPr>
+        <p:cNvPr id="1" name=""/>
+        <p:cNvGrpSpPr/>
+        <p:nvPr/>
+      </p:nvGrpSpPr>
+      <p:grpSpPr>
+        <a:xfrm>
+          <a:off x="0" y="0"/>
+          <a:ext cx="0" cy="0"/>
+          <a:chOff x="0" y="0"/>
+          <a:chExt cx="0" cy="0"/>
+        </a:xfrm>
+      </p:grpSpPr>
+      <p:sp>
+        <p:nvSpPr>
+          <p:cNvPr id="2" name="TextBox 1">
+            <a:extLst>
+              <a:ext uri="{FF2B5EF4-FFF2-40B4-BE49-F238E27FC236}">
+                <a16:creationId xmlns:a16="http://schemas.microsoft.com/office/drawing/2014/main" id="{00ACFCE6-C3D3-4B96-9F52-BA607F1A8468}"/>
+              </a:ext>
+            </a:extLst>
+          </p:cNvPr>
+          <p:cNvSpPr txBox="1"/>
+          <p:nvPr/>
+        </p:nvSpPr>
+        <p:spPr>
+          <a:xfrm>
+            <a:off x="2308225" y="2828835"/>
+            <a:ext cx="7575550" cy="1200329"/>
+          </a:xfrm>
+          <a:prstGeom prst="rect">
+            <a:avLst/>
+          </a:prstGeom>
+          <a:noFill/>
+        </p:spPr>
+        <p:txBody>
+          <a:bodyPr wrap="square" rtlCol="0">
+            <a:spAutoFit/>
+          </a:bodyPr>
+          <a:lstStyle/>
+          <a:p>
+            <a:pPr algn="ctr"/>
+            <a:r>
+              <a:rPr lang="en-US" altLang="ko-KR" sz="3600" b="1" dirty="0" err="1">
+                <a:solidFill>
+                  <a:schemeClr val="accent5"/>
+                </a:solidFill>
+                <a:latin typeface="+mj-ea"/>
+              </a:rPr>
+              <a:t>Loss_function</a:t>
+            </a:r>
+            <a:r>
+              <a:rPr lang="ko-KR" altLang="en-US" sz="3600" b="1" dirty="0">
+                <a:solidFill>
+                  <a:schemeClr val="accent5"/>
+                </a:solidFill>
+                <a:latin typeface="+mj-ea"/>
+              </a:rPr>
+              <a:t> </a:t>
+            </a:r>
+            <a:r>
+              <a:rPr lang="en-US" altLang="ko-KR" sz="3600" b="1" dirty="0">
+                <a:solidFill>
+                  <a:schemeClr val="accent5"/>
+                </a:solidFill>
+                <a:latin typeface="+mj-ea"/>
+              </a:rPr>
+              <a:t>=</a:t>
+            </a:r>
+            <a:r>
+              <a:rPr lang="ko-KR" altLang="en-US" sz="3600" b="1" dirty="0">
+                <a:solidFill>
+                  <a:schemeClr val="accent5"/>
+                </a:solidFill>
+                <a:latin typeface="+mj-ea"/>
+              </a:rPr>
+              <a:t> </a:t>
+            </a:r>
+            <a:r>
+              <a:rPr lang="en-US" altLang="ko-KR" sz="3600" b="1" dirty="0">
+                <a:solidFill>
+                  <a:schemeClr val="accent5"/>
+                </a:solidFill>
+                <a:latin typeface="+mj-ea"/>
+              </a:rPr>
+              <a:t>MAE</a:t>
+            </a:r>
+          </a:p>
+          <a:p>
+            <a:pPr algn="ctr"/>
+            <a:r>
+              <a:rPr lang="en-US" altLang="ko-KR" sz="3600" b="1" dirty="0" err="1">
+                <a:solidFill>
+                  <a:schemeClr val="accent5"/>
+                </a:solidFill>
+                <a:latin typeface="+mj-ea"/>
+              </a:rPr>
+              <a:t>Learning_rate</a:t>
+            </a:r>
+            <a:r>
+              <a:rPr lang="en-US" altLang="ko-KR" sz="3600" b="1" dirty="0">
+                <a:solidFill>
+                  <a:schemeClr val="accent5"/>
+                </a:solidFill>
+                <a:latin typeface="+mj-ea"/>
+              </a:rPr>
+              <a:t> = 0.0005</a:t>
+            </a:r>
+          </a:p>
+        </p:txBody>
+      </p:sp>
+    </p:spTree>
+    <p:extLst>
+      <p:ext uri="{BB962C8B-B14F-4D97-AF65-F5344CB8AC3E}">
+        <p14:creationId xmlns:p14="http://schemas.microsoft.com/office/powerpoint/2010/main" val="372019505"/>
+      </p:ext>
+    </p:extLst>
+  </p:cSld>
+  <p:clrMapOvr>
+    <a:masterClrMapping/>
+  </p:clrMapOvr>
+</p:sld>
+</file>
+
+<file path=ppt/slides/slide19.xml><?xml version="1.0" encoding="utf-8"?>
+<p:sld xmlns:a="http://schemas.openxmlformats.org/drawingml/2006/main" xmlns:r="http://schemas.openxmlformats.org/officeDocument/2006/relationships" xmlns:p="http://schemas.openxmlformats.org/presentationml/2006/main">
+  <p:cSld>
+    <p:spTree>
+      <p:nvGrpSpPr>
+        <p:cNvPr id="1" name=""/>
+        <p:cNvGrpSpPr/>
+        <p:nvPr/>
+      </p:nvGrpSpPr>
+      <p:grpSpPr>
+        <a:xfrm>
+          <a:off x="0" y="0"/>
+          <a:ext cx="0" cy="0"/>
+          <a:chOff x="0" y="0"/>
+          <a:chExt cx="0" cy="0"/>
+        </a:xfrm>
+      </p:grpSpPr>
+      <p:sp>
+        <p:nvSpPr>
+          <p:cNvPr id="2" name="TextBox 1">
+            <a:extLst>
+              <a:ext uri="{FF2B5EF4-FFF2-40B4-BE49-F238E27FC236}">
+                <a16:creationId xmlns:a16="http://schemas.microsoft.com/office/drawing/2014/main" id="{00ACFCE6-C3D3-4B96-9F52-BA607F1A8468}"/>
+              </a:ext>
+            </a:extLst>
+          </p:cNvPr>
+          <p:cNvSpPr txBox="1"/>
+          <p:nvPr/>
+        </p:nvSpPr>
+        <p:spPr>
+          <a:xfrm>
+            <a:off x="2308225" y="3105834"/>
+            <a:ext cx="7575550" cy="646331"/>
+          </a:xfrm>
+          <a:prstGeom prst="rect">
+            <a:avLst/>
+          </a:prstGeom>
+          <a:noFill/>
+        </p:spPr>
+        <p:txBody>
+          <a:bodyPr wrap="square" rtlCol="0">
+            <a:spAutoFit/>
+          </a:bodyPr>
+          <a:lstStyle/>
+          <a:p>
+            <a:pPr algn="ctr"/>
+            <a:r>
+              <a:rPr lang="en-US" altLang="ko-KR" sz="3600" b="1" dirty="0">
+                <a:solidFill>
+                  <a:schemeClr val="accent5"/>
+                </a:solidFill>
+                <a:latin typeface="+mj-ea"/>
+              </a:rPr>
+              <a:t>1. </a:t>
+            </a:r>
+            <a:r>
+              <a:rPr lang="en-US" altLang="ko-KR" sz="3600" b="1" dirty="0" err="1">
+                <a:solidFill>
+                  <a:schemeClr val="accent5"/>
+                </a:solidFill>
+                <a:latin typeface="+mj-ea"/>
+              </a:rPr>
+              <a:t>num_of_layer</a:t>
+            </a:r>
+            <a:r>
+              <a:rPr lang="en-US" altLang="ko-KR" sz="3600" b="1" dirty="0">
+                <a:solidFill>
+                  <a:schemeClr val="accent5"/>
+                </a:solidFill>
+                <a:latin typeface="+mj-ea"/>
+              </a:rPr>
+              <a:t> = 12 </a:t>
+            </a:r>
+          </a:p>
+        </p:txBody>
+      </p:sp>
+      <p:sp>
+        <p:nvSpPr>
+          <p:cNvPr id="3" name="TextBox 2">
+            <a:extLst>
+              <a:ext uri="{FF2B5EF4-FFF2-40B4-BE49-F238E27FC236}">
+                <a16:creationId xmlns:a16="http://schemas.microsoft.com/office/drawing/2014/main" id="{DFB6244C-FA0F-4264-B8F3-7C5306259C82}"/>
+              </a:ext>
+            </a:extLst>
+          </p:cNvPr>
+          <p:cNvSpPr txBox="1"/>
+          <p:nvPr/>
+        </p:nvSpPr>
+        <p:spPr>
+          <a:xfrm>
+            <a:off x="9270999" y="169583"/>
+            <a:ext cx="2717801" cy="368947"/>
+          </a:xfrm>
+          <a:prstGeom prst="rect">
+            <a:avLst/>
+          </a:prstGeom>
+          <a:noFill/>
+        </p:spPr>
+        <p:txBody>
+          <a:bodyPr wrap="square" rtlCol="0">
+            <a:spAutoFit/>
+          </a:bodyPr>
+          <a:lstStyle/>
+          <a:p>
+            <a:pPr algn="r">
+              <a:lnSpc>
+                <a:spcPct val="200000"/>
+              </a:lnSpc>
+            </a:pPr>
+            <a:r>
+              <a:rPr lang="en-US" altLang="ko-KR" sz="1050" dirty="0"/>
+              <a:t>* model_(</a:t>
+            </a:r>
+            <a:r>
+              <a:rPr lang="en-US" altLang="ko-KR" sz="1050" dirty="0" err="1"/>
+              <a:t>gn</a:t>
+            </a:r>
+            <a:r>
+              <a:rPr lang="en-US" altLang="ko-KR" sz="1050" dirty="0"/>
+              <a:t>/dg)_l12</a:t>
+            </a:r>
+            <a:endParaRPr lang="ko-KR" altLang="en-US" sz="1050" dirty="0">
+              <a:latin typeface="+mj-ea"/>
+            </a:endParaRPr>
+          </a:p>
+        </p:txBody>
+      </p:sp>
+    </p:spTree>
+    <p:extLst>
+      <p:ext uri="{BB962C8B-B14F-4D97-AF65-F5344CB8AC3E}">
+        <p14:creationId xmlns:p14="http://schemas.microsoft.com/office/powerpoint/2010/main" val="4001424555"/>
+      </p:ext>
+    </p:extLst>
+  </p:cSld>
+  <p:clrMapOvr>
+    <a:masterClrMapping/>
+  </p:clrMapOvr>
+</p:sld>
+</file>
+
+<file path=ppt/slides/slide2.xml><?xml version="1.0" encoding="utf-8"?>
+<p:sld xmlns:a="http://schemas.openxmlformats.org/drawingml/2006/main" xmlns:r="http://schemas.openxmlformats.org/officeDocument/2006/relationships" xmlns:p="http://schemas.openxmlformats.org/presentationml/2006/main">
+  <p:cSld>
+    <p:spTree>
+      <p:nvGrpSpPr>
+        <p:cNvPr id="1" name=""/>
+        <p:cNvGrpSpPr/>
+        <p:nvPr/>
+      </p:nvGrpSpPr>
+      <p:grpSpPr>
+        <a:xfrm>
+          <a:off x="0" y="0"/>
+          <a:ext cx="0" cy="0"/>
+          <a:chOff x="0" y="0"/>
+          <a:chExt cx="0" cy="0"/>
+        </a:xfrm>
+      </p:grpSpPr>
+      <p:sp>
+        <p:nvSpPr>
+          <p:cNvPr id="2" name="TextBox 1">
+            <a:extLst>
+              <a:ext uri="{FF2B5EF4-FFF2-40B4-BE49-F238E27FC236}">
+                <a16:creationId xmlns:a16="http://schemas.microsoft.com/office/drawing/2014/main" id="{00ACFCE6-C3D3-4B96-9F52-BA607F1A8468}"/>
+              </a:ext>
+            </a:extLst>
+          </p:cNvPr>
+          <p:cNvSpPr txBox="1"/>
+          <p:nvPr/>
+        </p:nvSpPr>
+        <p:spPr>
+          <a:xfrm>
+            <a:off x="1632479" y="3105834"/>
+            <a:ext cx="8927042" cy="646331"/>
+          </a:xfrm>
+          <a:prstGeom prst="rect">
+            <a:avLst/>
+          </a:prstGeom>
+          <a:noFill/>
+        </p:spPr>
+        <p:txBody>
+          <a:bodyPr wrap="square" rtlCol="0">
+            <a:spAutoFit/>
+          </a:bodyPr>
+          <a:lstStyle/>
+          <a:p>
+            <a:pPr algn="ctr"/>
+            <a:r>
+              <a:rPr lang="en-US" altLang="ko-KR" sz="3600" b="1" dirty="0">
+                <a:latin typeface="+mj-ea"/>
+              </a:rPr>
+              <a:t>※ </a:t>
+            </a:r>
+            <a:r>
+              <a:rPr lang="ko-KR" altLang="en-US" sz="3600" b="1" dirty="0">
+                <a:latin typeface="+mj-ea"/>
+              </a:rPr>
+              <a:t>강우 이벤트 전부 학습으로 사용</a:t>
+            </a:r>
+            <a:endParaRPr lang="en-US" altLang="ko-KR" sz="3600" b="1" dirty="0">
+              <a:latin typeface="+mj-ea"/>
+            </a:endParaRPr>
+          </a:p>
+        </p:txBody>
+      </p:sp>
+    </p:spTree>
+    <p:extLst>
+      <p:ext uri="{BB962C8B-B14F-4D97-AF65-F5344CB8AC3E}">
+        <p14:creationId xmlns:p14="http://schemas.microsoft.com/office/powerpoint/2010/main" val="3337287211"/>
+      </p:ext>
+    </p:extLst>
+  </p:cSld>
+  <p:clrMapOvr>
+    <a:masterClrMapping/>
+  </p:clrMapOvr>
+</p:sld>
+</file>
+
+<file path=ppt/slides/slide20.xml><?xml version="1.0" encoding="utf-8"?>
+<p:sld xmlns:a="http://schemas.openxmlformats.org/drawingml/2006/main" xmlns:r="http://schemas.openxmlformats.org/officeDocument/2006/relationships" xmlns:p="http://schemas.openxmlformats.org/presentationml/2006/main">
+  <p:cSld>
+    <p:spTree>
+      <p:nvGrpSpPr>
+        <p:cNvPr id="1" name=""/>
+        <p:cNvGrpSpPr/>
+        <p:nvPr/>
+      </p:nvGrpSpPr>
+      <p:grpSpPr>
+        <a:xfrm>
+          <a:off x="0" y="0"/>
+          <a:ext cx="0" cy="0"/>
+          <a:chOff x="0" y="0"/>
+          <a:chExt cx="0" cy="0"/>
+        </a:xfrm>
+      </p:grpSpPr>
+      <p:sp>
+        <p:nvSpPr>
+          <p:cNvPr id="2" name="TextBox 1">
+            <a:extLst>
+              <a:ext uri="{FF2B5EF4-FFF2-40B4-BE49-F238E27FC236}">
+                <a16:creationId xmlns:a16="http://schemas.microsoft.com/office/drawing/2014/main" id="{00ACFCE6-C3D3-4B96-9F52-BA607F1A8468}"/>
+              </a:ext>
+            </a:extLst>
+          </p:cNvPr>
+          <p:cNvSpPr txBox="1"/>
+          <p:nvPr/>
+        </p:nvSpPr>
+        <p:spPr>
+          <a:xfrm>
+            <a:off x="377505" y="623270"/>
+            <a:ext cx="3398628" cy="830997"/>
+          </a:xfrm>
+          <a:prstGeom prst="rect">
+            <a:avLst/>
+          </a:prstGeom>
+          <a:noFill/>
+        </p:spPr>
+        <p:txBody>
+          <a:bodyPr wrap="square" rtlCol="0">
+            <a:spAutoFit/>
+          </a:bodyPr>
+          <a:lstStyle/>
+          <a:p>
+            <a:r>
+              <a:rPr lang="en-US" altLang="ko-KR" sz="2400" dirty="0" err="1">
+                <a:latin typeface="+mj-ea"/>
+              </a:rPr>
+              <a:t>num_of_layer</a:t>
+            </a:r>
+            <a:r>
+              <a:rPr lang="en-US" altLang="ko-KR" sz="2400" dirty="0">
+                <a:latin typeface="+mj-ea"/>
+              </a:rPr>
+              <a:t> = 12 </a:t>
+            </a:r>
+          </a:p>
+          <a:p>
+            <a:r>
+              <a:rPr lang="ko-KR" altLang="en-US" sz="2400" dirty="0">
+                <a:latin typeface="+mj-ea"/>
+                <a:ea typeface="+mj-ea"/>
+              </a:rPr>
+              <a:t>학습 코드 </a:t>
+            </a:r>
+            <a:r>
+              <a:rPr lang="en-US" altLang="ko-KR" sz="2400" dirty="0">
+                <a:latin typeface="+mj-ea"/>
+                <a:ea typeface="+mj-ea"/>
+              </a:rPr>
+              <a:t>- </a:t>
+            </a:r>
+            <a:r>
+              <a:rPr lang="ko-KR" altLang="en-US" sz="2400" dirty="0" err="1">
+                <a:latin typeface="+mj-ea"/>
+                <a:ea typeface="+mj-ea"/>
+              </a:rPr>
+              <a:t>대곡교</a:t>
+            </a:r>
+            <a:endParaRPr lang="ko-KR" altLang="en-US" sz="2400" dirty="0">
+              <a:latin typeface="+mj-ea"/>
+              <a:ea typeface="+mj-ea"/>
+            </a:endParaRPr>
+          </a:p>
+        </p:txBody>
+      </p:sp>
+      <p:sp>
+        <p:nvSpPr>
+          <p:cNvPr id="9" name="TextBox 8">
+            <a:extLst>
+              <a:ext uri="{FF2B5EF4-FFF2-40B4-BE49-F238E27FC236}">
+                <a16:creationId xmlns:a16="http://schemas.microsoft.com/office/drawing/2014/main" id="{619DB7C3-A352-4434-832E-7169C75AB765}"/>
+              </a:ext>
+            </a:extLst>
+          </p:cNvPr>
+          <p:cNvSpPr txBox="1"/>
+          <p:nvPr/>
+        </p:nvSpPr>
+        <p:spPr>
+          <a:xfrm>
+            <a:off x="1346199" y="1786468"/>
+            <a:ext cx="8602134" cy="369332"/>
+          </a:xfrm>
+          <a:prstGeom prst="rect">
+            <a:avLst/>
+          </a:prstGeom>
+          <a:noFill/>
+        </p:spPr>
+        <p:txBody>
+          <a:bodyPr wrap="square" rtlCol="0">
+            <a:spAutoFit/>
+          </a:bodyPr>
+          <a:lstStyle/>
+          <a:p>
+            <a:r>
+              <a:rPr lang="en-US" altLang="ko-KR" dirty="0"/>
+              <a:t>Train : Valid : Test = 7 : 2 : 1 </a:t>
+            </a:r>
+            <a:r>
+              <a:rPr lang="ko-KR" altLang="en-US" dirty="0"/>
+              <a:t>비율로 학습 진행</a:t>
+            </a:r>
+          </a:p>
+        </p:txBody>
+      </p:sp>
+      <p:graphicFrame>
+        <p:nvGraphicFramePr>
+          <p:cNvPr id="10" name="표 9">
+            <a:extLst>
+              <a:ext uri="{FF2B5EF4-FFF2-40B4-BE49-F238E27FC236}">
+                <a16:creationId xmlns:a16="http://schemas.microsoft.com/office/drawing/2014/main" id="{2F37C692-0D2E-44D5-8AE7-B05779A9F167}"/>
+              </a:ext>
+            </a:extLst>
+          </p:cNvPr>
+          <p:cNvGraphicFramePr>
+            <a:graphicFrameLocks noGrp="1"/>
+          </p:cNvGraphicFramePr>
+          <p:nvPr>
+            <p:extLst>
+              <p:ext uri="{D42A27DB-BD31-4B8C-83A1-F6EECF244321}">
+                <p14:modId xmlns:p14="http://schemas.microsoft.com/office/powerpoint/2010/main" val="3205474418"/>
+              </p:ext>
+            </p:extLst>
+          </p:nvPr>
+        </p:nvGraphicFramePr>
+        <p:xfrm>
+          <a:off x="6951132" y="3017967"/>
+          <a:ext cx="3909060" cy="741680"/>
+        </p:xfrm>
+        <a:graphic>
+          <a:graphicData uri="http://schemas.openxmlformats.org/drawingml/2006/table">
+            <a:tbl>
+              <a:tblPr firstRow="1" bandRow="1">
+                <a:tableStyleId>{0505E3EF-67EA-436B-97B2-0124C06EBD24}</a:tableStyleId>
+              </a:tblPr>
+              <a:tblGrid>
+                <a:gridCol w="646430">
+                  <a:extLst>
+                    <a:ext uri="{9D8B030D-6E8A-4147-A177-3AD203B41FA5}">
+                      <a16:colId xmlns:a16="http://schemas.microsoft.com/office/drawing/2014/main" val="3873650469"/>
+                    </a:ext>
+                  </a:extLst>
+                </a:gridCol>
+                <a:gridCol w="484505">
+                  <a:extLst>
+                    <a:ext uri="{9D8B030D-6E8A-4147-A177-3AD203B41FA5}">
+                      <a16:colId xmlns:a16="http://schemas.microsoft.com/office/drawing/2014/main" val="3203644757"/>
+                    </a:ext>
+                  </a:extLst>
+                </a:gridCol>
+                <a:gridCol w="484505">
+                  <a:extLst>
+                    <a:ext uri="{9D8B030D-6E8A-4147-A177-3AD203B41FA5}">
+                      <a16:colId xmlns:a16="http://schemas.microsoft.com/office/drawing/2014/main" val="3471233348"/>
+                    </a:ext>
+                  </a:extLst>
+                </a:gridCol>
+                <a:gridCol w="484505">
+                  <a:extLst>
+                    <a:ext uri="{9D8B030D-6E8A-4147-A177-3AD203B41FA5}">
+                      <a16:colId xmlns:a16="http://schemas.microsoft.com/office/drawing/2014/main" val="2131695425"/>
+                    </a:ext>
+                  </a:extLst>
+                </a:gridCol>
+                <a:gridCol w="586105">
+                  <a:extLst>
+                    <a:ext uri="{9D8B030D-6E8A-4147-A177-3AD203B41FA5}">
+                      <a16:colId xmlns:a16="http://schemas.microsoft.com/office/drawing/2014/main" val="1735956904"/>
+                    </a:ext>
+                  </a:extLst>
+                </a:gridCol>
+                <a:gridCol w="586105">
+                  <a:extLst>
+                    <a:ext uri="{9D8B030D-6E8A-4147-A177-3AD203B41FA5}">
+                      <a16:colId xmlns:a16="http://schemas.microsoft.com/office/drawing/2014/main" val="229180621"/>
+                    </a:ext>
+                  </a:extLst>
+                </a:gridCol>
+                <a:gridCol w="636905">
+                  <a:extLst>
+                    <a:ext uri="{9D8B030D-6E8A-4147-A177-3AD203B41FA5}">
+                      <a16:colId xmlns:a16="http://schemas.microsoft.com/office/drawing/2014/main" val="331921004"/>
+                    </a:ext>
+                  </a:extLst>
+                </a:gridCol>
+              </a:tblGrid>
+              <a:tr h="370840">
+                <a:tc rowSpan="2">
+                  <a:txBody>
+                    <a:bodyPr/>
+                    <a:lstStyle/>
+                    <a:p>
+                      <a:pPr latinLnBrk="1"/>
+                      <a:r>
+                        <a:rPr lang="en-US" altLang="ko-KR" sz="800" dirty="0"/>
+                        <a:t>Train</a:t>
+                      </a:r>
+                    </a:p>
+                    <a:p>
+                      <a:pPr latinLnBrk="1"/>
+                      <a:r>
+                        <a:rPr lang="en-US" altLang="ko-KR" sz="800" dirty="0"/>
+                        <a:t>(23111 </a:t>
+                      </a:r>
+                      <a:r>
+                        <a:rPr lang="ko-KR" altLang="en-US" sz="800" dirty="0"/>
+                        <a:t>건</a:t>
+                      </a:r>
+                      <a:r>
+                        <a:rPr lang="en-US" altLang="ko-KR" sz="800" dirty="0"/>
+                        <a:t>)</a:t>
+                      </a:r>
+                      <a:endParaRPr lang="ko-KR" altLang="en-US" sz="800" dirty="0"/>
+                    </a:p>
+                  </a:txBody>
+                  <a:tcPr/>
+                </a:tc>
+                <a:tc>
+                  <a:txBody>
+                    <a:bodyPr/>
+                    <a:lstStyle/>
+                    <a:p>
+                      <a:pPr latinLnBrk="1"/>
+                      <a:r>
+                        <a:rPr lang="en-US" altLang="ko-KR" sz="800" dirty="0"/>
+                        <a:t>MAE</a:t>
+                      </a:r>
+                      <a:endParaRPr lang="ko-KR" altLang="en-US" sz="800" dirty="0"/>
+                    </a:p>
+                  </a:txBody>
+                  <a:tcPr/>
+                </a:tc>
+                <a:tc>
+                  <a:txBody>
+                    <a:bodyPr/>
+                    <a:lstStyle/>
+                    <a:p>
+                      <a:pPr latinLnBrk="1"/>
+                      <a:r>
+                        <a:rPr lang="en-US" altLang="ko-KR" sz="800" dirty="0"/>
+                        <a:t>MAPE</a:t>
+                      </a:r>
+                      <a:endParaRPr lang="ko-KR" altLang="en-US" sz="800" dirty="0"/>
+                    </a:p>
+                  </a:txBody>
+                  <a:tcPr/>
+                </a:tc>
+                <a:tc>
+                  <a:txBody>
+                    <a:bodyPr/>
+                    <a:lstStyle/>
+                    <a:p>
+                      <a:pPr latinLnBrk="1"/>
+                      <a:r>
+                        <a:rPr lang="en-US" altLang="ko-KR" sz="800" dirty="0"/>
+                        <a:t>RMSE</a:t>
+                      </a:r>
+                      <a:endParaRPr lang="ko-KR" altLang="en-US" sz="800" dirty="0"/>
+                    </a:p>
+                  </a:txBody>
+                  <a:tcPr/>
+                </a:tc>
+                <a:tc>
+                  <a:txBody>
+                    <a:bodyPr/>
+                    <a:lstStyle/>
+                    <a:p>
+                      <a:pPr latinLnBrk="1"/>
+                      <a:r>
+                        <a:rPr lang="en-US" altLang="ko-KR" sz="800" dirty="0"/>
+                        <a:t>NSE</a:t>
+                      </a:r>
+                      <a:endParaRPr lang="ko-KR" altLang="en-US" sz="800" dirty="0"/>
+                    </a:p>
+                  </a:txBody>
+                  <a:tcPr/>
+                </a:tc>
+                <a:tc>
+                  <a:txBody>
+                    <a:bodyPr/>
+                    <a:lstStyle/>
+                    <a:p>
+                      <a:pPr latinLnBrk="1"/>
+                      <a:r>
+                        <a:rPr lang="en-US" altLang="ko-KR" sz="800" dirty="0"/>
+                        <a:t>CoR2</a:t>
+                      </a:r>
+                      <a:endParaRPr lang="ko-KR" altLang="en-US" sz="800" dirty="0"/>
+                    </a:p>
+                  </a:txBody>
+                  <a:tcPr/>
+                </a:tc>
+                <a:tc>
+                  <a:txBody>
+                    <a:bodyPr/>
+                    <a:lstStyle/>
+                    <a:p>
+                      <a:pPr latinLnBrk="1"/>
+                      <a:r>
+                        <a:rPr lang="en-US" altLang="ko-KR" sz="800" dirty="0"/>
+                        <a:t>QER</a:t>
+                      </a:r>
+                      <a:endParaRPr lang="ko-KR" altLang="en-US" sz="800" dirty="0"/>
+                    </a:p>
+                  </a:txBody>
+                  <a:tcPr/>
+                </a:tc>
+                <a:extLst>
+                  <a:ext uri="{0D108BD9-81ED-4DB2-BD59-A6C34878D82A}">
+                    <a16:rowId xmlns:a16="http://schemas.microsoft.com/office/drawing/2014/main" val="2689217707"/>
+                  </a:ext>
+                </a:extLst>
+              </a:tr>
+              <a:tr h="370840">
+                <a:tc vMerge="1">
+                  <a:txBody>
+                    <a:bodyPr/>
+                    <a:lstStyle/>
+                    <a:p>
+                      <a:pPr latinLnBrk="1"/>
+                      <a:endParaRPr lang="ko-KR" altLang="en-US" sz="800" dirty="0"/>
+                    </a:p>
+                  </a:txBody>
+                  <a:tcPr/>
+                </a:tc>
+                <a:tc>
+                  <a:txBody>
+                    <a:bodyPr/>
+                    <a:lstStyle/>
+                    <a:p>
+                      <a:pPr latinLnBrk="1"/>
+                      <a:r>
+                        <a:rPr lang="en-US" altLang="ko-KR" sz="800" dirty="0"/>
+                        <a:t>0.0311</a:t>
+                      </a:r>
+                      <a:endParaRPr lang="ko-KR" altLang="en-US" sz="800" dirty="0"/>
+                    </a:p>
+                  </a:txBody>
+                  <a:tcPr/>
+                </a:tc>
+                <a:tc>
+                  <a:txBody>
+                    <a:bodyPr/>
+                    <a:lstStyle/>
+                    <a:p>
+                      <a:pPr latinLnBrk="1"/>
+                      <a:r>
+                        <a:rPr lang="en-US" altLang="ko-KR" sz="800" dirty="0"/>
+                        <a:t>0.0144</a:t>
+                      </a:r>
+                      <a:endParaRPr lang="ko-KR" altLang="en-US" sz="800" dirty="0"/>
+                    </a:p>
+                  </a:txBody>
+                  <a:tcPr/>
+                </a:tc>
+                <a:tc>
+                  <a:txBody>
+                    <a:bodyPr/>
+                    <a:lstStyle/>
+                    <a:p>
+                      <a:pPr latinLnBrk="1"/>
+                      <a:r>
+                        <a:rPr lang="en-US" altLang="ko-KR" sz="800" dirty="0"/>
+                        <a:t>0.0599</a:t>
+                      </a:r>
+                      <a:endParaRPr lang="ko-KR" altLang="en-US" sz="800" dirty="0"/>
+                    </a:p>
+                  </a:txBody>
+                  <a:tcPr/>
+                </a:tc>
+                <a:tc>
+                  <a:txBody>
+                    <a:bodyPr/>
+                    <a:lstStyle/>
+                    <a:p>
+                      <a:pPr latinLnBrk="1"/>
+                      <a:r>
+                        <a:rPr lang="en-US" altLang="ko-KR" sz="800" dirty="0"/>
+                        <a:t>0.973250</a:t>
+                      </a:r>
+                      <a:endParaRPr lang="ko-KR" altLang="en-US" sz="800" dirty="0"/>
+                    </a:p>
+                  </a:txBody>
+                  <a:tcPr/>
+                </a:tc>
+                <a:tc>
+                  <a:txBody>
+                    <a:bodyPr/>
+                    <a:lstStyle/>
+                    <a:p>
+                      <a:pPr latinLnBrk="1"/>
+                      <a:r>
+                        <a:rPr lang="en-US" altLang="ko-KR" sz="800" dirty="0"/>
+                        <a:t>0.975980</a:t>
+                      </a:r>
+                      <a:endParaRPr lang="ko-KR" altLang="en-US" sz="800" dirty="0"/>
+                    </a:p>
+                  </a:txBody>
+                  <a:tcPr/>
+                </a:tc>
+                <a:tc>
+                  <a:txBody>
+                    <a:bodyPr/>
+                    <a:lstStyle/>
+                    <a:p>
+                      <a:pPr latinLnBrk="1"/>
+                      <a:r>
+                        <a:rPr lang="en-US" altLang="ko-KR" sz="800" dirty="0"/>
+                        <a:t>1.864916</a:t>
+                      </a:r>
+                      <a:endParaRPr lang="ko-KR" altLang="en-US" sz="800" dirty="0"/>
+                    </a:p>
+                  </a:txBody>
+                  <a:tcPr/>
+                </a:tc>
+                <a:extLst>
+                  <a:ext uri="{0D108BD9-81ED-4DB2-BD59-A6C34878D82A}">
+                    <a16:rowId xmlns:a16="http://schemas.microsoft.com/office/drawing/2014/main" val="3474084008"/>
+                  </a:ext>
+                </a:extLst>
+              </a:tr>
+            </a:tbl>
+          </a:graphicData>
+        </a:graphic>
+      </p:graphicFrame>
+      <p:graphicFrame>
+        <p:nvGraphicFramePr>
+          <p:cNvPr id="11" name="표 10">
+            <a:extLst>
+              <a:ext uri="{FF2B5EF4-FFF2-40B4-BE49-F238E27FC236}">
+                <a16:creationId xmlns:a16="http://schemas.microsoft.com/office/drawing/2014/main" id="{B08A13AB-CF40-41FC-85F4-AA63438CD538}"/>
+              </a:ext>
+            </a:extLst>
+          </p:cNvPr>
+          <p:cNvGraphicFramePr>
+            <a:graphicFrameLocks noGrp="1"/>
+          </p:cNvGraphicFramePr>
+          <p:nvPr>
+            <p:extLst>
+              <p:ext uri="{D42A27DB-BD31-4B8C-83A1-F6EECF244321}">
+                <p14:modId xmlns:p14="http://schemas.microsoft.com/office/powerpoint/2010/main" val="770742387"/>
+              </p:ext>
+            </p:extLst>
+          </p:nvPr>
+        </p:nvGraphicFramePr>
+        <p:xfrm>
+          <a:off x="6951132" y="4259181"/>
+          <a:ext cx="3836035" cy="741680"/>
+        </p:xfrm>
+        <a:graphic>
+          <a:graphicData uri="http://schemas.openxmlformats.org/drawingml/2006/table">
+            <a:tbl>
+              <a:tblPr firstRow="1" bandRow="1">
+                <a:tableStyleId>{0505E3EF-67EA-436B-97B2-0124C06EBD24}</a:tableStyleId>
+              </a:tblPr>
+              <a:tblGrid>
+                <a:gridCol w="573405">
+                  <a:extLst>
+                    <a:ext uri="{9D8B030D-6E8A-4147-A177-3AD203B41FA5}">
+                      <a16:colId xmlns:a16="http://schemas.microsoft.com/office/drawing/2014/main" val="3873650469"/>
+                    </a:ext>
+                  </a:extLst>
+                </a:gridCol>
+                <a:gridCol w="484505">
+                  <a:extLst>
+                    <a:ext uri="{9D8B030D-6E8A-4147-A177-3AD203B41FA5}">
+                      <a16:colId xmlns:a16="http://schemas.microsoft.com/office/drawing/2014/main" val="3203644757"/>
+                    </a:ext>
+                  </a:extLst>
+                </a:gridCol>
+                <a:gridCol w="484505">
+                  <a:extLst>
+                    <a:ext uri="{9D8B030D-6E8A-4147-A177-3AD203B41FA5}">
+                      <a16:colId xmlns:a16="http://schemas.microsoft.com/office/drawing/2014/main" val="3471233348"/>
+                    </a:ext>
+                  </a:extLst>
+                </a:gridCol>
+                <a:gridCol w="484505">
+                  <a:extLst>
+                    <a:ext uri="{9D8B030D-6E8A-4147-A177-3AD203B41FA5}">
+                      <a16:colId xmlns:a16="http://schemas.microsoft.com/office/drawing/2014/main" val="2131695425"/>
+                    </a:ext>
+                  </a:extLst>
+                </a:gridCol>
+                <a:gridCol w="586105">
+                  <a:extLst>
+                    <a:ext uri="{9D8B030D-6E8A-4147-A177-3AD203B41FA5}">
+                      <a16:colId xmlns:a16="http://schemas.microsoft.com/office/drawing/2014/main" val="1735956904"/>
+                    </a:ext>
+                  </a:extLst>
+                </a:gridCol>
+                <a:gridCol w="586105">
+                  <a:extLst>
+                    <a:ext uri="{9D8B030D-6E8A-4147-A177-3AD203B41FA5}">
+                      <a16:colId xmlns:a16="http://schemas.microsoft.com/office/drawing/2014/main" val="229180621"/>
+                    </a:ext>
+                  </a:extLst>
+                </a:gridCol>
+                <a:gridCol w="636905">
+                  <a:extLst>
+                    <a:ext uri="{9D8B030D-6E8A-4147-A177-3AD203B41FA5}">
+                      <a16:colId xmlns:a16="http://schemas.microsoft.com/office/drawing/2014/main" val="331921004"/>
+                    </a:ext>
+                  </a:extLst>
+                </a:gridCol>
+              </a:tblGrid>
+              <a:tr h="370840">
+                <a:tc rowSpan="2">
+                  <a:txBody>
+                    <a:bodyPr/>
+                    <a:lstStyle/>
+                    <a:p>
+                      <a:pPr latinLnBrk="1"/>
+                      <a:r>
+                        <a:rPr lang="en-US" altLang="ko-KR" sz="800" dirty="0"/>
+                        <a:t>Valid</a:t>
+                      </a:r>
+                    </a:p>
+                    <a:p>
+                      <a:pPr latinLnBrk="1"/>
+                      <a:r>
+                        <a:rPr lang="en-US" altLang="ko-KR" sz="800" dirty="0"/>
+                        <a:t>(6828 </a:t>
+                      </a:r>
+                      <a:r>
+                        <a:rPr lang="ko-KR" altLang="en-US" sz="800" dirty="0"/>
+                        <a:t>건</a:t>
+                      </a:r>
+                      <a:r>
+                        <a:rPr lang="en-US" altLang="ko-KR" sz="800" dirty="0"/>
+                        <a:t>)</a:t>
+                      </a:r>
+                      <a:endParaRPr lang="ko-KR" altLang="en-US" sz="800" dirty="0"/>
+                    </a:p>
+                  </a:txBody>
+                  <a:tcPr/>
+                </a:tc>
+                <a:tc>
+                  <a:txBody>
+                    <a:bodyPr/>
+                    <a:lstStyle/>
+                    <a:p>
+                      <a:pPr latinLnBrk="1"/>
+                      <a:r>
+                        <a:rPr lang="en-US" altLang="ko-KR" sz="800" dirty="0"/>
+                        <a:t>MAE</a:t>
+                      </a:r>
+                      <a:endParaRPr lang="ko-KR" altLang="en-US" sz="800" dirty="0"/>
+                    </a:p>
+                  </a:txBody>
+                  <a:tcPr/>
+                </a:tc>
+                <a:tc>
+                  <a:txBody>
+                    <a:bodyPr/>
+                    <a:lstStyle/>
+                    <a:p>
+                      <a:pPr latinLnBrk="1"/>
+                      <a:r>
+                        <a:rPr lang="en-US" altLang="ko-KR" sz="800" dirty="0"/>
+                        <a:t>MAPE</a:t>
+                      </a:r>
+                      <a:endParaRPr lang="ko-KR" altLang="en-US" sz="800" dirty="0"/>
+                    </a:p>
+                  </a:txBody>
+                  <a:tcPr/>
+                </a:tc>
+                <a:tc>
+                  <a:txBody>
+                    <a:bodyPr/>
+                    <a:lstStyle/>
+                    <a:p>
+                      <a:pPr latinLnBrk="1"/>
+                      <a:r>
+                        <a:rPr lang="en-US" altLang="ko-KR" sz="800" dirty="0"/>
+                        <a:t>RMSE</a:t>
+                      </a:r>
+                      <a:endParaRPr lang="ko-KR" altLang="en-US" sz="800" dirty="0"/>
+                    </a:p>
+                  </a:txBody>
+                  <a:tcPr/>
+                </a:tc>
+                <a:tc>
+                  <a:txBody>
+                    <a:bodyPr/>
+                    <a:lstStyle/>
+                    <a:p>
+                      <a:pPr latinLnBrk="1"/>
+                      <a:r>
+                        <a:rPr lang="en-US" altLang="ko-KR" sz="800" dirty="0"/>
+                        <a:t>NSE</a:t>
+                      </a:r>
+                      <a:endParaRPr lang="ko-KR" altLang="en-US" sz="800" dirty="0"/>
+                    </a:p>
+                  </a:txBody>
+                  <a:tcPr/>
+                </a:tc>
+                <a:tc>
+                  <a:txBody>
+                    <a:bodyPr/>
+                    <a:lstStyle/>
+                    <a:p>
+                      <a:pPr latinLnBrk="1"/>
+                      <a:r>
+                        <a:rPr lang="en-US" altLang="ko-KR" sz="800" dirty="0"/>
+                        <a:t>CoR2</a:t>
+                      </a:r>
+                      <a:endParaRPr lang="ko-KR" altLang="en-US" sz="800" dirty="0"/>
+                    </a:p>
+                  </a:txBody>
+                  <a:tcPr/>
+                </a:tc>
+                <a:tc>
+                  <a:txBody>
+                    <a:bodyPr/>
+                    <a:lstStyle/>
+                    <a:p>
+                      <a:pPr latinLnBrk="1"/>
+                      <a:r>
+                        <a:rPr lang="en-US" altLang="ko-KR" sz="800" dirty="0"/>
+                        <a:t>QER</a:t>
+                      </a:r>
+                      <a:endParaRPr lang="ko-KR" altLang="en-US" sz="800" dirty="0"/>
+                    </a:p>
+                  </a:txBody>
+                  <a:tcPr/>
+                </a:tc>
+                <a:extLst>
+                  <a:ext uri="{0D108BD9-81ED-4DB2-BD59-A6C34878D82A}">
+                    <a16:rowId xmlns:a16="http://schemas.microsoft.com/office/drawing/2014/main" val="2689217707"/>
+                  </a:ext>
+                </a:extLst>
+              </a:tr>
+              <a:tr h="370840">
+                <a:tc vMerge="1">
+                  <a:txBody>
+                    <a:bodyPr/>
+                    <a:lstStyle/>
+                    <a:p>
+                      <a:pPr latinLnBrk="1"/>
+                      <a:endParaRPr lang="ko-KR" altLang="en-US" sz="800" dirty="0"/>
+                    </a:p>
+                  </a:txBody>
+                  <a:tcPr/>
+                </a:tc>
+                <a:tc>
+                  <a:txBody>
+                    <a:bodyPr/>
+                    <a:lstStyle/>
+                    <a:p>
+                      <a:pPr latinLnBrk="1"/>
+                      <a:r>
+                        <a:rPr lang="en-US" altLang="ko-KR" sz="800" dirty="0"/>
+                        <a:t>0.0289</a:t>
+                      </a:r>
+                      <a:endParaRPr lang="ko-KR" altLang="en-US" sz="800" dirty="0"/>
+                    </a:p>
+                  </a:txBody>
+                  <a:tcPr/>
+                </a:tc>
+                <a:tc>
+                  <a:txBody>
+                    <a:bodyPr/>
+                    <a:lstStyle/>
+                    <a:p>
+                      <a:pPr latinLnBrk="1"/>
+                      <a:r>
+                        <a:rPr lang="en-US" altLang="ko-KR" sz="800" dirty="0"/>
+                        <a:t>0.0129</a:t>
+                      </a:r>
+                      <a:endParaRPr lang="ko-KR" altLang="en-US" sz="800" dirty="0"/>
+                    </a:p>
+                  </a:txBody>
+                  <a:tcPr/>
+                </a:tc>
+                <a:tc>
+                  <a:txBody>
+                    <a:bodyPr/>
+                    <a:lstStyle/>
+                    <a:p>
+                      <a:pPr latinLnBrk="1"/>
+                      <a:r>
+                        <a:rPr lang="en-US" altLang="ko-KR" sz="800" dirty="0"/>
+                        <a:t>0.0543</a:t>
+                      </a:r>
+                      <a:endParaRPr lang="ko-KR" altLang="en-US" sz="800" dirty="0"/>
+                    </a:p>
+                  </a:txBody>
+                  <a:tcPr/>
+                </a:tc>
+                <a:tc>
+                  <a:txBody>
+                    <a:bodyPr/>
+                    <a:lstStyle/>
+                    <a:p>
+                      <a:pPr latinLnBrk="1"/>
+                      <a:r>
+                        <a:rPr lang="en-US" altLang="ko-KR" sz="800" dirty="0"/>
+                        <a:t>0.969639</a:t>
+                      </a:r>
+                      <a:endParaRPr lang="ko-KR" altLang="en-US" sz="800" dirty="0"/>
+                    </a:p>
+                  </a:txBody>
+                  <a:tcPr/>
+                </a:tc>
+                <a:tc>
+                  <a:txBody>
+                    <a:bodyPr/>
+                    <a:lstStyle/>
+                    <a:p>
+                      <a:pPr latinLnBrk="1"/>
+                      <a:r>
+                        <a:rPr lang="en-US" altLang="ko-KR" sz="800" dirty="0"/>
+                        <a:t>0.970755</a:t>
+                      </a:r>
+                      <a:endParaRPr lang="ko-KR" altLang="en-US" sz="800" dirty="0"/>
+                    </a:p>
+                  </a:txBody>
+                  <a:tcPr/>
+                </a:tc>
+                <a:tc>
+                  <a:txBody>
+                    <a:bodyPr/>
+                    <a:lstStyle/>
+                    <a:p>
+                      <a:pPr latinLnBrk="1"/>
+                      <a:r>
+                        <a:rPr lang="en-US" altLang="ko-KR" sz="800" dirty="0"/>
+                        <a:t>0.981632</a:t>
+                      </a:r>
+                      <a:endParaRPr lang="ko-KR" altLang="en-US" sz="800" dirty="0"/>
+                    </a:p>
+                  </a:txBody>
+                  <a:tcPr/>
+                </a:tc>
+                <a:extLst>
+                  <a:ext uri="{0D108BD9-81ED-4DB2-BD59-A6C34878D82A}">
+                    <a16:rowId xmlns:a16="http://schemas.microsoft.com/office/drawing/2014/main" val="3474084008"/>
+                  </a:ext>
+                </a:extLst>
+              </a:tr>
+            </a:tbl>
+          </a:graphicData>
+        </a:graphic>
+      </p:graphicFrame>
+      <p:graphicFrame>
+        <p:nvGraphicFramePr>
+          <p:cNvPr id="12" name="표 11">
+            <a:extLst>
+              <a:ext uri="{FF2B5EF4-FFF2-40B4-BE49-F238E27FC236}">
+                <a16:creationId xmlns:a16="http://schemas.microsoft.com/office/drawing/2014/main" id="{BF3AC006-682A-4D96-B009-F19CB094C06A}"/>
+              </a:ext>
+            </a:extLst>
+          </p:cNvPr>
+          <p:cNvGraphicFramePr>
+            <a:graphicFrameLocks noGrp="1"/>
+          </p:cNvGraphicFramePr>
+          <p:nvPr>
+            <p:extLst>
+              <p:ext uri="{D42A27DB-BD31-4B8C-83A1-F6EECF244321}">
+                <p14:modId xmlns:p14="http://schemas.microsoft.com/office/powerpoint/2010/main" val="3803561496"/>
+              </p:ext>
+            </p:extLst>
+          </p:nvPr>
+        </p:nvGraphicFramePr>
+        <p:xfrm>
+          <a:off x="6951132" y="5500395"/>
+          <a:ext cx="3807460" cy="741680"/>
+        </p:xfrm>
+        <a:graphic>
+          <a:graphicData uri="http://schemas.openxmlformats.org/drawingml/2006/table">
+            <a:tbl>
+              <a:tblPr firstRow="1" bandRow="1">
+                <a:tableStyleId>{0505E3EF-67EA-436B-97B2-0124C06EBD24}</a:tableStyleId>
+              </a:tblPr>
+              <a:tblGrid>
+                <a:gridCol w="595630">
+                  <a:extLst>
+                    <a:ext uri="{9D8B030D-6E8A-4147-A177-3AD203B41FA5}">
+                      <a16:colId xmlns:a16="http://schemas.microsoft.com/office/drawing/2014/main" val="3873650469"/>
+                    </a:ext>
+                  </a:extLst>
+                </a:gridCol>
+                <a:gridCol w="484505">
+                  <a:extLst>
+                    <a:ext uri="{9D8B030D-6E8A-4147-A177-3AD203B41FA5}">
+                      <a16:colId xmlns:a16="http://schemas.microsoft.com/office/drawing/2014/main" val="3203644757"/>
+                    </a:ext>
+                  </a:extLst>
+                </a:gridCol>
+                <a:gridCol w="484505">
+                  <a:extLst>
+                    <a:ext uri="{9D8B030D-6E8A-4147-A177-3AD203B41FA5}">
+                      <a16:colId xmlns:a16="http://schemas.microsoft.com/office/drawing/2014/main" val="3471233348"/>
+                    </a:ext>
+                  </a:extLst>
+                </a:gridCol>
+                <a:gridCol w="484505">
+                  <a:extLst>
+                    <a:ext uri="{9D8B030D-6E8A-4147-A177-3AD203B41FA5}">
+                      <a16:colId xmlns:a16="http://schemas.microsoft.com/office/drawing/2014/main" val="2131695425"/>
+                    </a:ext>
+                  </a:extLst>
+                </a:gridCol>
+                <a:gridCol w="586105">
+                  <a:extLst>
+                    <a:ext uri="{9D8B030D-6E8A-4147-A177-3AD203B41FA5}">
+                      <a16:colId xmlns:a16="http://schemas.microsoft.com/office/drawing/2014/main" val="1735956904"/>
+                    </a:ext>
+                  </a:extLst>
+                </a:gridCol>
+                <a:gridCol w="586105">
+                  <a:extLst>
+                    <a:ext uri="{9D8B030D-6E8A-4147-A177-3AD203B41FA5}">
+                      <a16:colId xmlns:a16="http://schemas.microsoft.com/office/drawing/2014/main" val="229180621"/>
+                    </a:ext>
+                  </a:extLst>
+                </a:gridCol>
+                <a:gridCol w="586105">
+                  <a:extLst>
+                    <a:ext uri="{9D8B030D-6E8A-4147-A177-3AD203B41FA5}">
+                      <a16:colId xmlns:a16="http://schemas.microsoft.com/office/drawing/2014/main" val="331921004"/>
+                    </a:ext>
+                  </a:extLst>
+                </a:gridCol>
+              </a:tblGrid>
+              <a:tr h="370840">
+                <a:tc rowSpan="2">
+                  <a:txBody>
+                    <a:bodyPr/>
+                    <a:lstStyle/>
+                    <a:p>
+                      <a:pPr latinLnBrk="1"/>
+                      <a:r>
+                        <a:rPr lang="en-US" altLang="ko-KR" sz="800" dirty="0"/>
+                        <a:t>Test</a:t>
+                      </a:r>
+                    </a:p>
+                    <a:p>
+                      <a:pPr latinLnBrk="1"/>
+                      <a:r>
+                        <a:rPr lang="en-US" altLang="ko-KR" sz="800" dirty="0"/>
+                        <a:t>(5472 </a:t>
+                      </a:r>
+                      <a:r>
+                        <a:rPr lang="ko-KR" altLang="en-US" sz="800" dirty="0"/>
+                        <a:t>건</a:t>
+                      </a:r>
+                      <a:r>
+                        <a:rPr lang="en-US" altLang="ko-KR" sz="800" dirty="0"/>
+                        <a:t>)</a:t>
+                      </a:r>
+                      <a:endParaRPr lang="ko-KR" altLang="en-US" sz="800" dirty="0"/>
+                    </a:p>
+                  </a:txBody>
+                  <a:tcPr/>
+                </a:tc>
+                <a:tc>
+                  <a:txBody>
+                    <a:bodyPr/>
+                    <a:lstStyle/>
+                    <a:p>
+                      <a:pPr latinLnBrk="1"/>
+                      <a:r>
+                        <a:rPr lang="en-US" altLang="ko-KR" sz="800" dirty="0"/>
+                        <a:t>MAE</a:t>
+                      </a:r>
+                      <a:endParaRPr lang="ko-KR" altLang="en-US" sz="800" dirty="0"/>
+                    </a:p>
+                  </a:txBody>
+                  <a:tcPr/>
+                </a:tc>
+                <a:tc>
+                  <a:txBody>
+                    <a:bodyPr/>
+                    <a:lstStyle/>
+                    <a:p>
+                      <a:pPr latinLnBrk="1"/>
+                      <a:r>
+                        <a:rPr lang="en-US" altLang="ko-KR" sz="800" dirty="0"/>
+                        <a:t>MAPE</a:t>
+                      </a:r>
+                      <a:endParaRPr lang="ko-KR" altLang="en-US" sz="800" dirty="0"/>
+                    </a:p>
+                  </a:txBody>
+                  <a:tcPr/>
+                </a:tc>
+                <a:tc>
+                  <a:txBody>
+                    <a:bodyPr/>
+                    <a:lstStyle/>
+                    <a:p>
+                      <a:pPr latinLnBrk="1"/>
+                      <a:r>
+                        <a:rPr lang="en-US" altLang="ko-KR" sz="800" dirty="0"/>
+                        <a:t>RMSE</a:t>
+                      </a:r>
+                      <a:endParaRPr lang="ko-KR" altLang="en-US" sz="800" dirty="0"/>
+                    </a:p>
+                  </a:txBody>
+                  <a:tcPr/>
+                </a:tc>
+                <a:tc>
+                  <a:txBody>
+                    <a:bodyPr/>
+                    <a:lstStyle/>
+                    <a:p>
+                      <a:pPr latinLnBrk="1"/>
+                      <a:r>
+                        <a:rPr lang="en-US" altLang="ko-KR" sz="800" dirty="0"/>
+                        <a:t>NSE</a:t>
+                      </a:r>
+                      <a:endParaRPr lang="ko-KR" altLang="en-US" sz="800" dirty="0"/>
+                    </a:p>
+                  </a:txBody>
+                  <a:tcPr/>
+                </a:tc>
+                <a:tc>
+                  <a:txBody>
+                    <a:bodyPr/>
+                    <a:lstStyle/>
+                    <a:p>
+                      <a:pPr latinLnBrk="1"/>
+                      <a:r>
+                        <a:rPr lang="en-US" altLang="ko-KR" sz="800" dirty="0"/>
+                        <a:t>CoR2</a:t>
+                      </a:r>
+                      <a:endParaRPr lang="ko-KR" altLang="en-US" sz="800" dirty="0"/>
+                    </a:p>
+                  </a:txBody>
+                  <a:tcPr/>
+                </a:tc>
+                <a:tc>
+                  <a:txBody>
+                    <a:bodyPr/>
+                    <a:lstStyle/>
+                    <a:p>
+                      <a:pPr latinLnBrk="1"/>
+                      <a:r>
+                        <a:rPr lang="en-US" altLang="ko-KR" sz="800" dirty="0"/>
+                        <a:t>QER</a:t>
+                      </a:r>
+                      <a:endParaRPr lang="ko-KR" altLang="en-US" sz="800" dirty="0"/>
+                    </a:p>
+                  </a:txBody>
+                  <a:tcPr/>
+                </a:tc>
+                <a:extLst>
+                  <a:ext uri="{0D108BD9-81ED-4DB2-BD59-A6C34878D82A}">
+                    <a16:rowId xmlns:a16="http://schemas.microsoft.com/office/drawing/2014/main" val="2689217707"/>
+                  </a:ext>
+                </a:extLst>
+              </a:tr>
+              <a:tr h="370840">
+                <a:tc vMerge="1">
+                  <a:txBody>
+                    <a:bodyPr/>
+                    <a:lstStyle/>
+                    <a:p>
+                      <a:pPr latinLnBrk="1"/>
+                      <a:endParaRPr lang="ko-KR" altLang="en-US" sz="800" dirty="0"/>
+                    </a:p>
+                  </a:txBody>
+                  <a:tcPr/>
+                </a:tc>
+                <a:tc>
+                  <a:txBody>
+                    <a:bodyPr/>
+                    <a:lstStyle/>
+                    <a:p>
+                      <a:pPr latinLnBrk="1"/>
+                      <a:r>
+                        <a:rPr lang="en-US" altLang="ko-KR" sz="800" dirty="0"/>
+                        <a:t>0.0271</a:t>
+                      </a:r>
+                      <a:endParaRPr lang="ko-KR" altLang="en-US" sz="800" dirty="0"/>
+                    </a:p>
+                  </a:txBody>
+                  <a:tcPr/>
+                </a:tc>
+                <a:tc>
+                  <a:txBody>
+                    <a:bodyPr/>
+                    <a:lstStyle/>
+                    <a:p>
+                      <a:pPr latinLnBrk="1"/>
+                      <a:r>
+                        <a:rPr lang="en-US" altLang="ko-KR" sz="800" dirty="0"/>
+                        <a:t>0.0120</a:t>
+                      </a:r>
+                      <a:endParaRPr lang="ko-KR" altLang="en-US" sz="800" dirty="0"/>
+                    </a:p>
+                  </a:txBody>
+                  <a:tcPr/>
+                </a:tc>
+                <a:tc>
+                  <a:txBody>
+                    <a:bodyPr/>
+                    <a:lstStyle/>
+                    <a:p>
+                      <a:pPr latinLnBrk="1"/>
+                      <a:r>
+                        <a:rPr lang="en-US" altLang="ko-KR" sz="800" dirty="0"/>
+                        <a:t>0.0682</a:t>
+                      </a:r>
+                      <a:endParaRPr lang="ko-KR" altLang="en-US" sz="800" dirty="0"/>
+                    </a:p>
+                  </a:txBody>
+                  <a:tcPr/>
+                </a:tc>
+                <a:tc>
+                  <a:txBody>
+                    <a:bodyPr/>
+                    <a:lstStyle/>
+                    <a:p>
+                      <a:pPr latinLnBrk="1"/>
+                      <a:r>
+                        <a:rPr lang="en-US" altLang="ko-KR" sz="800" dirty="0"/>
+                        <a:t>0.934381</a:t>
+                      </a:r>
+                      <a:endParaRPr lang="ko-KR" altLang="en-US" sz="800" dirty="0"/>
+                    </a:p>
+                  </a:txBody>
+                  <a:tcPr/>
+                </a:tc>
+                <a:tc>
+                  <a:txBody>
+                    <a:bodyPr/>
+                    <a:lstStyle/>
+                    <a:p>
+                      <a:pPr latinLnBrk="1"/>
+                      <a:r>
+                        <a:rPr lang="en-US" altLang="ko-KR" sz="800" dirty="0"/>
+                        <a:t>0.936408</a:t>
+                      </a:r>
+                      <a:endParaRPr lang="ko-KR" altLang="en-US" sz="800" dirty="0"/>
+                    </a:p>
+                  </a:txBody>
+                  <a:tcPr/>
+                </a:tc>
+                <a:tc>
+                  <a:txBody>
+                    <a:bodyPr/>
+                    <a:lstStyle/>
+                    <a:p>
+                      <a:pPr latinLnBrk="1"/>
+                      <a:r>
+                        <a:rPr lang="en-US" altLang="ko-KR" sz="800" dirty="0"/>
+                        <a:t>5.370354</a:t>
+                      </a:r>
+                      <a:endParaRPr lang="ko-KR" altLang="en-US" sz="800" dirty="0"/>
+                    </a:p>
+                  </a:txBody>
+                  <a:tcPr/>
+                </a:tc>
+                <a:extLst>
+                  <a:ext uri="{0D108BD9-81ED-4DB2-BD59-A6C34878D82A}">
+                    <a16:rowId xmlns:a16="http://schemas.microsoft.com/office/drawing/2014/main" val="3474084008"/>
+                  </a:ext>
+                </a:extLst>
+              </a:tr>
+            </a:tbl>
+          </a:graphicData>
+        </a:graphic>
+      </p:graphicFrame>
+      <p:pic>
+        <p:nvPicPr>
+          <p:cNvPr id="13" name="그림 12">
+            <a:extLst>
+              <a:ext uri="{FF2B5EF4-FFF2-40B4-BE49-F238E27FC236}">
+                <a16:creationId xmlns:a16="http://schemas.microsoft.com/office/drawing/2014/main" id="{0B8BFE22-A6DD-4A55-8213-16C5AD40733E}"/>
+              </a:ext>
+            </a:extLst>
+          </p:cNvPr>
+          <p:cNvPicPr>
+            <a:picLocks noChangeAspect="1"/>
+          </p:cNvPicPr>
+          <p:nvPr/>
+        </p:nvPicPr>
+        <p:blipFill>
+          <a:blip r:embed="rId2">
+            <a:extLst>
+              <a:ext uri="{28A0092B-C50C-407E-A947-70E740481C1C}">
+                <a14:useLocalDpi xmlns:a14="http://schemas.microsoft.com/office/drawing/2010/main" val="0"/>
+              </a:ext>
+            </a:extLst>
+          </a:blip>
+          <a:stretch>
+            <a:fillRect/>
+          </a:stretch>
+        </p:blipFill>
+        <p:spPr>
+          <a:xfrm>
+            <a:off x="1065574" y="3747356"/>
+            <a:ext cx="5196629" cy="1780928"/>
+          </a:xfrm>
+          <a:prstGeom prst="rect">
+            <a:avLst/>
+          </a:prstGeom>
+        </p:spPr>
+      </p:pic>
+      <p:sp>
+        <p:nvSpPr>
+          <p:cNvPr id="14" name="TextBox 13">
+            <a:extLst>
+              <a:ext uri="{FF2B5EF4-FFF2-40B4-BE49-F238E27FC236}">
+                <a16:creationId xmlns:a16="http://schemas.microsoft.com/office/drawing/2014/main" id="{0545FBF0-BD23-47BA-AE23-A9041F51CCD9}"/>
+              </a:ext>
+            </a:extLst>
+          </p:cNvPr>
+          <p:cNvSpPr txBox="1"/>
+          <p:nvPr/>
+        </p:nvSpPr>
+        <p:spPr>
+          <a:xfrm>
+            <a:off x="900984" y="3109677"/>
+            <a:ext cx="1740616" cy="402867"/>
+          </a:xfrm>
+          <a:prstGeom prst="rect">
+            <a:avLst/>
+          </a:prstGeom>
+          <a:noFill/>
+        </p:spPr>
+        <p:txBody>
+          <a:bodyPr wrap="square" rtlCol="0">
+            <a:spAutoFit/>
+          </a:bodyPr>
+          <a:lstStyle/>
+          <a:p>
+            <a:pPr>
+              <a:lnSpc>
+                <a:spcPct val="200000"/>
+              </a:lnSpc>
+            </a:pPr>
+            <a:r>
+              <a:rPr lang="en-US" altLang="ko-KR" sz="1200" dirty="0">
+                <a:latin typeface="+mj-ea"/>
+              </a:rPr>
+              <a:t>Train Chart</a:t>
+            </a:r>
+            <a:endParaRPr lang="ko-KR" altLang="en-US" sz="1200" dirty="0">
+              <a:latin typeface="+mj-ea"/>
+            </a:endParaRPr>
+          </a:p>
+        </p:txBody>
+      </p:sp>
+      <p:sp>
+        <p:nvSpPr>
+          <p:cNvPr id="16" name="TextBox 15">
+            <a:extLst>
+              <a:ext uri="{FF2B5EF4-FFF2-40B4-BE49-F238E27FC236}">
+                <a16:creationId xmlns:a16="http://schemas.microsoft.com/office/drawing/2014/main" id="{22E70C8B-0378-41AB-8FAC-941DC946C20B}"/>
+              </a:ext>
+            </a:extLst>
+          </p:cNvPr>
+          <p:cNvSpPr txBox="1"/>
+          <p:nvPr/>
+        </p:nvSpPr>
+        <p:spPr>
+          <a:xfrm>
+            <a:off x="6823157" y="2491201"/>
+            <a:ext cx="2312378" cy="276999"/>
+          </a:xfrm>
+          <a:prstGeom prst="rect">
+            <a:avLst/>
+          </a:prstGeom>
+          <a:noFill/>
+        </p:spPr>
+        <p:txBody>
+          <a:bodyPr wrap="square" rtlCol="0">
+            <a:spAutoFit/>
+          </a:bodyPr>
+          <a:lstStyle/>
+          <a:p>
+            <a:r>
+              <a:rPr lang="ko-KR" altLang="en-US" sz="1200" dirty="0"/>
+              <a:t>일괄 예측 수행 결과</a:t>
+            </a:r>
+          </a:p>
+        </p:txBody>
+      </p:sp>
+    </p:spTree>
+    <p:extLst>
+      <p:ext uri="{BB962C8B-B14F-4D97-AF65-F5344CB8AC3E}">
+        <p14:creationId xmlns:p14="http://schemas.microsoft.com/office/powerpoint/2010/main" val="3894363703"/>
+      </p:ext>
+    </p:extLst>
+  </p:cSld>
+  <p:clrMapOvr>
+    <a:masterClrMapping/>
+  </p:clrMapOvr>
+</p:sld>
+</file>
+
+<file path=ppt/slides/slide21.xml><?xml version="1.0" encoding="utf-8"?>
+<p:sld xmlns:a="http://schemas.openxmlformats.org/drawingml/2006/main" xmlns:r="http://schemas.openxmlformats.org/officeDocument/2006/relationships" xmlns:p="http://schemas.openxmlformats.org/presentationml/2006/main">
+  <p:cSld>
+    <p:spTree>
+      <p:nvGrpSpPr>
+        <p:cNvPr id="1" name=""/>
+        <p:cNvGrpSpPr/>
+        <p:nvPr/>
+      </p:nvGrpSpPr>
+      <p:grpSpPr>
+        <a:xfrm>
+          <a:off x="0" y="0"/>
+          <a:ext cx="0" cy="0"/>
+          <a:chOff x="0" y="0"/>
+          <a:chExt cx="0" cy="0"/>
+        </a:xfrm>
+      </p:grpSpPr>
+      <p:graphicFrame>
+        <p:nvGraphicFramePr>
+          <p:cNvPr id="26" name="표 25">
+            <a:extLst>
+              <a:ext uri="{FF2B5EF4-FFF2-40B4-BE49-F238E27FC236}">
+                <a16:creationId xmlns:a16="http://schemas.microsoft.com/office/drawing/2014/main" id="{11C99160-6B77-45EA-8F2B-8F764820117B}"/>
+              </a:ext>
+            </a:extLst>
+          </p:cNvPr>
+          <p:cNvGraphicFramePr>
+            <a:graphicFrameLocks noGrp="1"/>
+          </p:cNvGraphicFramePr>
+          <p:nvPr>
+            <p:extLst>
+              <p:ext uri="{D42A27DB-BD31-4B8C-83A1-F6EECF244321}">
+                <p14:modId xmlns:p14="http://schemas.microsoft.com/office/powerpoint/2010/main" val="433389771"/>
+              </p:ext>
+            </p:extLst>
+          </p:nvPr>
+        </p:nvGraphicFramePr>
+        <p:xfrm>
+          <a:off x="800836" y="1889775"/>
+          <a:ext cx="4328033" cy="4150360"/>
+        </p:xfrm>
+        <a:graphic>
+          <a:graphicData uri="http://schemas.openxmlformats.org/drawingml/2006/table">
+            <a:tbl>
+              <a:tblPr firstRow="1" bandRow="1">
+                <a:tableStyleId>{F2DE63D5-997A-4646-A377-4702673A728D}</a:tableStyleId>
+              </a:tblPr>
+              <a:tblGrid>
+                <a:gridCol w="1449578">
+                  <a:extLst>
+                    <a:ext uri="{9D8B030D-6E8A-4147-A177-3AD203B41FA5}">
+                      <a16:colId xmlns:a16="http://schemas.microsoft.com/office/drawing/2014/main" val="2562803118"/>
+                    </a:ext>
+                  </a:extLst>
+                </a:gridCol>
+                <a:gridCol w="2878455">
+                  <a:extLst>
+                    <a:ext uri="{9D8B030D-6E8A-4147-A177-3AD203B41FA5}">
+                      <a16:colId xmlns:a16="http://schemas.microsoft.com/office/drawing/2014/main" val="1847759405"/>
+                    </a:ext>
+                  </a:extLst>
+                </a:gridCol>
+              </a:tblGrid>
+              <a:tr h="370840">
+                <a:tc>
+                  <a:txBody>
+                    <a:bodyPr/>
+                    <a:lstStyle/>
+                    <a:p>
+                      <a:pPr algn="l" latinLnBrk="1"/>
+                      <a:endParaRPr lang="ko-KR" altLang="en-US" sz="1400" b="0" dirty="0">
+                        <a:solidFill>
+                          <a:schemeClr val="bg1"/>
+                        </a:solidFill>
+                      </a:endParaRPr>
+                    </a:p>
+                  </a:txBody>
+                  <a:tcPr>
+                    <a:solidFill>
+                      <a:schemeClr val="accent3"/>
+                    </a:solidFill>
+                  </a:tcPr>
+                </a:tc>
+                <a:tc>
+                  <a:txBody>
+                    <a:bodyPr/>
+                    <a:lstStyle/>
+                    <a:p>
+                      <a:pPr algn="ctr" latinLnBrk="1"/>
+                      <a:r>
+                        <a:rPr lang="ko-KR" altLang="en-US" sz="1400" b="0" dirty="0" err="1">
+                          <a:solidFill>
+                            <a:schemeClr val="bg1"/>
+                          </a:solidFill>
+                        </a:rPr>
+                        <a:t>대곡교</a:t>
+                      </a:r>
+                      <a:endParaRPr lang="ko-KR" altLang="en-US" sz="1400" b="0" dirty="0">
+                        <a:solidFill>
+                          <a:schemeClr val="bg1"/>
+                        </a:solidFill>
+                      </a:endParaRPr>
+                    </a:p>
+                  </a:txBody>
+                  <a:tcPr>
+                    <a:solidFill>
+                      <a:schemeClr val="accent3"/>
+                    </a:solidFill>
+                  </a:tcPr>
+                </a:tc>
+                <a:extLst>
+                  <a:ext uri="{0D108BD9-81ED-4DB2-BD59-A6C34878D82A}">
+                    <a16:rowId xmlns:a16="http://schemas.microsoft.com/office/drawing/2014/main" val="889264623"/>
+                  </a:ext>
+                </a:extLst>
+              </a:tr>
+              <a:tr h="370840">
+                <a:tc>
+                  <a:txBody>
+                    <a:bodyPr/>
+                    <a:lstStyle/>
+                    <a:p>
+                      <a:pPr algn="l" latinLnBrk="1"/>
+                      <a:r>
+                        <a:rPr lang="en-US" altLang="ko-KR" sz="1400" b="0" dirty="0"/>
+                        <a:t>testdata_220712</a:t>
+                      </a:r>
+                      <a:endParaRPr lang="ko-KR" altLang="en-US" sz="1400" b="0" dirty="0"/>
+                    </a:p>
+                  </a:txBody>
+                  <a:tcPr/>
+                </a:tc>
+                <a:tc>
+                  <a:txBody>
+                    <a:bodyPr/>
+                    <a:lstStyle/>
+                    <a:p>
+                      <a:pPr algn="ctr"/>
+                      <a:r>
+                        <a:rPr lang="pt-BR" altLang="ko-KR" sz="1400" dirty="0"/>
+                        <a:t>r2 : </a:t>
+                      </a:r>
+                      <a:r>
+                        <a:rPr lang="en-US" altLang="ko-KR" sz="1400" dirty="0"/>
+                        <a:t>0.2091296404860017</a:t>
+                      </a:r>
+                    </a:p>
+                    <a:p>
+                      <a:pPr algn="ctr"/>
+                      <a:r>
+                        <a:rPr lang="pt-BR" altLang="ko-KR" sz="1400" dirty="0"/>
+                        <a:t>mse : </a:t>
+                      </a:r>
+                      <a:r>
+                        <a:rPr lang="en-US" altLang="ko-KR" sz="1400" dirty="0"/>
+                        <a:t>0.11075309459307643</a:t>
+                      </a:r>
+                    </a:p>
+                    <a:p>
+                      <a:pPr algn="ctr"/>
+                      <a:r>
+                        <a:rPr lang="pt-BR" altLang="ko-KR" sz="1400" dirty="0"/>
+                        <a:t>mae : </a:t>
+                      </a:r>
+                      <a:r>
+                        <a:rPr lang="en-US" altLang="ko-KR" sz="1400" dirty="0"/>
+                        <a:t>0.28849312014049944</a:t>
+                      </a:r>
+                    </a:p>
+                    <a:p>
+                      <a:pPr algn="ctr"/>
+                      <a:r>
+                        <a:rPr lang="pt-BR" altLang="ko-KR" sz="1400" dirty="0"/>
+                        <a:t>rmse : </a:t>
+                      </a:r>
+                      <a:r>
+                        <a:rPr lang="en-US" altLang="ko-KR" sz="1400" dirty="0"/>
+                        <a:t>0.3327958752645177</a:t>
+                      </a:r>
+                      <a:endParaRPr lang="pt-BR" altLang="ko-KR" sz="1400" dirty="0"/>
+                    </a:p>
+                  </a:txBody>
+                  <a:tcPr/>
+                </a:tc>
+                <a:extLst>
+                  <a:ext uri="{0D108BD9-81ED-4DB2-BD59-A6C34878D82A}">
+                    <a16:rowId xmlns:a16="http://schemas.microsoft.com/office/drawing/2014/main" val="2210846903"/>
+                  </a:ext>
+                </a:extLst>
+              </a:tr>
+              <a:tr h="370840">
+                <a:tc>
+                  <a:txBody>
+                    <a:bodyPr/>
+                    <a:lstStyle/>
+                    <a:p>
+                      <a:pPr algn="l" latinLnBrk="1"/>
+                      <a:r>
+                        <a:rPr lang="en-US" altLang="ko-KR" sz="1400" b="0" dirty="0"/>
+                        <a:t>testdata_230711</a:t>
+                      </a:r>
+                      <a:endParaRPr lang="ko-KR" altLang="en-US" sz="1400" b="0" dirty="0"/>
+                    </a:p>
+                  </a:txBody>
+                  <a:tcPr>
+                    <a:lnB w="12700" cap="flat" cmpd="sng" algn="ctr">
+                      <a:solidFill>
+                        <a:schemeClr val="tx1"/>
+                      </a:solidFill>
+                      <a:prstDash val="solid"/>
+                      <a:round/>
+                      <a:headEnd type="none" w="med" len="med"/>
+                      <a:tailEnd type="none" w="med" len="med"/>
+                    </a:lnB>
+                  </a:tcPr>
+                </a:tc>
+                <a:tc>
+                  <a:txBody>
+                    <a:bodyPr/>
+                    <a:lstStyle/>
+                    <a:p>
+                      <a:pPr algn="ctr" latinLnBrk="1"/>
+                      <a:r>
+                        <a:rPr lang="pt-BR" altLang="ko-KR" sz="1400" dirty="0"/>
+                        <a:t>r2 : </a:t>
+                      </a:r>
+                      <a:r>
+                        <a:rPr lang="en-US" altLang="ko-KR" sz="1400" dirty="0"/>
+                        <a:t>0.5920753404002524</a:t>
+                      </a:r>
+                      <a:r>
+                        <a:rPr lang="pt-BR" altLang="ko-KR" sz="1400" dirty="0"/>
+                        <a:t> </a:t>
+                      </a:r>
+                    </a:p>
+                    <a:p>
+                      <a:pPr algn="ctr" latinLnBrk="1"/>
+                      <a:r>
+                        <a:rPr lang="pt-BR" altLang="ko-KR" sz="1400" dirty="0"/>
+                        <a:t>mse : </a:t>
+                      </a:r>
+                      <a:r>
+                        <a:rPr lang="en-US" altLang="ko-KR" sz="1400" dirty="0"/>
+                        <a:t>0.3712760283068737</a:t>
+                      </a:r>
+                      <a:r>
+                        <a:rPr lang="pt-BR" altLang="ko-KR" sz="1400" dirty="0"/>
+                        <a:t> </a:t>
+                      </a:r>
+                    </a:p>
+                    <a:p>
+                      <a:pPr algn="ctr" latinLnBrk="1"/>
+                      <a:r>
+                        <a:rPr lang="pt-BR" altLang="ko-KR" sz="1400" dirty="0"/>
+                        <a:t>mae : </a:t>
+                      </a:r>
+                      <a:r>
+                        <a:rPr lang="en-US" altLang="ko-KR" sz="1400" dirty="0"/>
+                        <a:t>0.47554510619905266</a:t>
+                      </a:r>
+                      <a:r>
+                        <a:rPr lang="pt-BR" altLang="ko-KR" sz="1400" dirty="0"/>
+                        <a:t> </a:t>
+                      </a:r>
+                    </a:p>
+                    <a:p>
+                      <a:pPr algn="ctr" latinLnBrk="1"/>
+                      <a:r>
+                        <a:rPr lang="pt-BR" altLang="ko-KR" sz="1400" dirty="0"/>
+                        <a:t>rmse : </a:t>
+                      </a:r>
+                      <a:r>
+                        <a:rPr lang="en-US" altLang="ko-KR" sz="1400" dirty="0"/>
+                        <a:t>0.6093242390606775</a:t>
+                      </a:r>
+                      <a:endParaRPr lang="ko-KR" altLang="en-US" sz="1400" b="0" dirty="0"/>
+                    </a:p>
+                  </a:txBody>
+                  <a:tcPr>
+                    <a:lnB w="12700" cap="flat" cmpd="sng" algn="ctr">
+                      <a:solidFill>
+                        <a:schemeClr val="tx1"/>
+                      </a:solidFill>
+                      <a:prstDash val="solid"/>
+                      <a:round/>
+                      <a:headEnd type="none" w="med" len="med"/>
+                      <a:tailEnd type="none" w="med" len="med"/>
+                    </a:lnB>
+                  </a:tcPr>
+                </a:tc>
+                <a:extLst>
+                  <a:ext uri="{0D108BD9-81ED-4DB2-BD59-A6C34878D82A}">
+                    <a16:rowId xmlns:a16="http://schemas.microsoft.com/office/drawing/2014/main" val="1317434033"/>
+                  </a:ext>
+                </a:extLst>
+              </a:tr>
+              <a:tr h="370840">
+                <a:tc>
+                  <a:txBody>
+                    <a:bodyPr/>
+                    <a:lstStyle/>
+                    <a:p>
+                      <a:pPr algn="l" latinLnBrk="1"/>
+                      <a:r>
+                        <a:rPr lang="en-US" altLang="ko-KR" sz="1400" b="0" dirty="0"/>
+                        <a:t>testdata_250716</a:t>
+                      </a:r>
+                      <a:endParaRPr lang="ko-KR" altLang="en-US" sz="1400" b="0" dirty="0"/>
+                    </a:p>
+                  </a:txBody>
+                  <a:tcPr>
+                    <a:lnT w="12700" cap="flat" cmpd="sng" algn="ctr">
+                      <a:solidFill>
+                        <a:schemeClr val="tx1"/>
+                      </a:solidFill>
+                      <a:prstDash val="solid"/>
+                      <a:round/>
+                      <a:headEnd type="none" w="med" len="med"/>
+                      <a:tailEnd type="none" w="med" len="med"/>
+                    </a:lnT>
+                  </a:tcPr>
+                </a:tc>
+                <a:tc>
+                  <a:txBody>
+                    <a:bodyPr/>
+                    <a:lstStyle/>
+                    <a:p>
+                      <a:pPr algn="ctr" latinLnBrk="1"/>
+                      <a:r>
+                        <a:rPr lang="pt-BR" altLang="ko-KR" sz="1400" dirty="0"/>
+                        <a:t>r2 : </a:t>
+                      </a:r>
+                      <a:r>
+                        <a:rPr lang="en-US" altLang="ko-KR" sz="1400" dirty="0"/>
+                        <a:t>0.7620351947859629</a:t>
+                      </a:r>
+                      <a:r>
+                        <a:rPr lang="pt-BR" altLang="ko-KR" sz="1400" dirty="0"/>
+                        <a:t> </a:t>
+                      </a:r>
+                    </a:p>
+                    <a:p>
+                      <a:pPr algn="ctr" latinLnBrk="1"/>
+                      <a:r>
+                        <a:rPr lang="pt-BR" altLang="ko-KR" sz="1400" dirty="0"/>
+                        <a:t>mse : </a:t>
+                      </a:r>
+                      <a:r>
+                        <a:rPr lang="en-US" altLang="ko-KR" sz="1400" dirty="0"/>
+                        <a:t>0.10988884198110321</a:t>
+                      </a:r>
+                      <a:r>
+                        <a:rPr lang="pt-BR" altLang="ko-KR" sz="1400" dirty="0"/>
+                        <a:t> </a:t>
+                      </a:r>
+                    </a:p>
+                    <a:p>
+                      <a:pPr algn="ctr" latinLnBrk="1"/>
+                      <a:r>
+                        <a:rPr lang="pt-BR" altLang="ko-KR" sz="1400" dirty="0"/>
+                        <a:t>mae : </a:t>
+                      </a:r>
+                      <a:r>
+                        <a:rPr lang="en-US" altLang="ko-KR" sz="1400" dirty="0"/>
+                        <a:t>0.25544776280721027</a:t>
+                      </a:r>
+                      <a:r>
+                        <a:rPr lang="pt-BR" altLang="ko-KR" sz="1400" dirty="0"/>
+                        <a:t> </a:t>
+                      </a:r>
+                    </a:p>
+                    <a:p>
+                      <a:pPr algn="ctr" latinLnBrk="1"/>
+                      <a:r>
+                        <a:rPr lang="pt-BR" altLang="ko-KR" sz="1400" dirty="0"/>
+                        <a:t>rmse : </a:t>
+                      </a:r>
+                      <a:r>
+                        <a:rPr lang="en-US" altLang="ko-KR" sz="1400" dirty="0"/>
+                        <a:t>0.331494859660151</a:t>
+                      </a:r>
+                      <a:r>
+                        <a:rPr lang="pt-BR" altLang="ko-KR" sz="1400" dirty="0"/>
+                        <a:t> </a:t>
+                      </a:r>
+                      <a:endParaRPr lang="ko-KR" altLang="en-US" sz="1400" b="0" dirty="0"/>
+                    </a:p>
+                  </a:txBody>
+                  <a:tcPr>
+                    <a:lnT w="12700" cap="flat" cmpd="sng" algn="ctr">
+                      <a:solidFill>
+                        <a:schemeClr val="tx1"/>
+                      </a:solidFill>
+                      <a:prstDash val="solid"/>
+                      <a:round/>
+                      <a:headEnd type="none" w="med" len="med"/>
+                      <a:tailEnd type="none" w="med" len="med"/>
+                    </a:lnT>
+                  </a:tcPr>
+                </a:tc>
+                <a:extLst>
+                  <a:ext uri="{0D108BD9-81ED-4DB2-BD59-A6C34878D82A}">
+                    <a16:rowId xmlns:a16="http://schemas.microsoft.com/office/drawing/2014/main" val="3978607517"/>
+                  </a:ext>
+                </a:extLst>
+              </a:tr>
+              <a:tr h="370840">
+                <a:tc>
+                  <a:txBody>
+                    <a:bodyPr/>
+                    <a:lstStyle/>
+                    <a:p>
+                      <a:pPr algn="l" latinLnBrk="1"/>
+                      <a:r>
+                        <a:rPr lang="en-US" altLang="ko-KR" sz="1400" b="0" dirty="0"/>
+                        <a:t>testdata_250814</a:t>
+                      </a:r>
+                      <a:endParaRPr lang="ko-KR" altLang="en-US" sz="1400" b="0" dirty="0"/>
+                    </a:p>
+                  </a:txBody>
+                  <a:tcPr/>
+                </a:tc>
+                <a:tc>
+                  <a:txBody>
+                    <a:bodyPr/>
+                    <a:lstStyle/>
+                    <a:p>
+                      <a:pPr algn="ctr" latinLnBrk="1"/>
+                      <a:r>
+                        <a:rPr lang="pt-BR" altLang="ko-KR" sz="1400" dirty="0"/>
+                        <a:t>r2 : </a:t>
+                      </a:r>
+                      <a:r>
+                        <a:rPr lang="en-US" altLang="ko-KR" sz="1400" dirty="0"/>
+                        <a:t>0.5902563975559536</a:t>
+                      </a:r>
+                      <a:endParaRPr lang="pt-BR" altLang="ko-KR" sz="1400" dirty="0"/>
+                    </a:p>
+                    <a:p>
+                      <a:pPr algn="ctr" latinLnBrk="1"/>
+                      <a:r>
+                        <a:rPr lang="pt-BR" altLang="ko-KR" sz="1400" dirty="0"/>
+                        <a:t>mse : </a:t>
+                      </a:r>
+                      <a:r>
+                        <a:rPr lang="en-US" altLang="ko-KR" sz="1400" dirty="0"/>
+                        <a:t>0.14222159340008522</a:t>
+                      </a:r>
+                      <a:r>
+                        <a:rPr lang="pt-BR" altLang="ko-KR" sz="1400" dirty="0"/>
+                        <a:t> </a:t>
+                      </a:r>
+                    </a:p>
+                    <a:p>
+                      <a:pPr algn="ctr" latinLnBrk="1"/>
+                      <a:r>
+                        <a:rPr lang="pt-BR" altLang="ko-KR" sz="1400" dirty="0"/>
+                        <a:t>mae : </a:t>
+                      </a:r>
+                      <a:r>
+                        <a:rPr lang="en-US" altLang="ko-KR" sz="1400" dirty="0"/>
+                        <a:t>0.32031501584582855</a:t>
+                      </a:r>
+                      <a:r>
+                        <a:rPr lang="pt-BR" altLang="ko-KR" sz="1400" dirty="0"/>
+                        <a:t> </a:t>
+                      </a:r>
+                    </a:p>
+                    <a:p>
+                      <a:pPr algn="ctr" latinLnBrk="1"/>
+                      <a:r>
+                        <a:rPr lang="pt-BR" altLang="ko-KR" sz="1400" dirty="0"/>
+                        <a:t>rmse : </a:t>
+                      </a:r>
+                      <a:r>
+                        <a:rPr lang="en-US" altLang="ko-KR" sz="1400" dirty="0"/>
+                        <a:t>0.377122782923659</a:t>
+                      </a:r>
+                      <a:endParaRPr lang="ko-KR" altLang="en-US" sz="1400" b="0" dirty="0"/>
+                    </a:p>
+                  </a:txBody>
+                  <a:tcPr/>
+                </a:tc>
+                <a:extLst>
+                  <a:ext uri="{0D108BD9-81ED-4DB2-BD59-A6C34878D82A}">
+                    <a16:rowId xmlns:a16="http://schemas.microsoft.com/office/drawing/2014/main" val="3260621040"/>
+                  </a:ext>
+                </a:extLst>
+              </a:tr>
+            </a:tbl>
+          </a:graphicData>
+        </a:graphic>
+      </p:graphicFrame>
+      <p:sp>
+        <p:nvSpPr>
+          <p:cNvPr id="27" name="직사각형 26">
+            <a:extLst>
+              <a:ext uri="{FF2B5EF4-FFF2-40B4-BE49-F238E27FC236}">
+                <a16:creationId xmlns:a16="http://schemas.microsoft.com/office/drawing/2014/main" id="{4EF33900-A573-48EF-8975-0A2C5750C40D}"/>
+              </a:ext>
+            </a:extLst>
+          </p:cNvPr>
+          <p:cNvSpPr/>
+          <p:nvPr/>
+        </p:nvSpPr>
+        <p:spPr>
+          <a:xfrm>
+            <a:off x="2241494" y="1889775"/>
+            <a:ext cx="2887375" cy="4150360"/>
+          </a:xfrm>
+          <a:prstGeom prst="rect">
+            <a:avLst/>
+          </a:prstGeom>
+          <a:noFill/>
+          <a:ln>
+            <a:solidFill>
+              <a:srgbClr val="FF0000"/>
+            </a:solidFill>
+          </a:ln>
+        </p:spPr>
+        <p:style>
+          <a:lnRef idx="2">
+            <a:schemeClr val="accent1">
+              <a:shade val="50000"/>
+            </a:schemeClr>
+          </a:lnRef>
+          <a:fillRef idx="1">
+            <a:schemeClr val="accent1"/>
+          </a:fillRef>
+          <a:effectRef idx="0">
+            <a:schemeClr val="accent1"/>
+          </a:effectRef>
+          <a:fontRef idx="minor">
+            <a:schemeClr val="lt1"/>
+          </a:fontRef>
+        </p:style>
+        <p:txBody>
+          <a:bodyPr rtlCol="0" anchor="ctr"/>
+          <a:lstStyle/>
+          <a:p>
+            <a:pPr algn="ctr"/>
+            <a:endParaRPr lang="ko-KR" altLang="en-US" sz="1400"/>
+          </a:p>
+        </p:txBody>
+      </p:sp>
+      <p:pic>
+        <p:nvPicPr>
+          <p:cNvPr id="29" name="그림 28">
+            <a:extLst>
+              <a:ext uri="{FF2B5EF4-FFF2-40B4-BE49-F238E27FC236}">
+                <a16:creationId xmlns:a16="http://schemas.microsoft.com/office/drawing/2014/main" id="{CC287890-8D3F-4F75-B6EE-54A24D722565}"/>
+              </a:ext>
+            </a:extLst>
+          </p:cNvPr>
+          <p:cNvPicPr>
+            <a:picLocks noChangeAspect="1"/>
+          </p:cNvPicPr>
+          <p:nvPr/>
+        </p:nvPicPr>
+        <p:blipFill>
+          <a:blip r:embed="rId2">
+            <a:extLst>
+              <a:ext uri="{28A0092B-C50C-407E-A947-70E740481C1C}">
+                <a14:useLocalDpi xmlns:a14="http://schemas.microsoft.com/office/drawing/2010/main" val="0"/>
+              </a:ext>
+            </a:extLst>
+          </a:blip>
+          <a:stretch>
+            <a:fillRect/>
+          </a:stretch>
+        </p:blipFill>
+        <p:spPr>
+          <a:xfrm>
+            <a:off x="5387932" y="4348810"/>
+            <a:ext cx="3015024" cy="1587184"/>
+          </a:xfrm>
+          <a:prstGeom prst="rect">
+            <a:avLst/>
+          </a:prstGeom>
+        </p:spPr>
+      </p:pic>
+      <p:pic>
+        <p:nvPicPr>
+          <p:cNvPr id="30" name="그림 29">
+            <a:extLst>
+              <a:ext uri="{FF2B5EF4-FFF2-40B4-BE49-F238E27FC236}">
+                <a16:creationId xmlns:a16="http://schemas.microsoft.com/office/drawing/2014/main" id="{34B44F8C-A4EF-4214-B85D-838A2A05ADA5}"/>
+              </a:ext>
+            </a:extLst>
+          </p:cNvPr>
+          <p:cNvPicPr>
+            <a:picLocks noChangeAspect="1"/>
+          </p:cNvPicPr>
+          <p:nvPr/>
+        </p:nvPicPr>
+        <p:blipFill>
+          <a:blip r:embed="rId3">
+            <a:extLst>
+              <a:ext uri="{28A0092B-C50C-407E-A947-70E740481C1C}">
+                <a14:useLocalDpi xmlns:a14="http://schemas.microsoft.com/office/drawing/2010/main" val="0"/>
+              </a:ext>
+            </a:extLst>
+          </a:blip>
+          <a:stretch>
+            <a:fillRect/>
+          </a:stretch>
+        </p:blipFill>
+        <p:spPr>
+          <a:xfrm>
+            <a:off x="8513273" y="4327663"/>
+            <a:ext cx="3077057" cy="1628090"/>
+          </a:xfrm>
+          <a:prstGeom prst="rect">
+            <a:avLst/>
+          </a:prstGeom>
+        </p:spPr>
+      </p:pic>
+      <p:pic>
+        <p:nvPicPr>
+          <p:cNvPr id="31" name="그림 30">
+            <a:extLst>
+              <a:ext uri="{FF2B5EF4-FFF2-40B4-BE49-F238E27FC236}">
+                <a16:creationId xmlns:a16="http://schemas.microsoft.com/office/drawing/2014/main" id="{D1DF17EE-4843-4A32-BDAC-03BBE1594C62}"/>
+              </a:ext>
+            </a:extLst>
+          </p:cNvPr>
+          <p:cNvPicPr>
+            <a:picLocks noChangeAspect="1"/>
+          </p:cNvPicPr>
+          <p:nvPr/>
+        </p:nvPicPr>
+        <p:blipFill>
+          <a:blip r:embed="rId4">
+            <a:extLst>
+              <a:ext uri="{28A0092B-C50C-407E-A947-70E740481C1C}">
+                <a14:useLocalDpi xmlns:a14="http://schemas.microsoft.com/office/drawing/2010/main" val="0"/>
+              </a:ext>
+            </a:extLst>
+          </a:blip>
+          <a:stretch>
+            <a:fillRect/>
+          </a:stretch>
+        </p:blipFill>
+        <p:spPr>
+          <a:xfrm>
+            <a:off x="5428385" y="1985777"/>
+            <a:ext cx="2939688" cy="1555585"/>
+          </a:xfrm>
+          <a:prstGeom prst="rect">
+            <a:avLst/>
+          </a:prstGeom>
+        </p:spPr>
+      </p:pic>
+      <p:pic>
+        <p:nvPicPr>
+          <p:cNvPr id="32" name="그림 31">
+            <a:extLst>
+              <a:ext uri="{FF2B5EF4-FFF2-40B4-BE49-F238E27FC236}">
+                <a16:creationId xmlns:a16="http://schemas.microsoft.com/office/drawing/2014/main" id="{77E4CA0B-D49E-45B1-BAE8-60B9B42BF1FE}"/>
+              </a:ext>
+            </a:extLst>
+          </p:cNvPr>
+          <p:cNvPicPr>
+            <a:picLocks noChangeAspect="1"/>
+          </p:cNvPicPr>
+          <p:nvPr/>
+        </p:nvPicPr>
+        <p:blipFill>
+          <a:blip r:embed="rId5">
+            <a:extLst>
+              <a:ext uri="{28A0092B-C50C-407E-A947-70E740481C1C}">
+                <a14:useLocalDpi xmlns:a14="http://schemas.microsoft.com/office/drawing/2010/main" val="0"/>
+              </a:ext>
+            </a:extLst>
+          </a:blip>
+          <a:stretch>
+            <a:fillRect/>
+          </a:stretch>
+        </p:blipFill>
+        <p:spPr>
+          <a:xfrm>
+            <a:off x="8537695" y="1984657"/>
+            <a:ext cx="3011781" cy="1582834"/>
           </a:xfrm>
           <a:prstGeom prst="rect">
             <a:avLst/>
@@ -11894,52 +11728,6 @@
           </a:p>
         </p:txBody>
       </p:sp>
-      <p:sp>
-        <p:nvSpPr>
-          <p:cNvPr id="17" name="직사각형 16">
-            <a:extLst>
-              <a:ext uri="{FF2B5EF4-FFF2-40B4-BE49-F238E27FC236}">
-                <a16:creationId xmlns:a16="http://schemas.microsoft.com/office/drawing/2014/main" id="{E531A359-09AF-48DA-927F-80B6BA2F0E4C}"/>
-              </a:ext>
-            </a:extLst>
-          </p:cNvPr>
-          <p:cNvSpPr/>
-          <p:nvPr/>
-        </p:nvSpPr>
-        <p:spPr>
-          <a:xfrm>
-            <a:off x="3657600" y="1786468"/>
-            <a:ext cx="5364976" cy="3886199"/>
-          </a:xfrm>
-          <a:prstGeom prst="rect">
-            <a:avLst/>
-          </a:prstGeom>
-        </p:spPr>
-        <p:style>
-          <a:lnRef idx="2">
-            <a:schemeClr val="accent1">
-              <a:shade val="50000"/>
-            </a:schemeClr>
-          </a:lnRef>
-          <a:fillRef idx="1">
-            <a:schemeClr val="accent1"/>
-          </a:fillRef>
-          <a:effectRef idx="0">
-            <a:schemeClr val="accent1"/>
-          </a:effectRef>
-          <a:fontRef idx="minor">
-            <a:schemeClr val="lt1"/>
-          </a:fontRef>
-        </p:style>
-        <p:txBody>
-          <a:bodyPr rtlCol="0" anchor="ctr"/>
-          <a:lstStyle/>
-          <a:p>
-            <a:pPr algn="ctr"/>
-            <a:endParaRPr lang="ko-KR" altLang="en-US"/>
-          </a:p>
-        </p:txBody>
-      </p:sp>
     </p:spTree>
     <p:extLst>
       <p:ext uri="{BB962C8B-B14F-4D97-AF65-F5344CB8AC3E}">
@@ -12292,7 +12080,11 @@
             <a:graphicFrameLocks noGrp="1"/>
           </p:cNvGraphicFramePr>
           <p:nvPr>
-            <p:extLst/>
+            <p:extLst>
+              <p:ext uri="{D42A27DB-BD31-4B8C-83A1-F6EECF244321}">
+                <p14:modId xmlns:p14="http://schemas.microsoft.com/office/powerpoint/2010/main" val="4221624550"/>
+              </p:ext>
+            </p:extLst>
           </p:nvPr>
         </p:nvGraphicFramePr>
         <p:xfrm>
@@ -12503,82 +12295,82 @@
                       <a:pPr latinLnBrk="1"/>
                       <a:r>
                         <a:rPr lang="en-US" altLang="ko-KR" sz="800" dirty="0"/>
-                        <a:t>0.0258</a:t>
-                      </a:r>
-                      <a:endParaRPr lang="ko-KR" altLang="en-US" sz="800" dirty="0"/>
-                    </a:p>
-                  </a:txBody>
-                  <a:tcPr/>
-                </a:tc>
-                <a:tc>
-                  <a:txBody>
-                    <a:bodyPr/>
-                    <a:lstStyle/>
-                    <a:p>
-                      <a:pPr latinLnBrk="1"/>
-                      <a:r>
-                        <a:rPr lang="en-US" altLang="ko-KR" sz="800" dirty="0"/>
-                        <a:t>0.0245</a:t>
-                      </a:r>
-                      <a:endParaRPr lang="ko-KR" altLang="en-US" sz="800" dirty="0"/>
-                    </a:p>
-                  </a:txBody>
-                  <a:tcPr/>
-                </a:tc>
-                <a:tc>
-                  <a:txBody>
-                    <a:bodyPr/>
-                    <a:lstStyle/>
-                    <a:p>
-                      <a:pPr latinLnBrk="1"/>
-                      <a:r>
-                        <a:rPr lang="en-US" altLang="ko-KR" sz="800" dirty="0"/>
-                        <a:t>0.0383</a:t>
-                      </a:r>
-                      <a:endParaRPr lang="ko-KR" altLang="en-US" sz="800" dirty="0"/>
-                    </a:p>
-                  </a:txBody>
-                  <a:tcPr/>
-                </a:tc>
-                <a:tc>
-                  <a:txBody>
-                    <a:bodyPr/>
-                    <a:lstStyle/>
-                    <a:p>
-                      <a:pPr latinLnBrk="1"/>
-                      <a:r>
-                        <a:rPr lang="en-US" altLang="ko-KR" sz="800" dirty="0"/>
-                        <a:t>0.967146</a:t>
-                      </a:r>
-                      <a:endParaRPr lang="ko-KR" altLang="en-US" sz="800" dirty="0"/>
-                    </a:p>
-                  </a:txBody>
-                  <a:tcPr/>
-                </a:tc>
-                <a:tc>
-                  <a:txBody>
-                    <a:bodyPr/>
-                    <a:lstStyle/>
-                    <a:p>
-                      <a:pPr latinLnBrk="1"/>
-                      <a:r>
-                        <a:rPr lang="en-US" altLang="ko-KR" sz="800" dirty="0"/>
-                        <a:t>0.969125</a:t>
-                      </a:r>
-                      <a:endParaRPr lang="ko-KR" altLang="en-US" sz="800" dirty="0"/>
-                    </a:p>
-                  </a:txBody>
-                  <a:tcPr/>
-                </a:tc>
-                <a:tc>
-                  <a:txBody>
-                    <a:bodyPr/>
-                    <a:lstStyle/>
-                    <a:p>
-                      <a:pPr latinLnBrk="1"/>
-                      <a:r>
-                        <a:rPr lang="en-US" altLang="ko-KR" sz="800" dirty="0"/>
-                        <a:t>6.806384</a:t>
+                        <a:t>0.0319</a:t>
+                      </a:r>
+                      <a:endParaRPr lang="ko-KR" altLang="en-US" sz="800" dirty="0"/>
+                    </a:p>
+                  </a:txBody>
+                  <a:tcPr/>
+                </a:tc>
+                <a:tc>
+                  <a:txBody>
+                    <a:bodyPr/>
+                    <a:lstStyle/>
+                    <a:p>
+                      <a:pPr latinLnBrk="1"/>
+                      <a:r>
+                        <a:rPr lang="en-US" altLang="ko-KR" sz="800" dirty="0"/>
+                        <a:t>0.0145</a:t>
+                      </a:r>
+                      <a:endParaRPr lang="ko-KR" altLang="en-US" sz="800" dirty="0"/>
+                    </a:p>
+                  </a:txBody>
+                  <a:tcPr/>
+                </a:tc>
+                <a:tc>
+                  <a:txBody>
+                    <a:bodyPr/>
+                    <a:lstStyle/>
+                    <a:p>
+                      <a:pPr latinLnBrk="1"/>
+                      <a:r>
+                        <a:rPr lang="en-US" altLang="ko-KR" sz="800" dirty="0"/>
+                        <a:t>0.0653</a:t>
+                      </a:r>
+                      <a:endParaRPr lang="ko-KR" altLang="en-US" sz="800" dirty="0"/>
+                    </a:p>
+                  </a:txBody>
+                  <a:tcPr/>
+                </a:tc>
+                <a:tc>
+                  <a:txBody>
+                    <a:bodyPr/>
+                    <a:lstStyle/>
+                    <a:p>
+                      <a:pPr latinLnBrk="1"/>
+                      <a:r>
+                        <a:rPr lang="en-US" altLang="ko-KR" sz="800" dirty="0"/>
+                        <a:t>0.968229</a:t>
+                      </a:r>
+                      <a:endParaRPr lang="ko-KR" altLang="en-US" sz="800" dirty="0"/>
+                    </a:p>
+                  </a:txBody>
+                  <a:tcPr/>
+                </a:tc>
+                <a:tc>
+                  <a:txBody>
+                    <a:bodyPr/>
+                    <a:lstStyle/>
+                    <a:p>
+                      <a:pPr latinLnBrk="1"/>
+                      <a:r>
+                        <a:rPr lang="en-US" altLang="ko-KR" sz="800" dirty="0"/>
+                        <a:t>0.970063</a:t>
+                      </a:r>
+                      <a:endParaRPr lang="ko-KR" altLang="en-US" sz="800" dirty="0"/>
+                    </a:p>
+                  </a:txBody>
+                  <a:tcPr/>
+                </a:tc>
+                <a:tc>
+                  <a:txBody>
+                    <a:bodyPr/>
+                    <a:lstStyle/>
+                    <a:p>
+                      <a:pPr latinLnBrk="1"/>
+                      <a:r>
+                        <a:rPr lang="en-US" altLang="ko-KR" sz="800" dirty="0"/>
+                        <a:t>13.060085</a:t>
                       </a:r>
                       <a:endParaRPr lang="ko-KR" altLang="en-US" sz="800" dirty="0"/>
                     </a:p>
@@ -12608,7 +12400,11 @@
             <a:graphicFrameLocks noGrp="1"/>
           </p:cNvGraphicFramePr>
           <p:nvPr>
-            <p:extLst/>
+            <p:extLst>
+              <p:ext uri="{D42A27DB-BD31-4B8C-83A1-F6EECF244321}">
+                <p14:modId xmlns:p14="http://schemas.microsoft.com/office/powerpoint/2010/main" val="1536992277"/>
+              </p:ext>
+            </p:extLst>
           </p:nvPr>
         </p:nvGraphicFramePr>
         <p:xfrm>
@@ -12819,82 +12615,82 @@
                       <a:pPr latinLnBrk="1"/>
                       <a:r>
                         <a:rPr lang="en-US" altLang="ko-KR" sz="800" dirty="0"/>
-                        <a:t>0.0371</a:t>
-                      </a:r>
-                      <a:endParaRPr lang="ko-KR" altLang="en-US" sz="800" dirty="0"/>
-                    </a:p>
-                  </a:txBody>
-                  <a:tcPr/>
-                </a:tc>
-                <a:tc>
-                  <a:txBody>
-                    <a:bodyPr/>
-                    <a:lstStyle/>
-                    <a:p>
-                      <a:pPr latinLnBrk="1"/>
-                      <a:r>
-                        <a:rPr lang="en-US" altLang="ko-KR" sz="800" dirty="0"/>
-                        <a:t>0.0399</a:t>
-                      </a:r>
-                      <a:endParaRPr lang="ko-KR" altLang="en-US" sz="800" dirty="0"/>
-                    </a:p>
-                  </a:txBody>
-                  <a:tcPr/>
-                </a:tc>
-                <a:tc>
-                  <a:txBody>
-                    <a:bodyPr/>
-                    <a:lstStyle/>
-                    <a:p>
-                      <a:pPr latinLnBrk="1"/>
-                      <a:r>
-                        <a:rPr lang="en-US" altLang="ko-KR" sz="800" dirty="0"/>
-                        <a:t>0.0522</a:t>
-                      </a:r>
-                      <a:endParaRPr lang="ko-KR" altLang="en-US" sz="800" dirty="0"/>
-                    </a:p>
-                  </a:txBody>
-                  <a:tcPr/>
-                </a:tc>
-                <a:tc>
-                  <a:txBody>
-                    <a:bodyPr/>
-                    <a:lstStyle/>
-                    <a:p>
-                      <a:pPr latinLnBrk="1"/>
-                      <a:r>
-                        <a:rPr lang="en-US" altLang="ko-KR" sz="800" dirty="0"/>
-                        <a:t>0.946929</a:t>
-                      </a:r>
-                      <a:endParaRPr lang="ko-KR" altLang="en-US" sz="800" dirty="0"/>
-                    </a:p>
-                  </a:txBody>
-                  <a:tcPr/>
-                </a:tc>
-                <a:tc>
-                  <a:txBody>
-                    <a:bodyPr/>
-                    <a:lstStyle/>
-                    <a:p>
-                      <a:pPr latinLnBrk="1"/>
-                      <a:r>
-                        <a:rPr lang="en-US" altLang="ko-KR" sz="800" dirty="0"/>
-                        <a:t>0.953082</a:t>
-                      </a:r>
-                      <a:endParaRPr lang="ko-KR" altLang="en-US" sz="800" dirty="0"/>
-                    </a:p>
-                  </a:txBody>
-                  <a:tcPr/>
-                </a:tc>
-                <a:tc>
-                  <a:txBody>
-                    <a:bodyPr/>
-                    <a:lstStyle/>
-                    <a:p>
-                      <a:pPr latinLnBrk="1"/>
-                      <a:r>
-                        <a:rPr lang="en-US" altLang="ko-KR" sz="800" dirty="0"/>
-                        <a:t>8.452243</a:t>
+                        <a:t>0.0281</a:t>
+                      </a:r>
+                      <a:endParaRPr lang="ko-KR" altLang="en-US" sz="800" dirty="0"/>
+                    </a:p>
+                  </a:txBody>
+                  <a:tcPr/>
+                </a:tc>
+                <a:tc>
+                  <a:txBody>
+                    <a:bodyPr/>
+                    <a:lstStyle/>
+                    <a:p>
+                      <a:pPr latinLnBrk="1"/>
+                      <a:r>
+                        <a:rPr lang="en-US" altLang="ko-KR" sz="800" dirty="0"/>
+                        <a:t>0.0124</a:t>
+                      </a:r>
+                      <a:endParaRPr lang="ko-KR" altLang="en-US" sz="800" dirty="0"/>
+                    </a:p>
+                  </a:txBody>
+                  <a:tcPr/>
+                </a:tc>
+                <a:tc>
+                  <a:txBody>
+                    <a:bodyPr/>
+                    <a:lstStyle/>
+                    <a:p>
+                      <a:pPr latinLnBrk="1"/>
+                      <a:r>
+                        <a:rPr lang="en-US" altLang="ko-KR" sz="800" dirty="0"/>
+                        <a:t>0.0555</a:t>
+                      </a:r>
+                      <a:endParaRPr lang="ko-KR" altLang="en-US" sz="800" dirty="0"/>
+                    </a:p>
+                  </a:txBody>
+                  <a:tcPr/>
+                </a:tc>
+                <a:tc>
+                  <a:txBody>
+                    <a:bodyPr/>
+                    <a:lstStyle/>
+                    <a:p>
+                      <a:pPr latinLnBrk="1"/>
+                      <a:r>
+                        <a:rPr lang="en-US" altLang="ko-KR" sz="800" dirty="0"/>
+                        <a:t>0.968298</a:t>
+                      </a:r>
+                      <a:endParaRPr lang="ko-KR" altLang="en-US" sz="800" dirty="0"/>
+                    </a:p>
+                  </a:txBody>
+                  <a:tcPr/>
+                </a:tc>
+                <a:tc>
+                  <a:txBody>
+                    <a:bodyPr/>
+                    <a:lstStyle/>
+                    <a:p>
+                      <a:pPr latinLnBrk="1"/>
+                      <a:r>
+                        <a:rPr lang="en-US" altLang="ko-KR" sz="800" dirty="0"/>
+                        <a:t>0.969206</a:t>
+                      </a:r>
+                      <a:endParaRPr lang="ko-KR" altLang="en-US" sz="800" dirty="0"/>
+                    </a:p>
+                  </a:txBody>
+                  <a:tcPr/>
+                </a:tc>
+                <a:tc>
+                  <a:txBody>
+                    <a:bodyPr/>
+                    <a:lstStyle/>
+                    <a:p>
+                      <a:pPr latinLnBrk="1"/>
+                      <a:r>
+                        <a:rPr lang="en-US" altLang="ko-KR" sz="800" dirty="0"/>
+                        <a:t>1.881732</a:t>
                       </a:r>
                       <a:endParaRPr lang="ko-KR" altLang="en-US" sz="800" dirty="0"/>
                     </a:p>
@@ -12924,7 +12720,11 @@
             <a:graphicFrameLocks noGrp="1"/>
           </p:cNvGraphicFramePr>
           <p:nvPr>
-            <p:extLst/>
+            <p:extLst>
+              <p:ext uri="{D42A27DB-BD31-4B8C-83A1-F6EECF244321}">
+                <p14:modId xmlns:p14="http://schemas.microsoft.com/office/powerpoint/2010/main" val="2224764536"/>
+              </p:ext>
+            </p:extLst>
           </p:nvPr>
         </p:nvGraphicFramePr>
         <p:xfrm>
@@ -13135,82 +12935,82 @@
                       <a:pPr latinLnBrk="1"/>
                       <a:r>
                         <a:rPr lang="en-US" altLang="ko-KR" sz="800" dirty="0"/>
-                        <a:t>0.0416</a:t>
-                      </a:r>
-                      <a:endParaRPr lang="ko-KR" altLang="en-US" sz="800" dirty="0"/>
-                    </a:p>
-                  </a:txBody>
-                  <a:tcPr/>
-                </a:tc>
-                <a:tc>
-                  <a:txBody>
-                    <a:bodyPr/>
-                    <a:lstStyle/>
-                    <a:p>
-                      <a:pPr latinLnBrk="1"/>
-                      <a:r>
-                        <a:rPr lang="en-US" altLang="ko-KR" sz="800" dirty="0"/>
-                        <a:t>0.0481</a:t>
-                      </a:r>
-                      <a:endParaRPr lang="ko-KR" altLang="en-US" sz="800" dirty="0"/>
-                    </a:p>
-                  </a:txBody>
-                  <a:tcPr/>
-                </a:tc>
-                <a:tc>
-                  <a:txBody>
-                    <a:bodyPr/>
-                    <a:lstStyle/>
-                    <a:p>
-                      <a:pPr latinLnBrk="1"/>
-                      <a:r>
-                        <a:rPr lang="en-US" altLang="ko-KR" sz="800" dirty="0"/>
-                        <a:t>0.0583</a:t>
-                      </a:r>
-                      <a:endParaRPr lang="ko-KR" altLang="en-US" sz="800" dirty="0"/>
-                    </a:p>
-                  </a:txBody>
-                  <a:tcPr/>
-                </a:tc>
-                <a:tc>
-                  <a:txBody>
-                    <a:bodyPr/>
-                    <a:lstStyle/>
-                    <a:p>
-                      <a:pPr latinLnBrk="1"/>
-                      <a:r>
-                        <a:rPr lang="en-US" altLang="ko-KR" sz="800" dirty="0"/>
-                        <a:t>0.904372</a:t>
-                      </a:r>
-                      <a:endParaRPr lang="ko-KR" altLang="en-US" sz="800" dirty="0"/>
-                    </a:p>
-                  </a:txBody>
-                  <a:tcPr/>
-                </a:tc>
-                <a:tc>
-                  <a:txBody>
-                    <a:bodyPr/>
-                    <a:lstStyle/>
-                    <a:p>
-                      <a:pPr latinLnBrk="1"/>
-                      <a:r>
-                        <a:rPr lang="en-US" altLang="ko-KR" sz="800" dirty="0"/>
-                        <a:t>0.927073</a:t>
-                      </a:r>
-                      <a:endParaRPr lang="ko-KR" altLang="en-US" sz="800" dirty="0"/>
-                    </a:p>
-                  </a:txBody>
-                  <a:tcPr/>
-                </a:tc>
-                <a:tc>
-                  <a:txBody>
-                    <a:bodyPr/>
-                    <a:lstStyle/>
-                    <a:p>
-                      <a:pPr latinLnBrk="1"/>
-                      <a:r>
-                        <a:rPr lang="en-US" altLang="ko-KR" sz="800" dirty="0"/>
-                        <a:t>2.905314</a:t>
+                        <a:t>0.0267</a:t>
+                      </a:r>
+                      <a:endParaRPr lang="ko-KR" altLang="en-US" sz="800" dirty="0"/>
+                    </a:p>
+                  </a:txBody>
+                  <a:tcPr/>
+                </a:tc>
+                <a:tc>
+                  <a:txBody>
+                    <a:bodyPr/>
+                    <a:lstStyle/>
+                    <a:p>
+                      <a:pPr latinLnBrk="1"/>
+                      <a:r>
+                        <a:rPr lang="en-US" altLang="ko-KR" sz="800" dirty="0"/>
+                        <a:t>0.0118</a:t>
+                      </a:r>
+                      <a:endParaRPr lang="ko-KR" altLang="en-US" sz="800" dirty="0"/>
+                    </a:p>
+                  </a:txBody>
+                  <a:tcPr/>
+                </a:tc>
+                <a:tc>
+                  <a:txBody>
+                    <a:bodyPr/>
+                    <a:lstStyle/>
+                    <a:p>
+                      <a:pPr latinLnBrk="1"/>
+                      <a:r>
+                        <a:rPr lang="en-US" altLang="ko-KR" sz="800" dirty="0"/>
+                        <a:t>0.0682</a:t>
+                      </a:r>
+                      <a:endParaRPr lang="ko-KR" altLang="en-US" sz="800" dirty="0"/>
+                    </a:p>
+                  </a:txBody>
+                  <a:tcPr/>
+                </a:tc>
+                <a:tc>
+                  <a:txBody>
+                    <a:bodyPr/>
+                    <a:lstStyle/>
+                    <a:p>
+                      <a:pPr latinLnBrk="1"/>
+                      <a:r>
+                        <a:rPr lang="en-US" altLang="ko-KR" sz="800" dirty="0"/>
+                        <a:t>0.934294</a:t>
+                      </a:r>
+                      <a:endParaRPr lang="ko-KR" altLang="en-US" sz="800" dirty="0"/>
+                    </a:p>
+                  </a:txBody>
+                  <a:tcPr/>
+                </a:tc>
+                <a:tc>
+                  <a:txBody>
+                    <a:bodyPr/>
+                    <a:lstStyle/>
+                    <a:p>
+                      <a:pPr latinLnBrk="1"/>
+                      <a:r>
+                        <a:rPr lang="en-US" altLang="ko-KR" sz="800" dirty="0"/>
+                        <a:t>0.935146</a:t>
+                      </a:r>
+                      <a:endParaRPr lang="ko-KR" altLang="en-US" sz="800" dirty="0"/>
+                    </a:p>
+                  </a:txBody>
+                  <a:tcPr/>
+                </a:tc>
+                <a:tc>
+                  <a:txBody>
+                    <a:bodyPr/>
+                    <a:lstStyle/>
+                    <a:p>
+                      <a:pPr latinLnBrk="1"/>
+                      <a:r>
+                        <a:rPr lang="en-US" altLang="ko-KR" sz="800" dirty="0"/>
+                        <a:t>3.396203</a:t>
                       </a:r>
                       <a:endParaRPr lang="ko-KR" altLang="en-US" sz="800" dirty="0"/>
                     </a:p>
@@ -13255,8 +13055,8 @@
         </p:blipFill>
         <p:spPr>
           <a:xfrm>
-            <a:off x="981401" y="3747356"/>
-            <a:ext cx="5364976" cy="1780928"/>
+            <a:off x="981401" y="3751117"/>
+            <a:ext cx="5364976" cy="1773406"/>
           </a:xfrm>
           <a:prstGeom prst="rect">
             <a:avLst/>
@@ -13340,52 +13140,6 @@
               <a:rPr lang="ko-KR" altLang="en-US" sz="1200" dirty="0"/>
               <a:t>일괄 예측 수행 결과</a:t>
             </a:r>
-          </a:p>
-        </p:txBody>
-      </p:sp>
-      <p:sp>
-        <p:nvSpPr>
-          <p:cNvPr id="15" name="직사각형 14">
-            <a:extLst>
-              <a:ext uri="{FF2B5EF4-FFF2-40B4-BE49-F238E27FC236}">
-                <a16:creationId xmlns:a16="http://schemas.microsoft.com/office/drawing/2014/main" id="{B25D3E82-10F6-4FD3-927B-3A489D05470D}"/>
-              </a:ext>
-            </a:extLst>
-          </p:cNvPr>
-          <p:cNvSpPr/>
-          <p:nvPr/>
-        </p:nvSpPr>
-        <p:spPr>
-          <a:xfrm>
-            <a:off x="2019910" y="2062081"/>
-            <a:ext cx="8652933" cy="4394200"/>
-          </a:xfrm>
-          <a:prstGeom prst="rect">
-            <a:avLst/>
-          </a:prstGeom>
-        </p:spPr>
-        <p:style>
-          <a:lnRef idx="2">
-            <a:schemeClr val="accent1">
-              <a:shade val="50000"/>
-            </a:schemeClr>
-          </a:lnRef>
-          <a:fillRef idx="1">
-            <a:schemeClr val="accent1"/>
-          </a:fillRef>
-          <a:effectRef idx="0">
-            <a:schemeClr val="accent1"/>
-          </a:effectRef>
-          <a:fontRef idx="minor">
-            <a:schemeClr val="lt1"/>
-          </a:fontRef>
-        </p:style>
-        <p:txBody>
-          <a:bodyPr rtlCol="0" anchor="ctr"/>
-          <a:lstStyle/>
-          <a:p>
-            <a:pPr algn="ctr"/>
-            <a:endParaRPr lang="ko-KR" altLang="en-US"/>
           </a:p>
         </p:txBody>
       </p:sp>
@@ -13434,7 +13188,7 @@
           <p:nvPr>
             <p:extLst>
               <p:ext uri="{D42A27DB-BD31-4B8C-83A1-F6EECF244321}">
-                <p14:modId xmlns:p14="http://schemas.microsoft.com/office/powerpoint/2010/main" val="2978642942"/>
+                <p14:modId xmlns:p14="http://schemas.microsoft.com/office/powerpoint/2010/main" val="1073318457"/>
               </p:ext>
             </p:extLst>
           </p:nvPr>
@@ -13546,7 +13300,7 @@
                       </a:r>
                       <a:r>
                         <a:rPr lang="en-US" altLang="ko-KR" sz="1400" dirty="0"/>
-                        <a:t>-0.7945404436174226</a:t>
+                        <a:t>0.5988864025277925</a:t>
                       </a:r>
                     </a:p>
                     <a:p>
@@ -13557,7 +13311,7 @@
                       </a:r>
                       <a:r>
                         <a:rPr lang="en-US" altLang="ko-KR" sz="1400" dirty="0"/>
-                        <a:t>0.07120448467610142</a:t>
+                        <a:t>0.05617175010921909</a:t>
                       </a:r>
                     </a:p>
                     <a:p>
@@ -13568,7 +13322,7 @@
                       </a:r>
                       <a:r>
                         <a:rPr lang="en-US" altLang="ko-KR" sz="1400" dirty="0"/>
-                        <a:t>0.23399888343281214</a:t>
+                        <a:t>0.18513488743040302</a:t>
                       </a:r>
                     </a:p>
                     <a:p>
@@ -13579,7 +13333,7 @@
                       </a:r>
                       <a:r>
                         <a:rPr lang="en-US" altLang="ko-KR" sz="1400" dirty="0"/>
-                        <a:t>0.26684168466733493</a:t>
+                        <a:t>0.23700580184716807</a:t>
                       </a:r>
                       <a:endParaRPr lang="pt-BR" altLang="ko-KR" sz="1400" dirty="0"/>
                     </a:p>
@@ -13630,7 +13384,7 @@
                       </a:r>
                       <a:r>
                         <a:rPr lang="en-US" altLang="ko-KR" sz="1400" dirty="0"/>
-                        <a:t>0.857466599365075</a:t>
+                        <a:t>0.6995342686744681</a:t>
                       </a:r>
                       <a:r>
                         <a:rPr lang="pt-BR" altLang="ko-KR" sz="1400" dirty="0"/>
@@ -13645,7 +13399,7 @@
                       </a:r>
                       <a:r>
                         <a:rPr lang="en-US" altLang="ko-KR" sz="1400" dirty="0"/>
-                        <a:t>0.03988668540781691</a:t>
+                        <a:t>0.27347138924702724</a:t>
                       </a:r>
                       <a:r>
                         <a:rPr lang="pt-BR" altLang="ko-KR" sz="1400" dirty="0"/>
@@ -13660,7 +13414,7 @@
                       </a:r>
                       <a:r>
                         <a:rPr lang="en-US" altLang="ko-KR" sz="1400" dirty="0"/>
-                        <a:t>0.14282773759629994</a:t>
+                        <a:t>0.43939690192540487</a:t>
                       </a:r>
                       <a:r>
                         <a:rPr lang="pt-BR" altLang="ko-KR" sz="1400" dirty="0"/>
@@ -13675,7 +13429,7 @@
                       </a:r>
                       <a:r>
                         <a:rPr lang="en-US" altLang="ko-KR" sz="1400" dirty="0"/>
-                        <a:t>0.199716512606787</a:t>
+                        <a:t>0.5229449198979059</a:t>
                       </a:r>
                       <a:endParaRPr lang="ko-KR" altLang="en-US" sz="1400" b="0" dirty="0"/>
                     </a:p>
@@ -13736,7 +13490,7 @@
                       </a:r>
                       <a:r>
                         <a:rPr lang="en-US" altLang="ko-KR" sz="1400" dirty="0"/>
-                        <a:t>0.8885925911762368</a:t>
+                        <a:t>0.8985794355496304</a:t>
                       </a:r>
                       <a:r>
                         <a:rPr lang="pt-BR" altLang="ko-KR" sz="1400" dirty="0"/>
@@ -13751,7 +13505,7 @@
                       </a:r>
                       <a:r>
                         <a:rPr lang="en-US" altLang="ko-KR" sz="1400" dirty="0"/>
-                        <a:t>0.011176638825219534</a:t>
+                        <a:t>0.04683460804422999</a:t>
                       </a:r>
                       <a:r>
                         <a:rPr lang="pt-BR" altLang="ko-KR" sz="1400" dirty="0"/>
@@ -13766,7 +13520,7 @@
                       </a:r>
                       <a:r>
                         <a:rPr lang="en-US" altLang="ko-KR" sz="1400" dirty="0"/>
-                        <a:t>0.07951597525013816</a:t>
+                        <a:t>0.16922600640190966</a:t>
                       </a:r>
                       <a:r>
                         <a:rPr lang="pt-BR" altLang="ko-KR" sz="1400" dirty="0"/>
@@ -13781,7 +13535,7 @@
                       </a:r>
                       <a:r>
                         <a:rPr lang="en-US" altLang="ko-KR" sz="1400" dirty="0"/>
-                        <a:t>0.1057196236524683</a:t>
+                        <a:t>0.2164130496163066</a:t>
                       </a:r>
                       <a:r>
                         <a:rPr lang="pt-BR" altLang="ko-KR" sz="1400" dirty="0"/>
@@ -13836,7 +13590,7 @@
                       </a:r>
                       <a:r>
                         <a:rPr lang="en-US" altLang="ko-KR" sz="1400" dirty="0"/>
-                        <a:t>0.7262170094360034</a:t>
+                        <a:t>0.6443384065170401</a:t>
                       </a:r>
                       <a:endParaRPr lang="pt-BR" altLang="ko-KR" sz="1400" dirty="0"/>
                     </a:p>
@@ -13848,7 +13602,7 @@
                       </a:r>
                       <a:r>
                         <a:rPr lang="en-US" altLang="ko-KR" sz="1400" dirty="0"/>
-                        <a:t>0.019302271215992088</a:t>
+                        <a:t>0.12344978233862086</a:t>
                       </a:r>
                       <a:r>
                         <a:rPr lang="pt-BR" altLang="ko-KR" sz="1400" dirty="0"/>
@@ -13863,7 +13617,7 @@
                       </a:r>
                       <a:r>
                         <a:rPr lang="en-US" altLang="ko-KR" sz="1400" dirty="0"/>
-                        <a:t>0.11494690630171034</a:t>
+                        <a:t>0.2827947984801398</a:t>
                       </a:r>
                       <a:r>
                         <a:rPr lang="pt-BR" altLang="ko-KR" sz="1400" dirty="0"/>
@@ -13878,7 +13632,7 @@
                       </a:r>
                       <a:r>
                         <a:rPr lang="en-US" altLang="ko-KR" sz="1400" dirty="0"/>
-                        <a:t>0.13893261393924786</a:t>
+                        <a:t>0.3513542120689901</a:t>
                       </a:r>
                       <a:endParaRPr lang="ko-KR" altLang="en-US" sz="1400" b="0" dirty="0"/>
                     </a:p>
@@ -13975,8 +13729,8 @@
         </p:blipFill>
         <p:spPr>
           <a:xfrm>
-            <a:off x="5377268" y="4342368"/>
-            <a:ext cx="3036353" cy="1600069"/>
+            <a:off x="5380586" y="4342368"/>
+            <a:ext cx="3029716" cy="1600069"/>
           </a:xfrm>
           <a:prstGeom prst="rect">
             <a:avLst/>
@@ -14011,8 +13765,8 @@
         </p:blipFill>
         <p:spPr>
           <a:xfrm>
-            <a:off x="8508143" y="4327663"/>
-            <a:ext cx="3087318" cy="1628090"/>
+            <a:off x="8508143" y="4331287"/>
+            <a:ext cx="3087318" cy="1620841"/>
           </a:xfrm>
           <a:prstGeom prst="rect">
             <a:avLst/>
@@ -14047,8 +13801,8 @@
         </p:blipFill>
         <p:spPr>
           <a:xfrm>
-            <a:off x="5402950" y="1970948"/>
-            <a:ext cx="2990558" cy="1585244"/>
+            <a:off x="5402950" y="1974868"/>
+            <a:ext cx="2990558" cy="1577403"/>
           </a:xfrm>
           <a:prstGeom prst="rect">
             <a:avLst/>
@@ -14083,8 +13837,8 @@
         </p:blipFill>
         <p:spPr>
           <a:xfrm>
-            <a:off x="8535827" y="1978310"/>
-            <a:ext cx="3015518" cy="1595529"/>
+            <a:off x="8535827" y="1990718"/>
+            <a:ext cx="3015518" cy="1570713"/>
           </a:xfrm>
           <a:prstGeom prst="rect">
             <a:avLst/>
@@ -14421,52 +14175,6 @@
           </a:p>
         </p:txBody>
       </p:sp>
-      <p:sp>
-        <p:nvSpPr>
-          <p:cNvPr id="17" name="직사각형 16">
-            <a:extLst>
-              <a:ext uri="{FF2B5EF4-FFF2-40B4-BE49-F238E27FC236}">
-                <a16:creationId xmlns:a16="http://schemas.microsoft.com/office/drawing/2014/main" id="{715EF76E-A927-4EB5-B152-C05511BE59E8}"/>
-              </a:ext>
-            </a:extLst>
-          </p:cNvPr>
-          <p:cNvSpPr/>
-          <p:nvPr/>
-        </p:nvSpPr>
-        <p:spPr>
-          <a:xfrm>
-            <a:off x="1076483" y="1654619"/>
-            <a:ext cx="8652933" cy="4394200"/>
-          </a:xfrm>
-          <a:prstGeom prst="rect">
-            <a:avLst/>
-          </a:prstGeom>
-        </p:spPr>
-        <p:style>
-          <a:lnRef idx="2">
-            <a:schemeClr val="accent1">
-              <a:shade val="50000"/>
-            </a:schemeClr>
-          </a:lnRef>
-          <a:fillRef idx="1">
-            <a:schemeClr val="accent1"/>
-          </a:fillRef>
-          <a:effectRef idx="0">
-            <a:schemeClr val="accent1"/>
-          </a:effectRef>
-          <a:fontRef idx="minor">
-            <a:schemeClr val="lt1"/>
-          </a:fontRef>
-        </p:style>
-        <p:txBody>
-          <a:bodyPr rtlCol="0" anchor="ctr"/>
-          <a:lstStyle/>
-          <a:p>
-            <a:pPr algn="ctr"/>
-            <a:endParaRPr lang="ko-KR" altLang="en-US"/>
-          </a:p>
-        </p:txBody>
-      </p:sp>
     </p:spTree>
     <p:extLst>
       <p:ext uri="{BB962C8B-B14F-4D97-AF65-F5344CB8AC3E}">
@@ -14511,7 +14219,7 @@
         </p:nvSpPr>
         <p:spPr>
           <a:xfrm>
-            <a:off x="2308225" y="3105834"/>
+            <a:off x="2308225" y="2551837"/>
             <a:ext cx="7575550" cy="1754326"/>
           </a:xfrm>
           <a:prstGeom prst="rect">
@@ -14572,7 +14280,7 @@
                 </a:solidFill>
                 <a:latin typeface="+mj-ea"/>
               </a:rPr>
-              <a:t>도</a:t>
+              <a:t>은</a:t>
             </a:r>
             <a:endParaRPr lang="en-US" altLang="ko-KR" sz="3600" b="1" dirty="0">
               <a:solidFill>
@@ -14599,7 +14307,7 @@
                 </a:solidFill>
                 <a:latin typeface="+mj-ea"/>
               </a:rPr>
-              <a:t> = ?? </a:t>
+              <a:t> = 18 </a:t>
             </a:r>
             <a:r>
               <a:rPr lang="ko-KR" altLang="en-US" sz="3600" b="1" dirty="0">
@@ -15055,8 +14763,8 @@
         </p:nvSpPr>
         <p:spPr>
           <a:xfrm>
-            <a:off x="-605366" y="2644170"/>
-            <a:ext cx="13402732" cy="1569660"/>
+            <a:off x="-605366" y="3136612"/>
+            <a:ext cx="13402732" cy="584775"/>
           </a:xfrm>
           <a:prstGeom prst="rect">
             <a:avLst/>
@@ -15088,56 +14796,7 @@
               <a:rPr lang="en-US" altLang="ko-KR" sz="3200" b="1" dirty="0">
                 <a:latin typeface="+mj-ea"/>
               </a:rPr>
-              <a:t>18 , 18(MAE) , 36 </a:t>
-            </a:r>
-            <a:r>
-              <a:rPr lang="en-US" altLang="ko-KR" sz="3200" b="1" dirty="0">
-                <a:latin typeface="+mj-ea"/>
-                <a:ea typeface="+mj-ea"/>
-              </a:rPr>
-              <a:t>?</a:t>
-            </a:r>
-          </a:p>
-          <a:p>
-            <a:pPr algn="ctr"/>
-            <a:endParaRPr lang="en-US" altLang="ko-KR" sz="3200" b="1" dirty="0">
-              <a:latin typeface="+mj-ea"/>
-              <a:ea typeface="+mj-ea"/>
-            </a:endParaRPr>
-          </a:p>
-          <a:p>
-            <a:pPr algn="ctr"/>
-            <a:r>
-              <a:rPr lang="en-US" altLang="ko-KR" sz="3200" b="1" dirty="0" err="1">
-                <a:latin typeface="+mj-ea"/>
-                <a:ea typeface="+mj-ea"/>
-              </a:rPr>
-              <a:t>learning_rate</a:t>
-            </a:r>
-            <a:r>
-              <a:rPr lang="en-US" altLang="ko-KR" sz="3200" b="1" dirty="0">
-                <a:latin typeface="+mj-ea"/>
-                <a:ea typeface="+mj-ea"/>
-              </a:rPr>
-              <a:t> = 0.0005 </a:t>
-            </a:r>
-            <a:r>
-              <a:rPr lang="en-US" altLang="ko-KR" sz="3200" b="1" dirty="0">
-                <a:latin typeface="+mj-ea"/>
-              </a:rPr>
-              <a:t>+ </a:t>
-            </a:r>
-            <a:r>
-              <a:rPr lang="en-US" altLang="ko-KR" sz="3200" b="1" dirty="0" err="1">
-                <a:latin typeface="+mj-ea"/>
-              </a:rPr>
-              <a:t>num_of_layer</a:t>
-            </a:r>
-            <a:r>
-              <a:rPr lang="en-US" altLang="ko-KR" sz="3200" b="1" dirty="0">
-                <a:latin typeface="+mj-ea"/>
-              </a:rPr>
-              <a:t> = 18(MAE)?</a:t>
+              <a:t>12</a:t>
             </a:r>
             <a:endParaRPr lang="en-US" altLang="ko-KR" sz="3200" b="1" dirty="0">
               <a:latin typeface="+mj-ea"/>
@@ -19523,56 +19182,6 @@
           </a:p>
         </p:txBody>
       </p:sp>
-      <p:sp>
-        <p:nvSpPr>
-          <p:cNvPr id="5" name="직사각형 4">
-            <a:extLst>
-              <a:ext uri="{FF2B5EF4-FFF2-40B4-BE49-F238E27FC236}">
-                <a16:creationId xmlns:a16="http://schemas.microsoft.com/office/drawing/2014/main" id="{B29A3842-858E-4903-88F6-45C8E8616D50}"/>
-              </a:ext>
-            </a:extLst>
-          </p:cNvPr>
-          <p:cNvSpPr/>
-          <p:nvPr/>
-        </p:nvSpPr>
-        <p:spPr>
-          <a:xfrm>
-            <a:off x="1481667" y="711200"/>
-            <a:ext cx="3987800" cy="1625600"/>
-          </a:xfrm>
-          <a:prstGeom prst="rect">
-            <a:avLst/>
-          </a:prstGeom>
-        </p:spPr>
-        <p:style>
-          <a:lnRef idx="2">
-            <a:schemeClr val="accent1">
-              <a:shade val="50000"/>
-            </a:schemeClr>
-          </a:lnRef>
-          <a:fillRef idx="1">
-            <a:schemeClr val="accent1"/>
-          </a:fillRef>
-          <a:effectRef idx="0">
-            <a:schemeClr val="accent1"/>
-          </a:effectRef>
-          <a:fontRef idx="minor">
-            <a:schemeClr val="lt1"/>
-          </a:fontRef>
-        </p:style>
-        <p:txBody>
-          <a:bodyPr rtlCol="0" anchor="ctr"/>
-          <a:lstStyle/>
-          <a:p>
-            <a:pPr algn="ctr"/>
-            <a:r>
-              <a:rPr lang="ko-KR" altLang="en-US"/>
-              <a:t>이거하는중</a:t>
-            </a:r>
-            <a:endParaRPr lang="ko-KR" altLang="en-US" dirty="0"/>
-          </a:p>
-        </p:txBody>
-      </p:sp>
     </p:spTree>
     <p:extLst>
       <p:ext uri="{BB962C8B-B14F-4D97-AF65-F5344CB8AC3E}">
@@ -19737,7 +19346,11 @@
             <a:graphicFrameLocks noGrp="1"/>
           </p:cNvGraphicFramePr>
           <p:nvPr>
-            <p:extLst/>
+            <p:extLst>
+              <p:ext uri="{D42A27DB-BD31-4B8C-83A1-F6EECF244321}">
+                <p14:modId xmlns:p14="http://schemas.microsoft.com/office/powerpoint/2010/main" val="3335657461"/>
+              </p:ext>
+            </p:extLst>
           </p:nvPr>
         </p:nvGraphicFramePr>
         <p:xfrm>
@@ -19948,82 +19561,82 @@
                       <a:pPr latinLnBrk="1"/>
                       <a:r>
                         <a:rPr lang="en-US" altLang="ko-KR" sz="800" dirty="0"/>
-                        <a:t>0.0254</a:t>
-                      </a:r>
-                      <a:endParaRPr lang="ko-KR" altLang="en-US" sz="800" dirty="0"/>
-                    </a:p>
-                  </a:txBody>
-                  <a:tcPr/>
-                </a:tc>
-                <a:tc>
-                  <a:txBody>
-                    <a:bodyPr/>
-                    <a:lstStyle/>
-                    <a:p>
-                      <a:pPr latinLnBrk="1"/>
-                      <a:r>
-                        <a:rPr lang="en-US" altLang="ko-KR" sz="800" dirty="0"/>
-                        <a:t>0.0242</a:t>
-                      </a:r>
-                      <a:endParaRPr lang="ko-KR" altLang="en-US" sz="800" dirty="0"/>
-                    </a:p>
-                  </a:txBody>
-                  <a:tcPr/>
-                </a:tc>
-                <a:tc>
-                  <a:txBody>
-                    <a:bodyPr/>
-                    <a:lstStyle/>
-                    <a:p>
-                      <a:pPr latinLnBrk="1"/>
-                      <a:r>
-                        <a:rPr lang="en-US" altLang="ko-KR" sz="800" dirty="0"/>
-                        <a:t>0.0372</a:t>
-                      </a:r>
-                      <a:endParaRPr lang="ko-KR" altLang="en-US" sz="800" dirty="0"/>
-                    </a:p>
-                  </a:txBody>
-                  <a:tcPr/>
-                </a:tc>
-                <a:tc>
-                  <a:txBody>
-                    <a:bodyPr/>
-                    <a:lstStyle/>
-                    <a:p>
-                      <a:pPr latinLnBrk="1"/>
-                      <a:r>
-                        <a:rPr lang="en-US" altLang="ko-KR" sz="800" dirty="0"/>
-                        <a:t>0.968928</a:t>
-                      </a:r>
-                      <a:endParaRPr lang="ko-KR" altLang="en-US" sz="800" dirty="0"/>
-                    </a:p>
-                  </a:txBody>
-                  <a:tcPr/>
-                </a:tc>
-                <a:tc>
-                  <a:txBody>
-                    <a:bodyPr/>
-                    <a:lstStyle/>
-                    <a:p>
-                      <a:pPr latinLnBrk="1"/>
-                      <a:r>
-                        <a:rPr lang="en-US" altLang="ko-KR" sz="800" dirty="0"/>
-                        <a:t>0.970272</a:t>
-                      </a:r>
-                      <a:endParaRPr lang="ko-KR" altLang="en-US" sz="800" dirty="0"/>
-                    </a:p>
-                  </a:txBody>
-                  <a:tcPr/>
-                </a:tc>
-                <a:tc>
-                  <a:txBody>
-                    <a:bodyPr/>
-                    <a:lstStyle/>
-                    <a:p>
-                      <a:pPr latinLnBrk="1"/>
-                      <a:r>
-                        <a:rPr lang="en-US" altLang="ko-KR" sz="800" dirty="0"/>
-                        <a:t>22.160994</a:t>
+                        <a:t>0.0311</a:t>
+                      </a:r>
+                      <a:endParaRPr lang="ko-KR" altLang="en-US" sz="800" dirty="0"/>
+                    </a:p>
+                  </a:txBody>
+                  <a:tcPr/>
+                </a:tc>
+                <a:tc>
+                  <a:txBody>
+                    <a:bodyPr/>
+                    <a:lstStyle/>
+                    <a:p>
+                      <a:pPr latinLnBrk="1"/>
+                      <a:r>
+                        <a:rPr lang="en-US" altLang="ko-KR" sz="800" dirty="0"/>
+                        <a:t>0.0144</a:t>
+                      </a:r>
+                      <a:endParaRPr lang="ko-KR" altLang="en-US" sz="800" dirty="0"/>
+                    </a:p>
+                  </a:txBody>
+                  <a:tcPr/>
+                </a:tc>
+                <a:tc>
+                  <a:txBody>
+                    <a:bodyPr/>
+                    <a:lstStyle/>
+                    <a:p>
+                      <a:pPr latinLnBrk="1"/>
+                      <a:r>
+                        <a:rPr lang="en-US" altLang="ko-KR" sz="800" dirty="0"/>
+                        <a:t>0.0599</a:t>
+                      </a:r>
+                      <a:endParaRPr lang="ko-KR" altLang="en-US" sz="800" dirty="0"/>
+                    </a:p>
+                  </a:txBody>
+                  <a:tcPr/>
+                </a:tc>
+                <a:tc>
+                  <a:txBody>
+                    <a:bodyPr/>
+                    <a:lstStyle/>
+                    <a:p>
+                      <a:pPr latinLnBrk="1"/>
+                      <a:r>
+                        <a:rPr lang="en-US" altLang="ko-KR" sz="800" dirty="0"/>
+                        <a:t>0.973250</a:t>
+                      </a:r>
+                      <a:endParaRPr lang="ko-KR" altLang="en-US" sz="800" dirty="0"/>
+                    </a:p>
+                  </a:txBody>
+                  <a:tcPr/>
+                </a:tc>
+                <a:tc>
+                  <a:txBody>
+                    <a:bodyPr/>
+                    <a:lstStyle/>
+                    <a:p>
+                      <a:pPr latinLnBrk="1"/>
+                      <a:r>
+                        <a:rPr lang="en-US" altLang="ko-KR" sz="800" dirty="0"/>
+                        <a:t>0.975980</a:t>
+                      </a:r>
+                      <a:endParaRPr lang="ko-KR" altLang="en-US" sz="800" dirty="0"/>
+                    </a:p>
+                  </a:txBody>
+                  <a:tcPr/>
+                </a:tc>
+                <a:tc>
+                  <a:txBody>
+                    <a:bodyPr/>
+                    <a:lstStyle/>
+                    <a:p>
+                      <a:pPr latinLnBrk="1"/>
+                      <a:r>
+                        <a:rPr lang="en-US" altLang="ko-KR" sz="800" dirty="0"/>
+                        <a:t>1.864916</a:t>
                       </a:r>
                       <a:endParaRPr lang="ko-KR" altLang="en-US" sz="800" dirty="0"/>
                     </a:p>
@@ -20053,7 +19666,11 @@
             <a:graphicFrameLocks noGrp="1"/>
           </p:cNvGraphicFramePr>
           <p:nvPr>
-            <p:extLst/>
+            <p:extLst>
+              <p:ext uri="{D42A27DB-BD31-4B8C-83A1-F6EECF244321}">
+                <p14:modId xmlns:p14="http://schemas.microsoft.com/office/powerpoint/2010/main" val="4139947031"/>
+              </p:ext>
+            </p:extLst>
           </p:nvPr>
         </p:nvGraphicFramePr>
         <p:xfrm>
@@ -20264,82 +19881,82 @@
                       <a:pPr latinLnBrk="1"/>
                       <a:r>
                         <a:rPr lang="en-US" altLang="ko-KR" sz="800" dirty="0"/>
-                        <a:t>0.0385</a:t>
-                      </a:r>
-                      <a:endParaRPr lang="ko-KR" altLang="en-US" sz="800" dirty="0"/>
-                    </a:p>
-                  </a:txBody>
-                  <a:tcPr/>
-                </a:tc>
-                <a:tc>
-                  <a:txBody>
-                    <a:bodyPr/>
-                    <a:lstStyle/>
-                    <a:p>
-                      <a:pPr latinLnBrk="1"/>
-                      <a:r>
-                        <a:rPr lang="en-US" altLang="ko-KR" sz="800" dirty="0"/>
-                        <a:t>0.0421</a:t>
-                      </a:r>
-                      <a:endParaRPr lang="ko-KR" altLang="en-US" sz="800" dirty="0"/>
-                    </a:p>
-                  </a:txBody>
-                  <a:tcPr/>
-                </a:tc>
-                <a:tc>
-                  <a:txBody>
-                    <a:bodyPr/>
-                    <a:lstStyle/>
-                    <a:p>
-                      <a:pPr latinLnBrk="1"/>
-                      <a:r>
-                        <a:rPr lang="en-US" altLang="ko-KR" sz="800" dirty="0"/>
-                        <a:t>0.0542</a:t>
-                      </a:r>
-                      <a:endParaRPr lang="ko-KR" altLang="en-US" sz="800" dirty="0"/>
-                    </a:p>
-                  </a:txBody>
-                  <a:tcPr/>
-                </a:tc>
-                <a:tc>
-                  <a:txBody>
-                    <a:bodyPr/>
-                    <a:lstStyle/>
-                    <a:p>
-                      <a:pPr latinLnBrk="1"/>
-                      <a:r>
-                        <a:rPr lang="en-US" altLang="ko-KR" sz="800" dirty="0"/>
-                        <a:t>0.942801</a:t>
-                      </a:r>
-                      <a:endParaRPr lang="ko-KR" altLang="en-US" sz="800" dirty="0"/>
-                    </a:p>
-                  </a:txBody>
-                  <a:tcPr/>
-                </a:tc>
-                <a:tc>
-                  <a:txBody>
-                    <a:bodyPr/>
-                    <a:lstStyle/>
-                    <a:p>
-                      <a:pPr latinLnBrk="1"/>
-                      <a:r>
-                        <a:rPr lang="en-US" altLang="ko-KR" sz="800" dirty="0"/>
-                        <a:t>0.951583</a:t>
-                      </a:r>
-                      <a:endParaRPr lang="ko-KR" altLang="en-US" sz="800" dirty="0"/>
-                    </a:p>
-                  </a:txBody>
-                  <a:tcPr/>
-                </a:tc>
-                <a:tc>
-                  <a:txBody>
-                    <a:bodyPr/>
-                    <a:lstStyle/>
-                    <a:p>
-                      <a:pPr latinLnBrk="1"/>
-                      <a:r>
-                        <a:rPr lang="en-US" altLang="ko-KR" sz="800" dirty="0"/>
-                        <a:t>4.037687</a:t>
+                        <a:t>0.0289</a:t>
+                      </a:r>
+                      <a:endParaRPr lang="ko-KR" altLang="en-US" sz="800" dirty="0"/>
+                    </a:p>
+                  </a:txBody>
+                  <a:tcPr/>
+                </a:tc>
+                <a:tc>
+                  <a:txBody>
+                    <a:bodyPr/>
+                    <a:lstStyle/>
+                    <a:p>
+                      <a:pPr latinLnBrk="1"/>
+                      <a:r>
+                        <a:rPr lang="en-US" altLang="ko-KR" sz="800" dirty="0"/>
+                        <a:t>0.0129</a:t>
+                      </a:r>
+                      <a:endParaRPr lang="ko-KR" altLang="en-US" sz="800" dirty="0"/>
+                    </a:p>
+                  </a:txBody>
+                  <a:tcPr/>
+                </a:tc>
+                <a:tc>
+                  <a:txBody>
+                    <a:bodyPr/>
+                    <a:lstStyle/>
+                    <a:p>
+                      <a:pPr latinLnBrk="1"/>
+                      <a:r>
+                        <a:rPr lang="en-US" altLang="ko-KR" sz="800" dirty="0"/>
+                        <a:t>0.0543</a:t>
+                      </a:r>
+                      <a:endParaRPr lang="ko-KR" altLang="en-US" sz="800" dirty="0"/>
+                    </a:p>
+                  </a:txBody>
+                  <a:tcPr/>
+                </a:tc>
+                <a:tc>
+                  <a:txBody>
+                    <a:bodyPr/>
+                    <a:lstStyle/>
+                    <a:p>
+                      <a:pPr latinLnBrk="1"/>
+                      <a:r>
+                        <a:rPr lang="en-US" altLang="ko-KR" sz="800" dirty="0"/>
+                        <a:t>0.969639</a:t>
+                      </a:r>
+                      <a:endParaRPr lang="ko-KR" altLang="en-US" sz="800" dirty="0"/>
+                    </a:p>
+                  </a:txBody>
+                  <a:tcPr/>
+                </a:tc>
+                <a:tc>
+                  <a:txBody>
+                    <a:bodyPr/>
+                    <a:lstStyle/>
+                    <a:p>
+                      <a:pPr latinLnBrk="1"/>
+                      <a:r>
+                        <a:rPr lang="en-US" altLang="ko-KR" sz="800" dirty="0"/>
+                        <a:t>0.970755</a:t>
+                      </a:r>
+                      <a:endParaRPr lang="ko-KR" altLang="en-US" sz="800" dirty="0"/>
+                    </a:p>
+                  </a:txBody>
+                  <a:tcPr/>
+                </a:tc>
+                <a:tc>
+                  <a:txBody>
+                    <a:bodyPr/>
+                    <a:lstStyle/>
+                    <a:p>
+                      <a:pPr latinLnBrk="1"/>
+                      <a:r>
+                        <a:rPr lang="en-US" altLang="ko-KR" sz="800" dirty="0"/>
+                        <a:t>0.981632</a:t>
                       </a:r>
                       <a:endParaRPr lang="ko-KR" altLang="en-US" sz="800" dirty="0"/>
                     </a:p>
@@ -20369,7 +19986,11 @@
             <a:graphicFrameLocks noGrp="1"/>
           </p:cNvGraphicFramePr>
           <p:nvPr>
-            <p:extLst/>
+            <p:extLst>
+              <p:ext uri="{D42A27DB-BD31-4B8C-83A1-F6EECF244321}">
+                <p14:modId xmlns:p14="http://schemas.microsoft.com/office/powerpoint/2010/main" val="943742243"/>
+              </p:ext>
+            </p:extLst>
           </p:nvPr>
         </p:nvGraphicFramePr>
         <p:xfrm>
@@ -20580,82 +20201,82 @@
                       <a:pPr latinLnBrk="1"/>
                       <a:r>
                         <a:rPr lang="en-US" altLang="ko-KR" sz="800" dirty="0"/>
-                        <a:t>0.0453</a:t>
-                      </a:r>
-                      <a:endParaRPr lang="ko-KR" altLang="en-US" sz="800" dirty="0"/>
-                    </a:p>
-                  </a:txBody>
-                  <a:tcPr/>
-                </a:tc>
-                <a:tc>
-                  <a:txBody>
-                    <a:bodyPr/>
-                    <a:lstStyle/>
-                    <a:p>
-                      <a:pPr latinLnBrk="1"/>
-                      <a:r>
-                        <a:rPr lang="en-US" altLang="ko-KR" sz="800" dirty="0"/>
-                        <a:t>0.0528</a:t>
-                      </a:r>
-                      <a:endParaRPr lang="ko-KR" altLang="en-US" sz="800" dirty="0"/>
-                    </a:p>
-                  </a:txBody>
-                  <a:tcPr/>
-                </a:tc>
-                <a:tc>
-                  <a:txBody>
-                    <a:bodyPr/>
-                    <a:lstStyle/>
-                    <a:p>
-                      <a:pPr latinLnBrk="1"/>
-                      <a:r>
-                        <a:rPr lang="en-US" altLang="ko-KR" sz="800" dirty="0"/>
-                        <a:t>0.0625</a:t>
-                      </a:r>
-                      <a:endParaRPr lang="ko-KR" altLang="en-US" sz="800" dirty="0"/>
-                    </a:p>
-                  </a:txBody>
-                  <a:tcPr/>
-                </a:tc>
-                <a:tc>
-                  <a:txBody>
-                    <a:bodyPr/>
-                    <a:lstStyle/>
-                    <a:p>
-                      <a:pPr latinLnBrk="1"/>
-                      <a:r>
-                        <a:rPr lang="en-US" altLang="ko-KR" sz="800" dirty="0"/>
-                        <a:t>0.890020</a:t>
-                      </a:r>
-                      <a:endParaRPr lang="ko-KR" altLang="en-US" sz="800" dirty="0"/>
-                    </a:p>
-                  </a:txBody>
-                  <a:tcPr/>
-                </a:tc>
-                <a:tc>
-                  <a:txBody>
-                    <a:bodyPr/>
-                    <a:lstStyle/>
-                    <a:p>
-                      <a:pPr latinLnBrk="1"/>
-                      <a:r>
-                        <a:rPr lang="en-US" altLang="ko-KR" sz="800" dirty="0"/>
-                        <a:t>0.919186</a:t>
-                      </a:r>
-                      <a:endParaRPr lang="ko-KR" altLang="en-US" sz="800" dirty="0"/>
-                    </a:p>
-                  </a:txBody>
-                  <a:tcPr/>
-                </a:tc>
-                <a:tc>
-                  <a:txBody>
-                    <a:bodyPr/>
-                    <a:lstStyle/>
-                    <a:p>
-                      <a:pPr latinLnBrk="1"/>
-                      <a:r>
-                        <a:rPr lang="en-US" altLang="ko-KR" sz="800" dirty="0"/>
-                        <a:t>5.456180</a:t>
+                        <a:t>0.0271</a:t>
+                      </a:r>
+                      <a:endParaRPr lang="ko-KR" altLang="en-US" sz="800" dirty="0"/>
+                    </a:p>
+                  </a:txBody>
+                  <a:tcPr/>
+                </a:tc>
+                <a:tc>
+                  <a:txBody>
+                    <a:bodyPr/>
+                    <a:lstStyle/>
+                    <a:p>
+                      <a:pPr latinLnBrk="1"/>
+                      <a:r>
+                        <a:rPr lang="en-US" altLang="ko-KR" sz="800" dirty="0"/>
+                        <a:t>0.0120</a:t>
+                      </a:r>
+                      <a:endParaRPr lang="ko-KR" altLang="en-US" sz="800" dirty="0"/>
+                    </a:p>
+                  </a:txBody>
+                  <a:tcPr/>
+                </a:tc>
+                <a:tc>
+                  <a:txBody>
+                    <a:bodyPr/>
+                    <a:lstStyle/>
+                    <a:p>
+                      <a:pPr latinLnBrk="1"/>
+                      <a:r>
+                        <a:rPr lang="en-US" altLang="ko-KR" sz="800" dirty="0"/>
+                        <a:t>0.0682</a:t>
+                      </a:r>
+                      <a:endParaRPr lang="ko-KR" altLang="en-US" sz="800" dirty="0"/>
+                    </a:p>
+                  </a:txBody>
+                  <a:tcPr/>
+                </a:tc>
+                <a:tc>
+                  <a:txBody>
+                    <a:bodyPr/>
+                    <a:lstStyle/>
+                    <a:p>
+                      <a:pPr latinLnBrk="1"/>
+                      <a:r>
+                        <a:rPr lang="en-US" altLang="ko-KR" sz="800" dirty="0"/>
+                        <a:t>0.934381</a:t>
+                      </a:r>
+                      <a:endParaRPr lang="ko-KR" altLang="en-US" sz="800" dirty="0"/>
+                    </a:p>
+                  </a:txBody>
+                  <a:tcPr/>
+                </a:tc>
+                <a:tc>
+                  <a:txBody>
+                    <a:bodyPr/>
+                    <a:lstStyle/>
+                    <a:p>
+                      <a:pPr latinLnBrk="1"/>
+                      <a:r>
+                        <a:rPr lang="en-US" altLang="ko-KR" sz="800" dirty="0"/>
+                        <a:t>0.936408</a:t>
+                      </a:r>
+                      <a:endParaRPr lang="ko-KR" altLang="en-US" sz="800" dirty="0"/>
+                    </a:p>
+                  </a:txBody>
+                  <a:tcPr/>
+                </a:tc>
+                <a:tc>
+                  <a:txBody>
+                    <a:bodyPr/>
+                    <a:lstStyle/>
+                    <a:p>
+                      <a:pPr latinLnBrk="1"/>
+                      <a:r>
+                        <a:rPr lang="en-US" altLang="ko-KR" sz="800" dirty="0"/>
+                        <a:t>5.370354</a:t>
                       </a:r>
                       <a:endParaRPr lang="ko-KR" altLang="en-US" sz="800" dirty="0"/>
                     </a:p>
@@ -20700,8 +20321,8 @@
         </p:blipFill>
         <p:spPr>
           <a:xfrm>
-            <a:off x="970536" y="3740036"/>
-            <a:ext cx="5386707" cy="1795569"/>
+            <a:off x="1006010" y="3740036"/>
+            <a:ext cx="5315758" cy="1795569"/>
           </a:xfrm>
           <a:prstGeom prst="rect">
             <a:avLst/>
@@ -20785,52 +20406,6 @@
               <a:rPr lang="ko-KR" altLang="en-US" sz="1200" dirty="0"/>
               <a:t>일괄 예측 수행 결과</a:t>
             </a:r>
-          </a:p>
-        </p:txBody>
-      </p:sp>
-      <p:sp>
-        <p:nvSpPr>
-          <p:cNvPr id="15" name="직사각형 14">
-            <a:extLst>
-              <a:ext uri="{FF2B5EF4-FFF2-40B4-BE49-F238E27FC236}">
-                <a16:creationId xmlns:a16="http://schemas.microsoft.com/office/drawing/2014/main" id="{4212A2A5-F2A3-4199-9235-2795F0AAF780}"/>
-              </a:ext>
-            </a:extLst>
-          </p:cNvPr>
-          <p:cNvSpPr/>
-          <p:nvPr/>
-        </p:nvSpPr>
-        <p:spPr>
-          <a:xfrm>
-            <a:off x="2446867" y="1651000"/>
-            <a:ext cx="7332133" cy="3852333"/>
-          </a:xfrm>
-          <a:prstGeom prst="rect">
-            <a:avLst/>
-          </a:prstGeom>
-        </p:spPr>
-        <p:style>
-          <a:lnRef idx="2">
-            <a:schemeClr val="accent1">
-              <a:shade val="50000"/>
-            </a:schemeClr>
-          </a:lnRef>
-          <a:fillRef idx="1">
-            <a:schemeClr val="accent1"/>
-          </a:fillRef>
-          <a:effectRef idx="0">
-            <a:schemeClr val="accent1"/>
-          </a:effectRef>
-          <a:fontRef idx="minor">
-            <a:schemeClr val="lt1"/>
-          </a:fontRef>
-        </p:style>
-        <p:txBody>
-          <a:bodyPr rtlCol="0" anchor="ctr"/>
-          <a:lstStyle/>
-          <a:p>
-            <a:pPr algn="ctr"/>
-            <a:endParaRPr lang="ko-KR" altLang="en-US"/>
           </a:p>
         </p:txBody>
       </p:sp>
